--- a/docs/presentations/research-incubator-initiative.pptx
+++ b/docs/presentations/research-incubator-initiative.pptx
@@ -41,6 +41,8 @@
     <p:sldId id="377" r:id="rId68"/>
     <p:sldId id="378" r:id="rId69"/>
     <p:sldId id="379" r:id="rId70"/>
+    <p:sldId id="380" r:id="rId71"/>
+    <p:sldId id="381" r:id="rId72"/>
   </p:sldIdLst>
   <p:sldSz cx="6858000" cy="3857625"/>
   <p:notesSz cx="6858000" cy="9144000"/>
@@ -142,14 +144,14 @@
   <p:extLst>
     <p:ext uri="{521415D9-36F7-43E2-AB2F-B90AF26B5E84}">
       <ns0:sectionLst xmlns:ns0="http://schemas.microsoft.com/office/powerpoint/2010/main">
-        <ns0:section name="Default Section" id="{54EE93C0-CAAE-4E50-8F8E-6E6BD1F2DFCF}">
+        <ns0:section name="Default Section" id="{8F762C06-98B4-4E8E-A27D-60C8A4334689}">
           <ns0:sldIdLst>
             <ns0:sldId id="350"/>
             <ns0:sldId id="351"/>
             <ns0:sldId id="352"/>
           </ns0:sldIdLst>
         </ns0:section>
-        <ns0:section name="القسم الأول: حاضنة الأبحاث" id="{72775849-4B81-4B93-A627-C2F97E840800}">
+        <ns0:section name="القسم الأول: حاضنة الأبحاث" id="{5E977A6A-945B-491F-9F22-0ECE97280F8A}">
           <ns0:sldIdLst>
             <ns0:sldId id="353"/>
             <ns0:sldId id="354"/>
@@ -160,12 +162,12 @@
             <ns0:sldId id="359"/>
             <ns0:sldId id="360"/>
             <ns0:sldId id="361"/>
+            <ns0:sldId id="362"/>
+            <ns0:sldId id="363"/>
           </ns0:sldIdLst>
         </ns0:section>
-        <ns0:section name="القسم الثاني: ملتقى البحث والابتكار الحكومي" id="{6E115090-9839-4ABA-95A2-07DD5DCB1119}">
+        <ns0:section name="القسم الثاني: ملتقى البحث والابتكار الحكومي" id="{B080CB8C-3C1C-4555-B643-BBC1F6E316BB}">
           <ns0:sldIdLst>
-            <ns0:sldId id="362"/>
-            <ns0:sldId id="363"/>
             <ns0:sldId id="364"/>
             <ns0:sldId id="365"/>
             <ns0:sldId id="366"/>
@@ -173,23 +175,25 @@
             <ns0:sldId id="368"/>
             <ns0:sldId id="369"/>
             <ns0:sldId id="370"/>
-          </ns0:sldIdLst>
-        </ns0:section>
-        <ns0:section name="القسم الثالث: القرار المطلوب" id="{F0DC6B65-5612-401D-A11C-25C3031AAF2B}">
-          <ns0:sldIdLst>
             <ns0:sldId id="371"/>
             <ns0:sldId id="372"/>
           </ns0:sldIdLst>
         </ns0:section>
-        <ns0:section name="الملحق" id="{762369C1-B046-48FA-B3A3-A56FAB9D6B5B}">
+        <ns0:section name="القسم الثالث: القرار المطلوب" id="{7A6990B5-60CE-4444-B8ED-76CCE3959532}">
           <ns0:sldIdLst>
             <ns0:sldId id="373"/>
             <ns0:sldId id="374"/>
+          </ns0:sldIdLst>
+        </ns0:section>
+        <ns0:section name="الملحق" id="{F65BE849-4F8F-4D87-87A0-F2A5BFCB0779}">
+          <ns0:sldIdLst>
             <ns0:sldId id="375"/>
             <ns0:sldId id="376"/>
             <ns0:sldId id="377"/>
             <ns0:sldId id="378"/>
             <ns0:sldId id="379"/>
+            <ns0:sldId id="380"/>
+            <ns0:sldId id="381"/>
           </ns0:sldIdLst>
         </ns0:section>
       </ns0:sectionLst>
@@ -2590,7 +2594,46 @@
       </p:sp>
       <p:sp>
         <p:nvSpPr>
-          <p:cNvPr id="1004" name="accent-bar"/>
+          <p:cNvPr id="1004" name="identity"/>
+          <p:cNvSpPr txBox="1"/>
+          <p:nvPr/>
+        </p:nvSpPr>
+        <p:spPr>
+          <a:xfrm>
+            <a:off x="3566160" y="1956816"/>
+            <a:ext cx="2624328" cy="146304"/>
+          </a:xfrm>
+          <a:prstGeom prst="rect">
+            <a:avLst/>
+          </a:prstGeom>
+          <a:noFill/>
+        </p:spPr>
+        <p:txBody>
+          <a:bodyPr wrap="square" lIns="0" tIns="0" rIns="0" bIns="0" anchor="t"/>
+          <a:lstStyle/>
+          <a:p>
+            <a:pPr algn="r" rtl="1">
+              <a:spcAft>
+                <a:spcPts val="0"/>
+              </a:spcAft>
+            </a:pPr>
+            <a:r>
+              <a:rPr lang="ar-SA" sz="740" b="0" dirty="0">
+                <a:solidFill>
+                  <a:srgbClr val="1CC182"/>
+                </a:solidFill>
+                <a:latin typeface="DiodrumArabic-Semibold"/>
+                <a:ea typeface="DiodrumArabic-Semibold"/>
+                <a:cs typeface="DiodrumArabic-Semibold"/>
+              </a:rPr>
+              <a:t>مركز المعرفة الذي يربط البحث بالتطبيق</a:t>
+            </a:r>
+          </a:p>
+        </p:txBody>
+      </p:sp>
+      <p:sp>
+        <p:nvSpPr>
+          <p:cNvPr id="1005" name="accent-bar"/>
           <p:cNvSpPr/>
           <p:nvPr/>
         </p:nvSpPr>
@@ -2639,7 +2682,7 @@
       </p:sp>
       <p:sp>
         <p:nvSpPr>
-          <p:cNvPr id="1005" name="subtitle"/>
+          <p:cNvPr id="1006" name="subtitle"/>
           <p:cNvSpPr txBox="1"/>
           <p:nvPr/>
         </p:nvSpPr>
@@ -2681,7 +2724,7 @@
       </p:sp>
       <p:sp>
         <p:nvSpPr>
-          <p:cNvPr id="1006" name="srcline"/>
+          <p:cNvPr id="1007" name="srcline"/>
           <p:cNvSpPr txBox="1"/>
           <p:nvPr/>
         </p:nvSpPr>
@@ -2747,7 +2790,7 @@
       </p:grpSpPr>
       <p:sp>
         <p:nvSpPr>
-          <p:cNvPr id="1007" name="title"/>
+          <p:cNvPr id="1008" name="title"/>
           <p:cNvSpPr txBox="1"/>
           <p:nvPr/>
         </p:nvSpPr>
@@ -2786,7 +2829,7 @@
       </p:sp>
       <p:sp>
         <p:nvSpPr>
-          <p:cNvPr id="1008" name="s0"/>
+          <p:cNvPr id="1009" name="s0"/>
           <p:cNvSpPr/>
           <p:nvPr/>
         </p:nvSpPr>
@@ -2837,7 +2880,7 @@
       </p:sp>
       <p:sp>
         <p:nvSpPr>
-          <p:cNvPr id="1009" name="s0-badge"/>
+          <p:cNvPr id="1010" name="s0-badge"/>
           <p:cNvSpPr/>
           <p:nvPr/>
         </p:nvSpPr>
@@ -2901,7 +2944,7 @@
       </p:sp>
       <p:sp>
         <p:nvSpPr>
-          <p:cNvPr id="1010" name="s0-num"/>
+          <p:cNvPr id="1011" name="s0-num"/>
           <p:cNvSpPr txBox="1"/>
           <p:nvPr/>
         </p:nvSpPr>
@@ -2940,7 +2983,7 @@
       </p:sp>
       <p:sp>
         <p:nvSpPr>
-          <p:cNvPr id="1011" name="s0-title"/>
+          <p:cNvPr id="1012" name="s0-title"/>
           <p:cNvSpPr txBox="1"/>
           <p:nvPr/>
         </p:nvSpPr>
@@ -2982,7 +3025,7 @@
       </p:sp>
       <p:sp>
         <p:nvSpPr>
-          <p:cNvPr id="1012" name="s0-desc"/>
+          <p:cNvPr id="1013" name="s0-desc"/>
           <p:cNvSpPr txBox="1"/>
           <p:nvPr/>
         </p:nvSpPr>
@@ -3024,7 +3067,7 @@
       </p:sp>
       <p:sp>
         <p:nvSpPr>
-          <p:cNvPr id="1013" name="s0-page-pill"/>
+          <p:cNvPr id="1014" name="s0-page-pill"/>
           <p:cNvSpPr/>
           <p:nvPr/>
         </p:nvSpPr>
@@ -3073,7 +3116,7 @@
       </p:sp>
       <p:sp>
         <p:nvSpPr>
-          <p:cNvPr id="1014" name="s0-page"/>
+          <p:cNvPr id="1015" name="s0-page"/>
           <p:cNvSpPr txBox="1"/>
           <p:nvPr/>
         </p:nvSpPr>
@@ -3112,7 +3155,7 @@
       </p:sp>
       <p:sp>
         <p:nvSpPr>
-          <p:cNvPr id="1015" name="s1"/>
+          <p:cNvPr id="1016" name="s1"/>
           <p:cNvSpPr/>
           <p:nvPr/>
         </p:nvSpPr>
@@ -3163,7 +3206,7 @@
       </p:sp>
       <p:sp>
         <p:nvSpPr>
-          <p:cNvPr id="1016" name="s1-badge"/>
+          <p:cNvPr id="1017" name="s1-badge"/>
           <p:cNvSpPr/>
           <p:nvPr/>
         </p:nvSpPr>
@@ -3227,7 +3270,7 @@
       </p:sp>
       <p:sp>
         <p:nvSpPr>
-          <p:cNvPr id="1017" name="s1-num"/>
+          <p:cNvPr id="1018" name="s1-num"/>
           <p:cNvSpPr txBox="1"/>
           <p:nvPr/>
         </p:nvSpPr>
@@ -3266,7 +3309,7 @@
       </p:sp>
       <p:sp>
         <p:nvSpPr>
-          <p:cNvPr id="1018" name="s1-title"/>
+          <p:cNvPr id="1019" name="s1-title"/>
           <p:cNvSpPr txBox="1"/>
           <p:nvPr/>
         </p:nvSpPr>
@@ -3308,7 +3351,7 @@
       </p:sp>
       <p:sp>
         <p:nvSpPr>
-          <p:cNvPr id="1019" name="s1-desc"/>
+          <p:cNvPr id="1020" name="s1-desc"/>
           <p:cNvSpPr txBox="1"/>
           <p:nvPr/>
         </p:nvSpPr>
@@ -3350,7 +3393,7 @@
       </p:sp>
       <p:sp>
         <p:nvSpPr>
-          <p:cNvPr id="1020" name="s1-page-pill"/>
+          <p:cNvPr id="1021" name="s1-page-pill"/>
           <p:cNvSpPr/>
           <p:nvPr/>
         </p:nvSpPr>
@@ -3399,7 +3442,7 @@
       </p:sp>
       <p:sp>
         <p:nvSpPr>
-          <p:cNvPr id="1021" name="s1-page"/>
+          <p:cNvPr id="1022" name="s1-page"/>
           <p:cNvSpPr txBox="1"/>
           <p:nvPr/>
         </p:nvSpPr>
@@ -3431,14 +3474,14 @@
                 <a:ea typeface="DiodrumArabic-Semibold"/>
                 <a:cs typeface="DiodrumArabic-Semibold"/>
               </a:rPr>
-              <a:t>صفحة 14</a:t>
-            </a:r>
-          </a:p>
-        </p:txBody>
-      </p:sp>
-      <p:sp>
-        <p:nvSpPr>
-          <p:cNvPr id="1022" name="s2"/>
+              <a:t>صفحة 16</a:t>
+            </a:r>
+          </a:p>
+        </p:txBody>
+      </p:sp>
+      <p:sp>
+        <p:nvSpPr>
+          <p:cNvPr id="1023" name="s2"/>
           <p:cNvSpPr/>
           <p:nvPr/>
         </p:nvSpPr>
@@ -3489,7 +3532,7 @@
       </p:sp>
       <p:sp>
         <p:nvSpPr>
-          <p:cNvPr id="1023" name="s2-badge"/>
+          <p:cNvPr id="1024" name="s2-badge"/>
           <p:cNvSpPr/>
           <p:nvPr/>
         </p:nvSpPr>
@@ -3553,7 +3596,7 @@
       </p:sp>
       <p:sp>
         <p:nvSpPr>
-          <p:cNvPr id="1024" name="s2-num"/>
+          <p:cNvPr id="1025" name="s2-num"/>
           <p:cNvSpPr txBox="1"/>
           <p:nvPr/>
         </p:nvSpPr>
@@ -3592,7 +3635,7 @@
       </p:sp>
       <p:sp>
         <p:nvSpPr>
-          <p:cNvPr id="1025" name="s2-title"/>
+          <p:cNvPr id="1026" name="s2-title"/>
           <p:cNvSpPr txBox="1"/>
           <p:nvPr/>
         </p:nvSpPr>
@@ -3634,7 +3677,7 @@
       </p:sp>
       <p:sp>
         <p:nvSpPr>
-          <p:cNvPr id="1026" name="s2-desc"/>
+          <p:cNvPr id="1027" name="s2-desc"/>
           <p:cNvSpPr txBox="1"/>
           <p:nvPr/>
         </p:nvSpPr>
@@ -3676,7 +3719,7 @@
       </p:sp>
       <p:sp>
         <p:nvSpPr>
-          <p:cNvPr id="1027" name="s2-page-pill"/>
+          <p:cNvPr id="1028" name="s2-page-pill"/>
           <p:cNvSpPr/>
           <p:nvPr/>
         </p:nvSpPr>
@@ -3725,7 +3768,7 @@
       </p:sp>
       <p:sp>
         <p:nvSpPr>
-          <p:cNvPr id="1028" name="s2-page"/>
+          <p:cNvPr id="1029" name="s2-page"/>
           <p:cNvSpPr txBox="1"/>
           <p:nvPr/>
         </p:nvSpPr>
@@ -3757,14 +3800,14 @@
                 <a:ea typeface="DiodrumArabic-Semibold"/>
                 <a:cs typeface="DiodrumArabic-Semibold"/>
               </a:rPr>
-              <a:t>صفحة 23</a:t>
-            </a:r>
-          </a:p>
-        </p:txBody>
-      </p:sp>
-      <p:sp>
-        <p:nvSpPr>
-          <p:cNvPr id="1029" name="notice"/>
+              <a:t>صفحة 25</a:t>
+            </a:r>
+          </a:p>
+        </p:txBody>
+      </p:sp>
+      <p:sp>
+        <p:nvSpPr>
+          <p:cNvPr id="1030" name="notice"/>
           <p:cNvSpPr txBox="1"/>
           <p:nvPr/>
         </p:nvSpPr>
@@ -3799,7 +3842,7 @@
                 <a:ea typeface="DiodrumArabic-Regular"/>
                 <a:cs typeface="DiodrumArabic-Regular"/>
               </a:rPr>
-              <a:t>الملحق (صفحة 24) يضم التفاصيل التشغيلية الداعمة — الأجندة الكاملة، نطاق الأبحاث بالتفصيل، ومنظومة الشراكات.</a:t>
+              <a:t>الملحق (صفحة 26) يضم التفاصيل التشغيلية الداعمة — الأجندة الكاملة، نطاق الأبحاث بالتفصيل، ومنظومة الشراكات.</a:t>
             </a:r>
           </a:p>
         </p:txBody>
@@ -3831,7 +3874,7 @@
       </p:grpSpPr>
       <p:sp>
         <p:nvSpPr>
-          <p:cNvPr id="1030" name="kicker"/>
+          <p:cNvPr id="1031" name="kicker"/>
           <p:cNvSpPr txBox="1"/>
           <p:nvPr/>
         </p:nvSpPr>
@@ -3870,7 +3913,7 @@
       </p:sp>
       <p:sp>
         <p:nvSpPr>
-          <p:cNvPr id="1031" name="title"/>
+          <p:cNvPr id="1032" name="title"/>
           <p:cNvSpPr txBox="1"/>
           <p:nvPr/>
         </p:nvSpPr>
@@ -3912,7 +3955,7 @@
       </p:sp>
       <p:sp>
         <p:nvSpPr>
-          <p:cNvPr id="1032" name="Slide Number Placeholder"/>
+          <p:cNvPr id="1033" name="Slide Number Placeholder"/>
           <p:cNvSpPr>
             <a:spLocks noGrp="1"/>
           </p:cNvSpPr>
@@ -3937,7 +3980,7 @@
       </p:sp>
       <p:sp>
         <p:nvSpPr>
-          <p:cNvPr id="1033" name="ctx"/>
+          <p:cNvPr id="1034" name="ctx"/>
           <p:cNvSpPr/>
           <p:nvPr/>
         </p:nvSpPr>
@@ -3995,7 +4038,7 @@
       </p:sp>
       <p:sp>
         <p:nvSpPr>
-          <p:cNvPr id="1034" name="ctx-bar"/>
+          <p:cNvPr id="1035" name="ctx-bar"/>
           <p:cNvSpPr/>
           <p:nvPr/>
         </p:nvSpPr>
@@ -4044,7 +4087,7 @@
       </p:sp>
       <p:sp>
         <p:nvSpPr>
-          <p:cNvPr id="1035" name="ctx-eye"/>
+          <p:cNvPr id="1036" name="ctx-eye"/>
           <p:cNvSpPr txBox="1"/>
           <p:nvPr/>
         </p:nvSpPr>
@@ -4083,7 +4126,7 @@
       </p:sp>
       <p:sp>
         <p:nvSpPr>
-          <p:cNvPr id="1036" name="ctx-3 مراحل تأسيس"/>
+          <p:cNvPr id="1037" name="ctx-3 مراحل تأسيس"/>
           <p:cNvSpPr txBox="1"/>
           <p:nvPr/>
         </p:nvSpPr>
@@ -4122,7 +4165,7 @@
       </p:sp>
       <p:sp>
         <p:nvSpPr>
-          <p:cNvPr id="1037" name="ctx-3 مراحل تأسيس-d"/>
+          <p:cNvPr id="1038" name="ctx-3 مراحل تأسيس-d"/>
           <p:cNvSpPr txBox="1"/>
           <p:nvPr/>
         </p:nvSpPr>
@@ -4164,7 +4207,7 @@
       </p:sp>
       <p:sp>
         <p:nvSpPr>
-          <p:cNvPr id="1038" name="ctx-5 مراحل عمل"/>
+          <p:cNvPr id="1039" name="ctx-5 مراحل عمل"/>
           <p:cNvSpPr txBox="1"/>
           <p:nvPr/>
         </p:nvSpPr>
@@ -4203,7 +4246,7 @@
       </p:sp>
       <p:sp>
         <p:nvSpPr>
-          <p:cNvPr id="1039" name="ctx-5 مراحل عمل-d"/>
+          <p:cNvPr id="1040" name="ctx-5 مراحل عمل-d"/>
           <p:cNvSpPr txBox="1"/>
           <p:nvPr/>
         </p:nvSpPr>
@@ -4245,7 +4288,7 @@
       </p:sp>
       <p:sp>
         <p:nvSpPr>
-          <p:cNvPr id="1040" name="ctx-5 فئات شراكة"/>
+          <p:cNvPr id="1041" name="ctx-5 فئات شراكة"/>
           <p:cNvSpPr txBox="1"/>
           <p:nvPr/>
         </p:nvSpPr>
@@ -4284,7 +4327,7 @@
       </p:sp>
       <p:sp>
         <p:nvSpPr>
-          <p:cNvPr id="1041" name="ctx-5 فئات شراكة-d"/>
+          <p:cNvPr id="1042" name="ctx-5 فئات شراكة-d"/>
           <p:cNvSpPr txBox="1"/>
           <p:nvPr/>
         </p:nvSpPr>
@@ -4326,7 +4369,7 @@
       </p:sp>
       <p:sp>
         <p:nvSpPr>
-          <p:cNvPr id="1042" name="cnc"/>
+          <p:cNvPr id="1043" name="cnc"/>
           <p:cNvSpPr/>
           <p:nvPr/>
         </p:nvSpPr>
@@ -4384,7 +4427,7 @@
       </p:sp>
       <p:sp>
         <p:nvSpPr>
-          <p:cNvPr id="1043" name="cnc-bar"/>
+          <p:cNvPr id="1044" name="cnc-bar"/>
           <p:cNvSpPr/>
           <p:nvPr/>
         </p:nvSpPr>
@@ -4433,7 +4476,7 @@
       </p:sp>
       <p:sp>
         <p:nvSpPr>
-          <p:cNvPr id="1044" name="cnc-eye"/>
+          <p:cNvPr id="1045" name="cnc-eye"/>
           <p:cNvSpPr txBox="1"/>
           <p:nvPr/>
         </p:nvSpPr>
@@ -4472,7 +4515,7 @@
       </p:sp>
       <p:sp>
         <p:nvSpPr>
-          <p:cNvPr id="1045" name="cnc-body"/>
+          <p:cNvPr id="1046" name="cnc-body"/>
           <p:cNvSpPr txBox="1"/>
           <p:nvPr/>
         </p:nvSpPr>
@@ -4507,14 +4550,14 @@
                 <a:ea typeface="DiodrumArabic-Medium"/>
                 <a:cs typeface="DiodrumArabic-Medium"/>
               </a:rPr>
-              <a:t>تحوّل الحاضنة الأبحاث من نشاط منفصل إلى مسار مؤسسي متصل بالأولوية الحكومية، ينتقل عبره البحث من الفكرة إلى التطبيق، وينتهي بأثر قابل للقياس. ويأتي ملتقى البحث والابتكار الحكومي كأول أدوات تفعيل هذا المسار.</a:t>
-            </a:r>
-          </a:p>
-        </p:txBody>
-      </p:sp>
-      <p:sp>
-        <p:nvSpPr>
-          <p:cNvPr id="1046" name="dec"/>
+              <a:t>تتحوّل الحاضنة إلى مركز المعرفة الذي يربط البحث بالأولوية الحكومية بشكل مؤسسي، فينتقل البحث عبره من الفكرة إلى التطبيق، وينتهي بأثر قابل للقياس. ويأتي ملتقى البحث والابتكار الحكومي كأول أدوات تفعيل هذا المسار.</a:t>
+            </a:r>
+          </a:p>
+        </p:txBody>
+      </p:sp>
+      <p:sp>
+        <p:nvSpPr>
+          <p:cNvPr id="1047" name="dec"/>
           <p:cNvSpPr/>
           <p:nvPr/>
         </p:nvSpPr>
@@ -4578,7 +4621,7 @@
       </p:sp>
       <p:sp>
         <p:nvSpPr>
-          <p:cNvPr id="1047" name="dec-eye"/>
+          <p:cNvPr id="1048" name="dec-eye"/>
           <p:cNvSpPr txBox="1"/>
           <p:nvPr/>
         </p:nvSpPr>
@@ -4617,7 +4660,7 @@
       </p:sp>
       <p:sp>
         <p:nvSpPr>
-          <p:cNvPr id="1048" name="dec-body"/>
+          <p:cNvPr id="1049" name="dec-body"/>
           <p:cNvSpPr txBox="1"/>
           <p:nvPr/>
         </p:nvSpPr>
@@ -4684,7 +4727,7 @@
       </p:grpSpPr>
       <p:sp>
         <p:nvSpPr>
-          <p:cNvPr id="1049" name="big-num"/>
+          <p:cNvPr id="1050" name="big-num"/>
           <p:cNvSpPr txBox="1"/>
           <p:nvPr/>
         </p:nvSpPr>
@@ -4723,7 +4766,7 @@
       </p:sp>
       <p:sp>
         <p:nvSpPr>
-          <p:cNvPr id="1050" name="kicker"/>
+          <p:cNvPr id="1051" name="kicker"/>
           <p:cNvSpPr txBox="1"/>
           <p:nvPr/>
         </p:nvSpPr>
@@ -4762,7 +4805,7 @@
       </p:sp>
       <p:sp>
         <p:nvSpPr>
-          <p:cNvPr id="1051" name="title"/>
+          <p:cNvPr id="1052" name="title"/>
           <p:cNvSpPr txBox="1"/>
           <p:nvPr/>
         </p:nvSpPr>
@@ -4804,7 +4847,7 @@
       </p:sp>
       <p:sp>
         <p:nvSpPr>
-          <p:cNvPr id="1052" name="desc"/>
+          <p:cNvPr id="1053" name="desc"/>
           <p:cNvSpPr txBox="1"/>
           <p:nvPr/>
         </p:nvSpPr>
@@ -4846,7 +4889,7 @@
       </p:sp>
       <p:sp>
         <p:nvSpPr>
-          <p:cNvPr id="1053" name="prog1"/>
+          <p:cNvPr id="1054" name="prog1"/>
           <p:cNvSpPr/>
           <p:nvPr/>
         </p:nvSpPr>
@@ -4895,7 +4938,7 @@
       </p:sp>
       <p:sp>
         <p:nvSpPr>
-          <p:cNvPr id="1054" name="prog2"/>
+          <p:cNvPr id="1055" name="prog2"/>
           <p:cNvSpPr/>
           <p:nvPr/>
         </p:nvSpPr>
@@ -4946,7 +4989,7 @@
       </p:sp>
       <p:sp>
         <p:nvSpPr>
-          <p:cNvPr id="1055" name="prog3"/>
+          <p:cNvPr id="1056" name="prog3"/>
           <p:cNvSpPr/>
           <p:nvPr/>
         </p:nvSpPr>
@@ -5022,7 +5065,7 @@
       </p:grpSpPr>
       <p:sp>
         <p:nvSpPr>
-          <p:cNvPr id="1056" name="kicker"/>
+          <p:cNvPr id="1057" name="kicker"/>
           <p:cNvSpPr txBox="1"/>
           <p:nvPr/>
         </p:nvSpPr>
@@ -5061,7 +5104,7 @@
       </p:sp>
       <p:sp>
         <p:nvSpPr>
-          <p:cNvPr id="1057" name="title"/>
+          <p:cNvPr id="1058" name="title"/>
           <p:cNvSpPr txBox="1"/>
           <p:nvPr/>
         </p:nvSpPr>
@@ -5103,7 +5146,7 @@
       </p:sp>
       <p:sp>
         <p:nvSpPr>
-          <p:cNvPr id="1058" name="subtitle"/>
+          <p:cNvPr id="1059" name="subtitle"/>
           <p:cNvSpPr txBox="1"/>
           <p:nvPr/>
         </p:nvSpPr>
@@ -5145,7 +5188,7 @@
       </p:sp>
       <p:sp>
         <p:nvSpPr>
-          <p:cNvPr id="1059" name="Slide Number Placeholder"/>
+          <p:cNvPr id="1060" name="Slide Number Placeholder"/>
           <p:cNvSpPr>
             <a:spLocks noGrp="1"/>
           </p:cNvSpPr>
@@ -5170,7 +5213,7 @@
       </p:sp>
       <p:sp>
         <p:nvSpPr>
-          <p:cNvPr id="1060" name="ps0"/>
+          <p:cNvPr id="1061" name="ps0"/>
           <p:cNvSpPr/>
           <p:nvPr/>
         </p:nvSpPr>
@@ -5221,7 +5264,7 @@
       </p:sp>
       <p:sp>
         <p:nvSpPr>
-          <p:cNvPr id="1061" name="ps0-badge"/>
+          <p:cNvPr id="1062" name="ps0-badge"/>
           <p:cNvSpPr/>
           <p:nvPr/>
         </p:nvSpPr>
@@ -5268,7 +5311,7 @@
       </p:sp>
       <p:sp>
         <p:nvSpPr>
-          <p:cNvPr id="1062" name="ps0-badgenum"/>
+          <p:cNvPr id="1063" name="ps0-badgenum"/>
           <p:cNvSpPr txBox="1"/>
           <p:nvPr/>
         </p:nvSpPr>
@@ -5307,7 +5350,7 @@
       </p:sp>
       <p:sp>
         <p:nvSpPr>
-          <p:cNvPr id="1063" name="ps0-title"/>
+          <p:cNvPr id="1064" name="ps0-title"/>
           <p:cNvSpPr txBox="1"/>
           <p:nvPr/>
         </p:nvSpPr>
@@ -5349,7 +5392,7 @@
       </p:sp>
       <p:sp>
         <p:nvSpPr>
-          <p:cNvPr id="1064" name="ps0-body"/>
+          <p:cNvPr id="1065" name="ps0-body"/>
           <p:cNvSpPr txBox="1"/>
           <p:nvPr/>
         </p:nvSpPr>
@@ -5391,7 +5434,7 @@
       </p:sp>
       <p:sp>
         <p:nvSpPr>
-          <p:cNvPr id="1065" name="ps0-chev"/>
+          <p:cNvPr id="1066" name="ps0-chev"/>
           <p:cNvSpPr/>
           <p:nvPr/>
         </p:nvSpPr>
@@ -5440,7 +5483,7 @@
       </p:sp>
       <p:sp>
         <p:nvSpPr>
-          <p:cNvPr id="1066" name="ps1"/>
+          <p:cNvPr id="1067" name="ps1"/>
           <p:cNvSpPr/>
           <p:nvPr/>
         </p:nvSpPr>
@@ -5491,7 +5534,7 @@
       </p:sp>
       <p:sp>
         <p:nvSpPr>
-          <p:cNvPr id="1067" name="ps1-badge"/>
+          <p:cNvPr id="1068" name="ps1-badge"/>
           <p:cNvSpPr/>
           <p:nvPr/>
         </p:nvSpPr>
@@ -5538,7 +5581,7 @@
       </p:sp>
       <p:sp>
         <p:nvSpPr>
-          <p:cNvPr id="1068" name="ps1-badgenum"/>
+          <p:cNvPr id="1069" name="ps1-badgenum"/>
           <p:cNvSpPr txBox="1"/>
           <p:nvPr/>
         </p:nvSpPr>
@@ -5577,7 +5620,7 @@
       </p:sp>
       <p:sp>
         <p:nvSpPr>
-          <p:cNvPr id="1069" name="ps1-title"/>
+          <p:cNvPr id="1070" name="ps1-title"/>
           <p:cNvSpPr txBox="1"/>
           <p:nvPr/>
         </p:nvSpPr>
@@ -5619,7 +5662,7 @@
       </p:sp>
       <p:sp>
         <p:nvSpPr>
-          <p:cNvPr id="1070" name="ps1-body"/>
+          <p:cNvPr id="1071" name="ps1-body"/>
           <p:cNvSpPr txBox="1"/>
           <p:nvPr/>
         </p:nvSpPr>
@@ -5661,7 +5704,7 @@
       </p:sp>
       <p:sp>
         <p:nvSpPr>
-          <p:cNvPr id="1071" name="ps1-chev"/>
+          <p:cNvPr id="1072" name="ps1-chev"/>
           <p:cNvSpPr/>
           <p:nvPr/>
         </p:nvSpPr>
@@ -5710,7 +5753,7 @@
       </p:sp>
       <p:sp>
         <p:nvSpPr>
-          <p:cNvPr id="1072" name="ps2"/>
+          <p:cNvPr id="1073" name="ps2"/>
           <p:cNvSpPr/>
           <p:nvPr/>
         </p:nvSpPr>
@@ -5761,7 +5804,7 @@
       </p:sp>
       <p:sp>
         <p:nvSpPr>
-          <p:cNvPr id="1073" name="ps2-badge"/>
+          <p:cNvPr id="1074" name="ps2-badge"/>
           <p:cNvSpPr/>
           <p:nvPr/>
         </p:nvSpPr>
@@ -5808,7 +5851,7 @@
       </p:sp>
       <p:sp>
         <p:nvSpPr>
-          <p:cNvPr id="1074" name="ps2-badgenum"/>
+          <p:cNvPr id="1075" name="ps2-badgenum"/>
           <p:cNvSpPr txBox="1"/>
           <p:nvPr/>
         </p:nvSpPr>
@@ -5847,7 +5890,7 @@
       </p:sp>
       <p:sp>
         <p:nvSpPr>
-          <p:cNvPr id="1075" name="ps2-title"/>
+          <p:cNvPr id="1076" name="ps2-title"/>
           <p:cNvSpPr txBox="1"/>
           <p:nvPr/>
         </p:nvSpPr>
@@ -5889,7 +5932,7 @@
       </p:sp>
       <p:sp>
         <p:nvSpPr>
-          <p:cNvPr id="1076" name="ps2-body"/>
+          <p:cNvPr id="1077" name="ps2-body"/>
           <p:cNvSpPr txBox="1"/>
           <p:nvPr/>
         </p:nvSpPr>
@@ -5931,7 +5974,7 @@
       </p:sp>
       <p:sp>
         <p:nvSpPr>
-          <p:cNvPr id="1077" name="cb"/>
+          <p:cNvPr id="1078" name="cb"/>
           <p:cNvSpPr/>
           <p:nvPr/>
         </p:nvSpPr>
@@ -5995,7 +6038,7 @@
       </p:sp>
       <p:sp>
         <p:nvSpPr>
-          <p:cNvPr id="1078" name="cb-t"/>
+          <p:cNvPr id="1079" name="cb-t"/>
           <p:cNvSpPr txBox="1"/>
           <p:nvPr/>
         </p:nvSpPr>
@@ -6028,6 +6071,921 @@
                 <a:cs typeface="DiodrumArabic-Semibold"/>
               </a:rPr>
               <a:t>هنا يأتي دور حاضنة الأبحاث: ربط هذه العناصر في مسار واحد متكامل.</a:t>
+            </a:r>
+          </a:p>
+        </p:txBody>
+      </p:sp>
+    </p:spTree>
+  </p:cSld>
+  <p:clrMapOvr>
+    <a:masterClrMapping/>
+  </p:clrMapOvr>
+</p:sld>
+</file>
+
+<file path=ppt/slides/slide1051.xml><?xml version="1.0" encoding="utf-8"?>
+<p:sld xmlns:a="http://schemas.openxmlformats.org/drawingml/2006/main" xmlns:r="http://schemas.openxmlformats.org/officeDocument/2006/relationships" xmlns:p="http://schemas.openxmlformats.org/presentationml/2006/main">
+  <p:cSld>
+    <p:spTree>
+      <p:nvGrpSpPr>
+        <p:cNvPr id="1" name=""/>
+        <p:cNvGrpSpPr/>
+        <p:nvPr/>
+      </p:nvGrpSpPr>
+      <p:grpSpPr>
+        <a:xfrm>
+          <a:off x="0" y="0"/>
+          <a:ext cx="0" cy="0"/>
+          <a:chOff x="0" y="0"/>
+          <a:chExt cx="0" cy="0"/>
+        </a:xfrm>
+      </p:grpSpPr>
+      <p:sp>
+        <p:nvSpPr>
+          <p:cNvPr id="1080" name="kicker"/>
+          <p:cNvSpPr txBox="1"/>
+          <p:nvPr/>
+        </p:nvSpPr>
+        <p:spPr>
+          <a:xfrm>
+            <a:off x="301752" y="173736"/>
+            <a:ext cx="6254496" cy="128016"/>
+          </a:xfrm>
+          <a:prstGeom prst="rect">
+            <a:avLst/>
+          </a:prstGeom>
+          <a:noFill/>
+        </p:spPr>
+        <p:txBody>
+          <a:bodyPr wrap="square" lIns="0" tIns="0" rIns="0" bIns="0" anchor="t"/>
+          <a:lstStyle/>
+          <a:p>
+            <a:pPr algn="r" rtl="1">
+              <a:spcAft>
+                <a:spcPts val="0"/>
+              </a:spcAft>
+            </a:pPr>
+            <a:r>
+              <a:rPr lang="ar-SA" sz="562" b="0" dirty="0">
+                <a:solidFill>
+                  <a:srgbClr val="753BBD"/>
+                </a:solidFill>
+                <a:latin typeface="DiodrumArabic-Semibold"/>
+                <a:ea typeface="DiodrumArabic-Semibold"/>
+                <a:cs typeface="DiodrumArabic-Semibold"/>
+              </a:rPr>
+              <a:t>القسم الأول: حاضنة الأبحاث</a:t>
+            </a:r>
+          </a:p>
+        </p:txBody>
+      </p:sp>
+      <p:sp>
+        <p:nvSpPr>
+          <p:cNvPr id="1081" name="title"/>
+          <p:cNvSpPr txBox="1"/>
+          <p:nvPr/>
+        </p:nvSpPr>
+        <p:spPr>
+          <a:xfrm>
+            <a:off x="301752" y="329184"/>
+            <a:ext cx="6254496" cy="237744"/>
+          </a:xfrm>
+          <a:prstGeom prst="rect">
+            <a:avLst/>
+          </a:prstGeom>
+          <a:noFill/>
+        </p:spPr>
+        <p:txBody>
+          <a:bodyPr wrap="square" lIns="0" tIns="0" rIns="0" bIns="0" anchor="t"/>
+          <a:lstStyle/>
+          <a:p>
+            <a:pPr algn="r" rtl="1">
+              <a:lnSpc>
+                <a:spcPct val="118000"/>
+              </a:lnSpc>
+              <a:spcAft>
+                <a:spcPts val="0"/>
+              </a:spcAft>
+            </a:pPr>
+            <a:r>
+              <a:rPr lang="ar-SA" sz="1260" b="0" dirty="0">
+                <a:solidFill>
+                  <a:srgbClr val="24135F"/>
+                </a:solidFill>
+                <a:latin typeface="DiodrumArabic-Bold"/>
+                <a:ea typeface="DiodrumArabic-Bold"/>
+                <a:cs typeface="DiodrumArabic-Bold"/>
+              </a:rPr>
+              <a:t>البحث العلمي ركيزة أساسية لتحقيق مستهدفات رؤية 2030</a:t>
+            </a:r>
+          </a:p>
+        </p:txBody>
+      </p:sp>
+      <p:sp>
+        <p:nvSpPr>
+          <p:cNvPr id="1082" name="Slide Number Placeholder"/>
+          <p:cNvSpPr>
+            <a:spLocks noGrp="1"/>
+          </p:cNvSpPr>
+          <p:nvPr>
+            <p:ph type="sldNum" sz="quarter" idx="12"/>
+          </p:nvPr>
+        </p:nvSpPr>
+        <p:spPr/>
+        <p:txBody>
+          <a:bodyPr/>
+          <a:lstStyle/>
+          <a:p>
+            <a:pPr algn="l"/>
+            <a:fld id="{C1FF6DA9-008F-8B48-92A6-B652298478BF}" type="slidenum">
+              <a:rPr lang="en-US" smtClean="0"/>
+              <a:pPr algn="l"/>
+              <a:t>1</a:t>
+            </a:fld>
+            <a:endParaRPr lang="en-US" dirty="0"/>
+          </a:p>
+        </p:txBody>
+      </p:sp>
+      <p:sp>
+        <p:nvSpPr>
+          <p:cNvPr id="1083" name="k0"/>
+          <p:cNvSpPr/>
+          <p:nvPr/>
+        </p:nvSpPr>
+        <p:spPr>
+          <a:xfrm>
+            <a:off x="4593336" y="1325880"/>
+            <a:ext cx="1962912" cy="1600200"/>
+          </a:xfrm>
+          <a:prstGeom prst="roundRect">
+            <a:avLst>
+              <a:gd name="adj" fmla="val 2971"/>
+            </a:avLst>
+          </a:prstGeom>
+          <a:solidFill>
+            <a:srgbClr val="FFFFFF"/>
+          </a:solidFill>
+          <a:ln w="7144">
+            <a:solidFill>
+              <a:srgbClr val="E0E0E2"/>
+            </a:solidFill>
+          </a:ln>
+          <a:effectLst>
+            <a:outerShdw blurRad="76200" dist="23812" dir="5400000" rotWithShape="0">
+              <a:srgbClr val="24135F">
+                <a:alpha val="10980"/>
+              </a:srgbClr>
+            </a:outerShdw>
+          </a:effectLst>
+        </p:spPr>
+        <p:style>
+          <a:lnRef idx="1">
+            <a:schemeClr val="accent1"/>
+          </a:lnRef>
+          <a:fillRef idx="3">
+            <a:schemeClr val="accent1"/>
+          </a:fillRef>
+          <a:effectRef idx="2">
+            <a:schemeClr val="accent1"/>
+          </a:effectRef>
+          <a:fontRef idx="minor">
+            <a:schemeClr val="lt1"/>
+          </a:fontRef>
+        </p:style>
+        <p:txBody>
+          <a:bodyPr rtlCol="0" anchor="ctr"/>
+          <a:lstStyle/>
+          <a:p>
+            <a:pPr algn="ctr"/>
+            <a:endParaRPr b="0">
+              <a:latin typeface="DiodrumArabic-Regular"/>
+              <a:cs typeface="DiodrumArabic-Regular"/>
+            </a:endParaRPr>
+          </a:p>
+        </p:txBody>
+      </p:sp>
+      <p:sp>
+        <p:nvSpPr>
+          <p:cNvPr id="1084" name="k0-bar"/>
+          <p:cNvSpPr/>
+          <p:nvPr/>
+        </p:nvSpPr>
+        <p:spPr>
+          <a:xfrm>
+            <a:off x="4684776" y="1325880"/>
+            <a:ext cx="1780032" cy="29261"/>
+          </a:xfrm>
+          <a:prstGeom prst="roundRect">
+            <a:avLst>
+              <a:gd name="adj" fmla="val 50000"/>
+            </a:avLst>
+          </a:prstGeom>
+          <a:solidFill>
+            <a:srgbClr val="753BBD"/>
+          </a:solidFill>
+          <a:ln>
+            <a:noFill/>
+          </a:ln>
+        </p:spPr>
+        <p:style>
+          <a:lnRef idx="1">
+            <a:schemeClr val="accent1"/>
+          </a:lnRef>
+          <a:fillRef idx="3">
+            <a:schemeClr val="accent1"/>
+          </a:fillRef>
+          <a:effectRef idx="2">
+            <a:schemeClr val="accent1"/>
+          </a:effectRef>
+          <a:fontRef idx="minor">
+            <a:schemeClr val="lt1"/>
+          </a:fontRef>
+        </p:style>
+        <p:txBody>
+          <a:bodyPr rtlCol="0" anchor="ctr"/>
+          <a:lstStyle/>
+          <a:p>
+            <a:pPr algn="ctr"/>
+            <a:endParaRPr b="0">
+              <a:latin typeface="DiodrumArabic-Regular"/>
+              <a:cs typeface="DiodrumArabic-Regular"/>
+            </a:endParaRPr>
+          </a:p>
+        </p:txBody>
+      </p:sp>
+      <p:sp>
+        <p:nvSpPr>
+          <p:cNvPr id="1085" name="k0-unit"/>
+          <p:cNvSpPr txBox="1"/>
+          <p:nvPr/>
+        </p:nvSpPr>
+        <p:spPr>
+          <a:xfrm>
+            <a:off x="4703064" y="1472184"/>
+            <a:ext cx="1743456" cy="128016"/>
+          </a:xfrm>
+          <a:prstGeom prst="rect">
+            <a:avLst/>
+          </a:prstGeom>
+          <a:noFill/>
+        </p:spPr>
+        <p:txBody>
+          <a:bodyPr wrap="square" lIns="0" tIns="0" rIns="0" bIns="0" anchor="t"/>
+          <a:lstStyle/>
+          <a:p>
+            <a:pPr algn="ctr" rtl="1">
+              <a:spcAft>
+                <a:spcPts val="0"/>
+              </a:spcAft>
+            </a:pPr>
+            <a:r>
+              <a:rPr lang="ar-SA" sz="560" b="0" dirty="0">
+                <a:solidFill>
+                  <a:srgbClr val="753BBD"/>
+                </a:solidFill>
+                <a:latin typeface="DiodrumArabic-Semibold"/>
+                <a:ea typeface="DiodrumArabic-Semibold"/>
+                <a:cs typeface="DiodrumArabic-Semibold"/>
+              </a:rPr>
+              <a:t>نسبة مئوية</a:t>
+            </a:r>
+          </a:p>
+        </p:txBody>
+      </p:sp>
+      <p:sp>
+        <p:nvSpPr>
+          <p:cNvPr id="1086" name="k0-num"/>
+          <p:cNvSpPr txBox="1"/>
+          <p:nvPr/>
+        </p:nvSpPr>
+        <p:spPr>
+          <a:xfrm>
+            <a:off x="4703064" y="1636776"/>
+            <a:ext cx="1743456" cy="502920"/>
+          </a:xfrm>
+          <a:prstGeom prst="rect">
+            <a:avLst/>
+          </a:prstGeom>
+          <a:noFill/>
+        </p:spPr>
+        <p:txBody>
+          <a:bodyPr wrap="square" lIns="0" tIns="0" rIns="0" bIns="0" anchor="t"/>
+          <a:lstStyle/>
+          <a:p>
+            <a:pPr algn="ctr">
+              <a:spcAft>
+                <a:spcPts val="0"/>
+              </a:spcAft>
+            </a:pPr>
+            <a:r>
+              <a:rPr lang="en-US" sz="2400" b="0" dirty="0">
+                <a:solidFill>
+                  <a:srgbClr val="24135F"/>
+                </a:solidFill>
+                <a:latin typeface="DiodrumArabic-Bold"/>
+                <a:ea typeface="DiodrumArabic-Bold"/>
+                <a:cs typeface="DiodrumArabic-Bold"/>
+              </a:rPr>
+              <a:t>53.6%</a:t>
+            </a:r>
+          </a:p>
+        </p:txBody>
+      </p:sp>
+      <p:sp>
+        <p:nvSpPr>
+          <p:cNvPr id="1087" name="k0-lbl"/>
+          <p:cNvSpPr txBox="1"/>
+          <p:nvPr/>
+        </p:nvSpPr>
+        <p:spPr>
+          <a:xfrm>
+            <a:off x="4739640" y="2258568"/>
+            <a:ext cx="1670304" cy="576072"/>
+          </a:xfrm>
+          <a:prstGeom prst="rect">
+            <a:avLst/>
+          </a:prstGeom>
+          <a:noFill/>
+        </p:spPr>
+        <p:txBody>
+          <a:bodyPr wrap="square" lIns="0" tIns="0" rIns="0" bIns="0" anchor="t"/>
+          <a:lstStyle/>
+          <a:p>
+            <a:pPr algn="ctr" rtl="1">
+              <a:lnSpc>
+                <a:spcPct val="126000"/>
+              </a:lnSpc>
+              <a:spcAft>
+                <a:spcPts val="0"/>
+              </a:spcAft>
+            </a:pPr>
+            <a:r>
+              <a:rPr lang="ar-SA" sz="500" b="0" dirty="0">
+                <a:solidFill>
+                  <a:srgbClr val="5D6167"/>
+                </a:solidFill>
+                <a:latin typeface="DiodrumArabic-Medium"/>
+                <a:ea typeface="DiodrumArabic-Medium"/>
+                <a:cs typeface="DiodrumArabic-Medium"/>
+              </a:rPr>
+              <a:t>المتوقع لنسبة التمويل الحكومي للبحث والتطوير في مجالات الحكومة.</a:t>
+            </a:r>
+          </a:p>
+        </p:txBody>
+      </p:sp>
+      <p:sp>
+        <p:nvSpPr>
+          <p:cNvPr id="1088" name="k1"/>
+          <p:cNvSpPr/>
+          <p:nvPr/>
+        </p:nvSpPr>
+        <p:spPr>
+          <a:xfrm>
+            <a:off x="2447544" y="1325880"/>
+            <a:ext cx="1962912" cy="1600200"/>
+          </a:xfrm>
+          <a:prstGeom prst="roundRect">
+            <a:avLst>
+              <a:gd name="adj" fmla="val 2971"/>
+            </a:avLst>
+          </a:prstGeom>
+          <a:solidFill>
+            <a:srgbClr val="FFFFFF"/>
+          </a:solidFill>
+          <a:ln w="7144">
+            <a:solidFill>
+              <a:srgbClr val="E0E0E2"/>
+            </a:solidFill>
+          </a:ln>
+          <a:effectLst>
+            <a:outerShdw blurRad="76200" dist="23812" dir="5400000" rotWithShape="0">
+              <a:srgbClr val="24135F">
+                <a:alpha val="10980"/>
+              </a:srgbClr>
+            </a:outerShdw>
+          </a:effectLst>
+        </p:spPr>
+        <p:style>
+          <a:lnRef idx="1">
+            <a:schemeClr val="accent1"/>
+          </a:lnRef>
+          <a:fillRef idx="3">
+            <a:schemeClr val="accent1"/>
+          </a:fillRef>
+          <a:effectRef idx="2">
+            <a:schemeClr val="accent1"/>
+          </a:effectRef>
+          <a:fontRef idx="minor">
+            <a:schemeClr val="lt1"/>
+          </a:fontRef>
+        </p:style>
+        <p:txBody>
+          <a:bodyPr rtlCol="0" anchor="ctr"/>
+          <a:lstStyle/>
+          <a:p>
+            <a:pPr algn="ctr"/>
+            <a:endParaRPr b="0">
+              <a:latin typeface="DiodrumArabic-Regular"/>
+              <a:cs typeface="DiodrumArabic-Regular"/>
+            </a:endParaRPr>
+          </a:p>
+        </p:txBody>
+      </p:sp>
+      <p:sp>
+        <p:nvSpPr>
+          <p:cNvPr id="1089" name="k1-bar"/>
+          <p:cNvSpPr/>
+          <p:nvPr/>
+        </p:nvSpPr>
+        <p:spPr>
+          <a:xfrm>
+            <a:off x="2538984" y="1325880"/>
+            <a:ext cx="1780032" cy="29261"/>
+          </a:xfrm>
+          <a:prstGeom prst="roundRect">
+            <a:avLst>
+              <a:gd name="adj" fmla="val 50000"/>
+            </a:avLst>
+          </a:prstGeom>
+          <a:solidFill>
+            <a:srgbClr val="00ABAF"/>
+          </a:solidFill>
+          <a:ln>
+            <a:noFill/>
+          </a:ln>
+        </p:spPr>
+        <p:style>
+          <a:lnRef idx="1">
+            <a:schemeClr val="accent1"/>
+          </a:lnRef>
+          <a:fillRef idx="3">
+            <a:schemeClr val="accent1"/>
+          </a:fillRef>
+          <a:effectRef idx="2">
+            <a:schemeClr val="accent1"/>
+          </a:effectRef>
+          <a:fontRef idx="minor">
+            <a:schemeClr val="lt1"/>
+          </a:fontRef>
+        </p:style>
+        <p:txBody>
+          <a:bodyPr rtlCol="0" anchor="ctr"/>
+          <a:lstStyle/>
+          <a:p>
+            <a:pPr algn="ctr"/>
+            <a:endParaRPr b="0">
+              <a:latin typeface="DiodrumArabic-Regular"/>
+              <a:cs typeface="DiodrumArabic-Regular"/>
+            </a:endParaRPr>
+          </a:p>
+        </p:txBody>
+      </p:sp>
+      <p:sp>
+        <p:nvSpPr>
+          <p:cNvPr id="1090" name="k1-unit"/>
+          <p:cNvSpPr txBox="1"/>
+          <p:nvPr/>
+        </p:nvSpPr>
+        <p:spPr>
+          <a:xfrm>
+            <a:off x="2557272" y="1472184"/>
+            <a:ext cx="1743456" cy="128016"/>
+          </a:xfrm>
+          <a:prstGeom prst="rect">
+            <a:avLst/>
+          </a:prstGeom>
+          <a:noFill/>
+        </p:spPr>
+        <p:txBody>
+          <a:bodyPr wrap="square" lIns="0" tIns="0" rIns="0" bIns="0" anchor="t"/>
+          <a:lstStyle/>
+          <a:p>
+            <a:pPr algn="ctr" rtl="1">
+              <a:spcAft>
+                <a:spcPts val="0"/>
+              </a:spcAft>
+            </a:pPr>
+            <a:r>
+              <a:rPr lang="ar-SA" sz="560" b="0" dirty="0">
+                <a:solidFill>
+                  <a:srgbClr val="00ABAF"/>
+                </a:solidFill>
+                <a:latin typeface="DiodrumArabic-Semibold"/>
+                <a:ea typeface="DiodrumArabic-Semibold"/>
+                <a:cs typeface="DiodrumArabic-Semibold"/>
+              </a:rPr>
+              <a:t>ألف عامل وطني</a:t>
+            </a:r>
+          </a:p>
+        </p:txBody>
+      </p:sp>
+      <p:sp>
+        <p:nvSpPr>
+          <p:cNvPr id="1091" name="k1-num"/>
+          <p:cNvSpPr txBox="1"/>
+          <p:nvPr/>
+        </p:nvSpPr>
+        <p:spPr>
+          <a:xfrm>
+            <a:off x="2557272" y="1636776"/>
+            <a:ext cx="1743456" cy="502920"/>
+          </a:xfrm>
+          <a:prstGeom prst="rect">
+            <a:avLst/>
+          </a:prstGeom>
+          <a:noFill/>
+        </p:spPr>
+        <p:txBody>
+          <a:bodyPr wrap="square" lIns="0" tIns="0" rIns="0" bIns="0" anchor="t"/>
+          <a:lstStyle/>
+          <a:p>
+            <a:pPr algn="ctr">
+              <a:spcAft>
+                <a:spcPts val="0"/>
+              </a:spcAft>
+            </a:pPr>
+            <a:r>
+              <a:rPr lang="en-US" sz="2400" b="0" dirty="0">
+                <a:solidFill>
+                  <a:srgbClr val="24135F"/>
+                </a:solidFill>
+                <a:latin typeface="DiodrumArabic-Bold"/>
+                <a:ea typeface="DiodrumArabic-Bold"/>
+                <a:cs typeface="DiodrumArabic-Bold"/>
+              </a:rPr>
+              <a:t>49.3</a:t>
+            </a:r>
+          </a:p>
+        </p:txBody>
+      </p:sp>
+      <p:sp>
+        <p:nvSpPr>
+          <p:cNvPr id="1092" name="k1-lbl"/>
+          <p:cNvSpPr txBox="1"/>
+          <p:nvPr/>
+        </p:nvSpPr>
+        <p:spPr>
+          <a:xfrm>
+            <a:off x="2593848" y="2258568"/>
+            <a:ext cx="1670304" cy="576072"/>
+          </a:xfrm>
+          <a:prstGeom prst="rect">
+            <a:avLst/>
+          </a:prstGeom>
+          <a:noFill/>
+        </p:spPr>
+        <p:txBody>
+          <a:bodyPr wrap="square" lIns="0" tIns="0" rIns="0" bIns="0" anchor="t"/>
+          <a:lstStyle/>
+          <a:p>
+            <a:pPr algn="ctr" rtl="1">
+              <a:lnSpc>
+                <a:spcPct val="126000"/>
+              </a:lnSpc>
+              <a:spcAft>
+                <a:spcPts val="0"/>
+              </a:spcAft>
+            </a:pPr>
+            <a:r>
+              <a:rPr lang="ar-SA" sz="500" b="0" dirty="0">
+                <a:solidFill>
+                  <a:srgbClr val="5D6167"/>
+                </a:solidFill>
+                <a:latin typeface="DiodrumArabic-Medium"/>
+                <a:ea typeface="DiodrumArabic-Medium"/>
+                <a:cs typeface="DiodrumArabic-Medium"/>
+              </a:rPr>
+              <a:t>عدد الباحثين والعاملين في البحث والتطوير للمنتجات الرقمية بالسوق السعودي.</a:t>
+            </a:r>
+          </a:p>
+        </p:txBody>
+      </p:sp>
+      <p:sp>
+        <p:nvSpPr>
+          <p:cNvPr id="1093" name="k2"/>
+          <p:cNvSpPr/>
+          <p:nvPr/>
+        </p:nvSpPr>
+        <p:spPr>
+          <a:xfrm>
+            <a:off x="301752" y="1325880"/>
+            <a:ext cx="1962912" cy="1600200"/>
+          </a:xfrm>
+          <a:prstGeom prst="roundRect">
+            <a:avLst>
+              <a:gd name="adj" fmla="val 2971"/>
+            </a:avLst>
+          </a:prstGeom>
+          <a:solidFill>
+            <a:srgbClr val="FFFFFF"/>
+          </a:solidFill>
+          <a:ln w="7144">
+            <a:solidFill>
+              <a:srgbClr val="E0E0E2"/>
+            </a:solidFill>
+          </a:ln>
+          <a:effectLst>
+            <a:outerShdw blurRad="76200" dist="23812" dir="5400000" rotWithShape="0">
+              <a:srgbClr val="24135F">
+                <a:alpha val="10980"/>
+              </a:srgbClr>
+            </a:outerShdw>
+          </a:effectLst>
+        </p:spPr>
+        <p:style>
+          <a:lnRef idx="1">
+            <a:schemeClr val="accent1"/>
+          </a:lnRef>
+          <a:fillRef idx="3">
+            <a:schemeClr val="accent1"/>
+          </a:fillRef>
+          <a:effectRef idx="2">
+            <a:schemeClr val="accent1"/>
+          </a:effectRef>
+          <a:fontRef idx="minor">
+            <a:schemeClr val="lt1"/>
+          </a:fontRef>
+        </p:style>
+        <p:txBody>
+          <a:bodyPr rtlCol="0" anchor="ctr"/>
+          <a:lstStyle/>
+          <a:p>
+            <a:pPr algn="ctr"/>
+            <a:endParaRPr b="0">
+              <a:latin typeface="DiodrumArabic-Regular"/>
+              <a:cs typeface="DiodrumArabic-Regular"/>
+            </a:endParaRPr>
+          </a:p>
+        </p:txBody>
+      </p:sp>
+      <p:sp>
+        <p:nvSpPr>
+          <p:cNvPr id="1094" name="k2-bar"/>
+          <p:cNvSpPr/>
+          <p:nvPr/>
+        </p:nvSpPr>
+        <p:spPr>
+          <a:xfrm>
+            <a:off x="393192" y="1325880"/>
+            <a:ext cx="1780032" cy="29261"/>
+          </a:xfrm>
+          <a:prstGeom prst="roundRect">
+            <a:avLst>
+              <a:gd name="adj" fmla="val 50000"/>
+            </a:avLst>
+          </a:prstGeom>
+          <a:solidFill>
+            <a:srgbClr val="1CC182"/>
+          </a:solidFill>
+          <a:ln>
+            <a:noFill/>
+          </a:ln>
+        </p:spPr>
+        <p:style>
+          <a:lnRef idx="1">
+            <a:schemeClr val="accent1"/>
+          </a:lnRef>
+          <a:fillRef idx="3">
+            <a:schemeClr val="accent1"/>
+          </a:fillRef>
+          <a:effectRef idx="2">
+            <a:schemeClr val="accent1"/>
+          </a:effectRef>
+          <a:fontRef idx="minor">
+            <a:schemeClr val="lt1"/>
+          </a:fontRef>
+        </p:style>
+        <p:txBody>
+          <a:bodyPr rtlCol="0" anchor="ctr"/>
+          <a:lstStyle/>
+          <a:p>
+            <a:pPr algn="ctr"/>
+            <a:endParaRPr b="0">
+              <a:latin typeface="DiodrumArabic-Regular"/>
+              <a:cs typeface="DiodrumArabic-Regular"/>
+            </a:endParaRPr>
+          </a:p>
+        </p:txBody>
+      </p:sp>
+      <p:sp>
+        <p:nvSpPr>
+          <p:cNvPr id="1095" name="k2-unit"/>
+          <p:cNvSpPr txBox="1"/>
+          <p:nvPr/>
+        </p:nvSpPr>
+        <p:spPr>
+          <a:xfrm>
+            <a:off x="411480" y="1472184"/>
+            <a:ext cx="1743456" cy="128016"/>
+          </a:xfrm>
+          <a:prstGeom prst="rect">
+            <a:avLst/>
+          </a:prstGeom>
+          <a:noFill/>
+        </p:spPr>
+        <p:txBody>
+          <a:bodyPr wrap="square" lIns="0" tIns="0" rIns="0" bIns="0" anchor="t"/>
+          <a:lstStyle/>
+          <a:p>
+            <a:pPr algn="ctr" rtl="1">
+              <a:spcAft>
+                <a:spcPts val="0"/>
+              </a:spcAft>
+            </a:pPr>
+            <a:r>
+              <a:rPr lang="ar-SA" sz="560" b="0" dirty="0">
+                <a:solidFill>
+                  <a:srgbClr val="1CC182"/>
+                </a:solidFill>
+                <a:latin typeface="DiodrumArabic-Semibold"/>
+                <a:ea typeface="DiodrumArabic-Semibold"/>
+                <a:cs typeface="DiodrumArabic-Semibold"/>
+              </a:rPr>
+              <a:t>مليار ريال</a:t>
+            </a:r>
+          </a:p>
+        </p:txBody>
+      </p:sp>
+      <p:sp>
+        <p:nvSpPr>
+          <p:cNvPr id="1096" name="k2-num"/>
+          <p:cNvSpPr txBox="1"/>
+          <p:nvPr/>
+        </p:nvSpPr>
+        <p:spPr>
+          <a:xfrm>
+            <a:off x="411480" y="1636776"/>
+            <a:ext cx="1743456" cy="502920"/>
+          </a:xfrm>
+          <a:prstGeom prst="rect">
+            <a:avLst/>
+          </a:prstGeom>
+          <a:noFill/>
+        </p:spPr>
+        <p:txBody>
+          <a:bodyPr wrap="square" lIns="0" tIns="0" rIns="0" bIns="0" anchor="t"/>
+          <a:lstStyle/>
+          <a:p>
+            <a:pPr algn="ctr">
+              <a:spcAft>
+                <a:spcPts val="0"/>
+              </a:spcAft>
+            </a:pPr>
+            <a:r>
+              <a:rPr lang="en-US" sz="2400" b="0" dirty="0">
+                <a:solidFill>
+                  <a:srgbClr val="24135F"/>
+                </a:solidFill>
+                <a:latin typeface="DiodrumArabic-Bold"/>
+                <a:ea typeface="DiodrumArabic-Bold"/>
+                <a:cs typeface="DiodrumArabic-Bold"/>
+              </a:rPr>
+              <a:t>22.6</a:t>
+            </a:r>
+          </a:p>
+        </p:txBody>
+      </p:sp>
+      <p:sp>
+        <p:nvSpPr>
+          <p:cNvPr id="1097" name="k2-lbl"/>
+          <p:cNvSpPr txBox="1"/>
+          <p:nvPr/>
+        </p:nvSpPr>
+        <p:spPr>
+          <a:xfrm>
+            <a:off x="448056" y="2258568"/>
+            <a:ext cx="1670304" cy="576072"/>
+          </a:xfrm>
+          <a:prstGeom prst="rect">
+            <a:avLst/>
+          </a:prstGeom>
+          <a:noFill/>
+        </p:spPr>
+        <p:txBody>
+          <a:bodyPr wrap="square" lIns="0" tIns="0" rIns="0" bIns="0" anchor="t"/>
+          <a:lstStyle/>
+          <a:p>
+            <a:pPr algn="ctr" rtl="1">
+              <a:lnSpc>
+                <a:spcPct val="126000"/>
+              </a:lnSpc>
+              <a:spcAft>
+                <a:spcPts val="0"/>
+              </a:spcAft>
+            </a:pPr>
+            <a:r>
+              <a:rPr lang="ar-SA" sz="500" b="0" dirty="0">
+                <a:solidFill>
+                  <a:srgbClr val="5D6167"/>
+                </a:solidFill>
+                <a:latin typeface="DiodrumArabic-Medium"/>
+                <a:ea typeface="DiodrumArabic-Medium"/>
+                <a:cs typeface="DiodrumArabic-Medium"/>
+              </a:rPr>
+              <a:t>إجمالي الإنفاق على البحث والتطوير في القطاعين العام والخاص.</a:t>
+            </a:r>
+          </a:p>
+        </p:txBody>
+      </p:sp>
+      <p:sp>
+        <p:nvSpPr>
+          <p:cNvPr id="1098" name="cb"/>
+          <p:cNvSpPr/>
+          <p:nvPr/>
+        </p:nvSpPr>
+        <p:spPr>
+          <a:xfrm>
+            <a:off x="301752" y="3127248"/>
+            <a:ext cx="6254496" cy="365760"/>
+          </a:xfrm>
+          <a:prstGeom prst="roundRect">
+            <a:avLst>
+              <a:gd name="adj" fmla="val 13000"/>
+            </a:avLst>
+          </a:prstGeom>
+          <a:gradFill>
+            <a:gsLst>
+              <a:gs pos="0">
+                <a:srgbClr val="24135F"/>
+              </a:gs>
+              <a:gs pos="100000">
+                <a:srgbClr val="753BBD"/>
+              </a:gs>
+            </a:gsLst>
+            <a:lin ang="8100000" scaled="1"/>
+          </a:gradFill>
+          <a:ln>
+            <a:noFill/>
+          </a:ln>
+          <a:effectLst>
+            <a:outerShdw blurRad="85725" dist="28575" dir="5400000" rotWithShape="0">
+              <a:srgbClr val="1A0B3D">
+                <a:alpha val="21961"/>
+              </a:srgbClr>
+            </a:outerShdw>
+          </a:effectLst>
+        </p:spPr>
+        <p:style>
+          <a:lnRef idx="1">
+            <a:schemeClr val="accent1"/>
+          </a:lnRef>
+          <a:fillRef idx="3">
+            <a:schemeClr val="accent1"/>
+          </a:fillRef>
+          <a:effectRef idx="2">
+            <a:schemeClr val="accent1"/>
+          </a:effectRef>
+          <a:fontRef idx="minor">
+            <a:schemeClr val="lt1"/>
+          </a:fontRef>
+        </p:style>
+        <p:txBody>
+          <a:bodyPr rtlCol="0" anchor="ctr"/>
+          <a:lstStyle/>
+          <a:p>
+            <a:pPr algn="ctr"/>
+            <a:endParaRPr b="0">
+              <a:latin typeface="DiodrumArabic-Regular"/>
+              <a:cs typeface="DiodrumArabic-Regular"/>
+            </a:endParaRPr>
+          </a:p>
+        </p:txBody>
+      </p:sp>
+      <p:sp>
+        <p:nvSpPr>
+          <p:cNvPr id="1099" name="cb-t"/>
+          <p:cNvSpPr txBox="1"/>
+          <p:nvPr/>
+        </p:nvSpPr>
+        <p:spPr>
+          <a:xfrm>
+            <a:off x="484632" y="3127248"/>
+            <a:ext cx="5888736" cy="365760"/>
+          </a:xfrm>
+          <a:prstGeom prst="rect">
+            <a:avLst/>
+          </a:prstGeom>
+          <a:noFill/>
+        </p:spPr>
+        <p:txBody>
+          <a:bodyPr wrap="square" lIns="0" tIns="0" rIns="0" bIns="0" anchor="ctr"/>
+          <a:lstStyle/>
+          <a:p>
+            <a:pPr algn="ctr" rtl="1">
+              <a:spcAft>
+                <a:spcPts val="0"/>
+              </a:spcAft>
+            </a:pPr>
+            <a:r>
+              <a:rPr lang="ar-SA" sz="580" b="0" dirty="0">
+                <a:solidFill>
+                  <a:srgbClr val="FFFFFF"/>
+                </a:solidFill>
+                <a:latin typeface="DiodrumArabic-Semibold"/>
+                <a:ea typeface="DiodrumArabic-Semibold"/>
+                <a:cs typeface="DiodrumArabic-Semibold"/>
+              </a:rPr>
+              <a:t>تعكس هذه المؤشرات أهمية الاستثمار في البحث العلمي ركيزةً أساسية لتعزيز الابتكار ورفع كفاءة الخدمات الحكومية وتحقيق مستهدفات رؤية المملكة 2030.</a:t>
             </a:r>
           </a:p>
         </p:txBody>
@@ -6059,7 +7017,7 @@
       </p:grpSpPr>
       <p:sp>
         <p:nvSpPr>
-          <p:cNvPr id="1079" name="kicker"/>
+          <p:cNvPr id="1100" name="kicker"/>
           <p:cNvSpPr txBox="1"/>
           <p:nvPr/>
         </p:nvSpPr>
@@ -6098,7 +7056,7 @@
       </p:sp>
       <p:sp>
         <p:nvSpPr>
-          <p:cNvPr id="1080" name="title"/>
+          <p:cNvPr id="1101" name="title"/>
           <p:cNvSpPr txBox="1"/>
           <p:nvPr/>
         </p:nvSpPr>
@@ -6133,14 +7091,14 @@
                 <a:ea typeface="DiodrumArabic-Bold"/>
                 <a:cs typeface="DiodrumArabic-Bold"/>
               </a:rPr>
-              <a:t>بيئة متخصصة تحوّل المخرجات البحثية إلى قيمة قابلة للاستفادة</a:t>
-            </a:r>
-          </a:p>
-        </p:txBody>
-      </p:sp>
-      <p:sp>
-        <p:nvSpPr>
-          <p:cNvPr id="1081" name="subtitle"/>
+              <a:t>مركز المعرفة الذي يحوّل المخرجات البحثية إلى قيمة قابلة للاستفادة</a:t>
+            </a:r>
+          </a:p>
+        </p:txBody>
+      </p:sp>
+      <p:sp>
+        <p:nvSpPr>
+          <p:cNvPr id="1102" name="subtitle"/>
           <p:cNvSpPr txBox="1"/>
           <p:nvPr/>
         </p:nvSpPr>
@@ -6175,14 +7133,14 @@
                 <a:ea typeface="DiodrumArabic-Semibold"/>
                 <a:cs typeface="DiodrumArabic-Semibold"/>
               </a:rPr>
-              <a:t>حاضنة الأبحاث مبادرة تجمع الباحثين والجهات الحكومية والقطاع الخاص والمستثمرين، بهدف دعم الأبحاث والدراسات المرتبطة بالحكومة الرقمية وتطوير مخرجاتها نحو حلول ومنتجات وخدمات ذات أثر.</a:t>
-            </a:r>
-          </a:p>
-        </p:txBody>
-      </p:sp>
-      <p:sp>
-        <p:nvSpPr>
-          <p:cNvPr id="1082" name="Slide Number Placeholder"/>
+              <a:t>حاضنة الأبحاث هي مركز المعرفة الذي يجمع الباحثين والجهات الحكومية والقطاع الخاص والمستثمرين، بهدف دعم الأبحاث والدراسات المرتبطة بالحكومة الرقمية وتطوير مخرجاتها نحو حلول ومنتجات وخدمات ذات أثر.</a:t>
+            </a:r>
+          </a:p>
+        </p:txBody>
+      </p:sp>
+      <p:sp>
+        <p:nvSpPr>
+          <p:cNvPr id="1103" name="Slide Number Placeholder"/>
           <p:cNvSpPr>
             <a:spLocks noGrp="1"/>
           </p:cNvSpPr>
@@ -6207,7 +7165,7 @@
       </p:sp>
       <p:sp>
         <p:nvSpPr>
-          <p:cNvPr id="1083" name="wc0"/>
+          <p:cNvPr id="1104" name="wc0"/>
           <p:cNvSpPr/>
           <p:nvPr/>
         </p:nvSpPr>
@@ -6265,7 +7223,7 @@
       </p:sp>
       <p:sp>
         <p:nvSpPr>
-          <p:cNvPr id="1084" name="wc0-bar"/>
+          <p:cNvPr id="1105" name="wc0-bar"/>
           <p:cNvSpPr/>
           <p:nvPr/>
         </p:nvSpPr>
@@ -6314,7 +7272,7 @@
       </p:sp>
       <p:sp>
         <p:nvSpPr>
-          <p:cNvPr id="1085" name="wc0-title"/>
+          <p:cNvPr id="1106" name="wc0-title"/>
           <p:cNvSpPr txBox="1"/>
           <p:nvPr/>
         </p:nvSpPr>
@@ -6356,7 +7314,7 @@
       </p:sp>
       <p:sp>
         <p:nvSpPr>
-          <p:cNvPr id="1086" name="wc0-body"/>
+          <p:cNvPr id="1107" name="wc0-body"/>
           <p:cNvSpPr txBox="1"/>
           <p:nvPr/>
         </p:nvSpPr>
@@ -6398,7 +7356,7 @@
       </p:sp>
       <p:sp>
         <p:nvSpPr>
-          <p:cNvPr id="1087" name="wc1"/>
+          <p:cNvPr id="1108" name="wc1"/>
           <p:cNvSpPr/>
           <p:nvPr/>
         </p:nvSpPr>
@@ -6456,7 +7414,7 @@
       </p:sp>
       <p:sp>
         <p:nvSpPr>
-          <p:cNvPr id="1088" name="wc1-bar"/>
+          <p:cNvPr id="1109" name="wc1-bar"/>
           <p:cNvSpPr/>
           <p:nvPr/>
         </p:nvSpPr>
@@ -6505,7 +7463,7 @@
       </p:sp>
       <p:sp>
         <p:nvSpPr>
-          <p:cNvPr id="1089" name="wc1-title"/>
+          <p:cNvPr id="1110" name="wc1-title"/>
           <p:cNvSpPr txBox="1"/>
           <p:nvPr/>
         </p:nvSpPr>
@@ -6547,7 +7505,7 @@
       </p:sp>
       <p:sp>
         <p:nvSpPr>
-          <p:cNvPr id="1090" name="wc1-body"/>
+          <p:cNvPr id="1111" name="wc1-body"/>
           <p:cNvSpPr txBox="1"/>
           <p:nvPr/>
         </p:nvSpPr>
@@ -6589,7 +7547,7 @@
       </p:sp>
       <p:sp>
         <p:nvSpPr>
-          <p:cNvPr id="1091" name="wc2"/>
+          <p:cNvPr id="1112" name="wc2"/>
           <p:cNvSpPr/>
           <p:nvPr/>
         </p:nvSpPr>
@@ -6647,7 +7605,7 @@
       </p:sp>
       <p:sp>
         <p:nvSpPr>
-          <p:cNvPr id="1092" name="wc2-bar"/>
+          <p:cNvPr id="1113" name="wc2-bar"/>
           <p:cNvSpPr/>
           <p:nvPr/>
         </p:nvSpPr>
@@ -6696,7 +7654,7 @@
       </p:sp>
       <p:sp>
         <p:nvSpPr>
-          <p:cNvPr id="1093" name="wc2-title"/>
+          <p:cNvPr id="1114" name="wc2-title"/>
           <p:cNvSpPr txBox="1"/>
           <p:nvPr/>
         </p:nvSpPr>
@@ -6738,7 +7696,7 @@
       </p:sp>
       <p:sp>
         <p:nvSpPr>
-          <p:cNvPr id="1094" name="wc2-body"/>
+          <p:cNvPr id="1115" name="wc2-body"/>
           <p:cNvSpPr txBox="1"/>
           <p:nvPr/>
         </p:nvSpPr>
@@ -6780,7 +7738,7 @@
       </p:sp>
       <p:sp>
         <p:nvSpPr>
-          <p:cNvPr id="1095" name="cb"/>
+          <p:cNvPr id="1116" name="cb"/>
           <p:cNvSpPr/>
           <p:nvPr/>
         </p:nvSpPr>
@@ -6844,7 +7802,7 @@
       </p:sp>
       <p:sp>
         <p:nvSpPr>
-          <p:cNvPr id="1096" name="cb-t"/>
+          <p:cNvPr id="1117" name="cb-t"/>
           <p:cNvSpPr txBox="1"/>
           <p:nvPr/>
         </p:nvSpPr>
@@ -6908,7 +7866,7 @@
       </p:grpSpPr>
       <p:sp>
         <p:nvSpPr>
-          <p:cNvPr id="1097" name="kicker"/>
+          <p:cNvPr id="1118" name="kicker"/>
           <p:cNvSpPr txBox="1"/>
           <p:nvPr/>
         </p:nvSpPr>
@@ -6947,7 +7905,7 @@
       </p:sp>
       <p:sp>
         <p:nvSpPr>
-          <p:cNvPr id="1098" name="title"/>
+          <p:cNvPr id="1119" name="title"/>
           <p:cNvSpPr txBox="1"/>
           <p:nvPr/>
         </p:nvSpPr>
@@ -6989,7 +7947,7 @@
       </p:sp>
       <p:sp>
         <p:nvSpPr>
-          <p:cNvPr id="1099" name="Slide Number Placeholder"/>
+          <p:cNvPr id="1120" name="Slide Number Placeholder"/>
           <p:cNvSpPr>
             <a:spLocks noGrp="1"/>
           </p:cNvSpPr>
@@ -7014,7 +7972,7 @@
       </p:sp>
       <p:sp>
         <p:nvSpPr>
-          <p:cNvPr id="1100" name="gc0"/>
+          <p:cNvPr id="1121" name="gc0"/>
           <p:cNvSpPr/>
           <p:nvPr/>
         </p:nvSpPr>
@@ -7072,7 +8030,7 @@
       </p:sp>
       <p:sp>
         <p:nvSpPr>
-          <p:cNvPr id="1101" name="gc0-bar"/>
+          <p:cNvPr id="1122" name="gc0-bar"/>
           <p:cNvSpPr/>
           <p:nvPr/>
         </p:nvSpPr>
@@ -7121,7 +8079,7 @@
       </p:sp>
       <p:sp>
         <p:nvSpPr>
-          <p:cNvPr id="1102" name="gc0-title"/>
+          <p:cNvPr id="1123" name="gc0-title"/>
           <p:cNvSpPr txBox="1"/>
           <p:nvPr/>
         </p:nvSpPr>
@@ -7163,7 +8121,7 @@
       </p:sp>
       <p:sp>
         <p:nvSpPr>
-          <p:cNvPr id="1103" name="gc0-body"/>
+          <p:cNvPr id="1124" name="gc0-body"/>
           <p:cNvSpPr txBox="1"/>
           <p:nvPr/>
         </p:nvSpPr>
@@ -7205,7 +8163,7 @@
       </p:sp>
       <p:sp>
         <p:nvSpPr>
-          <p:cNvPr id="1104" name="gc1"/>
+          <p:cNvPr id="1125" name="gc1"/>
           <p:cNvSpPr/>
           <p:nvPr/>
         </p:nvSpPr>
@@ -7263,7 +8221,7 @@
       </p:sp>
       <p:sp>
         <p:nvSpPr>
-          <p:cNvPr id="1105" name="gc1-bar"/>
+          <p:cNvPr id="1126" name="gc1-bar"/>
           <p:cNvSpPr/>
           <p:nvPr/>
         </p:nvSpPr>
@@ -7312,7 +8270,7 @@
       </p:sp>
       <p:sp>
         <p:nvSpPr>
-          <p:cNvPr id="1106" name="gc1-title"/>
+          <p:cNvPr id="1127" name="gc1-title"/>
           <p:cNvSpPr txBox="1"/>
           <p:nvPr/>
         </p:nvSpPr>
@@ -7354,7 +8312,7 @@
       </p:sp>
       <p:sp>
         <p:nvSpPr>
-          <p:cNvPr id="1107" name="gc1-body"/>
+          <p:cNvPr id="1128" name="gc1-body"/>
           <p:cNvSpPr txBox="1"/>
           <p:nvPr/>
         </p:nvSpPr>
@@ -7396,7 +8354,7 @@
       </p:sp>
       <p:sp>
         <p:nvSpPr>
-          <p:cNvPr id="1108" name="gc2"/>
+          <p:cNvPr id="1129" name="gc2"/>
           <p:cNvSpPr/>
           <p:nvPr/>
         </p:nvSpPr>
@@ -7454,7 +8412,7 @@
       </p:sp>
       <p:sp>
         <p:nvSpPr>
-          <p:cNvPr id="1109" name="gc2-bar"/>
+          <p:cNvPr id="1130" name="gc2-bar"/>
           <p:cNvSpPr/>
           <p:nvPr/>
         </p:nvSpPr>
@@ -7503,7 +8461,7 @@
       </p:sp>
       <p:sp>
         <p:nvSpPr>
-          <p:cNvPr id="1110" name="gc2-title"/>
+          <p:cNvPr id="1131" name="gc2-title"/>
           <p:cNvSpPr txBox="1"/>
           <p:nvPr/>
         </p:nvSpPr>
@@ -7545,7 +8503,7 @@
       </p:sp>
       <p:sp>
         <p:nvSpPr>
-          <p:cNvPr id="1111" name="gc2-body"/>
+          <p:cNvPr id="1132" name="gc2-body"/>
           <p:cNvSpPr txBox="1"/>
           <p:nvPr/>
         </p:nvSpPr>
@@ -7587,7 +8545,7 @@
       </p:sp>
       <p:sp>
         <p:nvSpPr>
-          <p:cNvPr id="1112" name="gc3"/>
+          <p:cNvPr id="1133" name="gc3"/>
           <p:cNvSpPr/>
           <p:nvPr/>
         </p:nvSpPr>
@@ -7645,7 +8603,7 @@
       </p:sp>
       <p:sp>
         <p:nvSpPr>
-          <p:cNvPr id="1113" name="gc3-bar"/>
+          <p:cNvPr id="1134" name="gc3-bar"/>
           <p:cNvSpPr/>
           <p:nvPr/>
         </p:nvSpPr>
@@ -7694,7 +8652,7 @@
       </p:sp>
       <p:sp>
         <p:nvSpPr>
-          <p:cNvPr id="1114" name="gc3-title"/>
+          <p:cNvPr id="1135" name="gc3-title"/>
           <p:cNvSpPr txBox="1"/>
           <p:nvPr/>
         </p:nvSpPr>
@@ -7736,7 +8694,7 @@
       </p:sp>
       <p:sp>
         <p:nvSpPr>
-          <p:cNvPr id="1115" name="gc3-body"/>
+          <p:cNvPr id="1136" name="gc3-body"/>
           <p:cNvSpPr txBox="1"/>
           <p:nvPr/>
         </p:nvSpPr>
@@ -7778,7 +8736,7 @@
       </p:sp>
       <p:sp>
         <p:nvSpPr>
-          <p:cNvPr id="1116" name="cb"/>
+          <p:cNvPr id="1137" name="cb"/>
           <p:cNvSpPr/>
           <p:nvPr/>
         </p:nvSpPr>
@@ -7842,7 +8800,7 @@
       </p:sp>
       <p:sp>
         <p:nvSpPr>
-          <p:cNvPr id="1117" name="cb-t"/>
+          <p:cNvPr id="1138" name="cb-t"/>
           <p:cNvSpPr txBox="1"/>
           <p:nvPr/>
         </p:nvSpPr>
@@ -7906,7 +8864,7 @@
       </p:grpSpPr>
       <p:sp>
         <p:nvSpPr>
-          <p:cNvPr id="1118" name="kicker"/>
+          <p:cNvPr id="1139" name="kicker"/>
           <p:cNvSpPr txBox="1"/>
           <p:nvPr/>
         </p:nvSpPr>
@@ -7945,7 +8903,7 @@
       </p:sp>
       <p:sp>
         <p:nvSpPr>
-          <p:cNvPr id="1119" name="title"/>
+          <p:cNvPr id="1140" name="title"/>
           <p:cNvSpPr txBox="1"/>
           <p:nvPr/>
         </p:nvSpPr>
@@ -7987,7 +8945,7 @@
       </p:sp>
       <p:sp>
         <p:nvSpPr>
-          <p:cNvPr id="1120" name="Slide Number Placeholder"/>
+          <p:cNvPr id="1141" name="Slide Number Placeholder"/>
           <p:cNvSpPr>
             <a:spLocks noGrp="1"/>
           </p:cNvSpPr>
@@ -8012,7 +8970,7 @@
       </p:sp>
       <p:sp>
         <p:nvSpPr>
-          <p:cNvPr id="1121" name="ms0"/>
+          <p:cNvPr id="1142" name="ms0"/>
           <p:cNvSpPr/>
           <p:nvPr/>
         </p:nvSpPr>
@@ -8063,7 +9021,7 @@
       </p:sp>
       <p:sp>
         <p:nvSpPr>
-          <p:cNvPr id="1122" name="ms0-badge"/>
+          <p:cNvPr id="1143" name="ms0-badge"/>
           <p:cNvSpPr/>
           <p:nvPr/>
         </p:nvSpPr>
@@ -8110,7 +9068,7 @@
       </p:sp>
       <p:sp>
         <p:nvSpPr>
-          <p:cNvPr id="1123" name="ms0-badgenum"/>
+          <p:cNvPr id="1144" name="ms0-badgenum"/>
           <p:cNvSpPr txBox="1"/>
           <p:nvPr/>
         </p:nvSpPr>
@@ -8149,7 +9107,7 @@
       </p:sp>
       <p:sp>
         <p:nvSpPr>
-          <p:cNvPr id="1124" name="ms0-title"/>
+          <p:cNvPr id="1145" name="ms0-title"/>
           <p:cNvSpPr txBox="1"/>
           <p:nvPr/>
         </p:nvSpPr>
@@ -8191,7 +9149,7 @@
       </p:sp>
       <p:sp>
         <p:nvSpPr>
-          <p:cNvPr id="1125" name="ms0-body"/>
+          <p:cNvPr id="1146" name="ms0-body"/>
           <p:cNvSpPr txBox="1"/>
           <p:nvPr/>
         </p:nvSpPr>
@@ -8233,7 +9191,7 @@
       </p:sp>
       <p:sp>
         <p:nvSpPr>
-          <p:cNvPr id="1126" name="ms0-chev"/>
+          <p:cNvPr id="1147" name="ms0-chev"/>
           <p:cNvSpPr/>
           <p:nvPr/>
         </p:nvSpPr>
@@ -8282,7 +9240,7 @@
       </p:sp>
       <p:sp>
         <p:nvSpPr>
-          <p:cNvPr id="1127" name="ms1"/>
+          <p:cNvPr id="1148" name="ms1"/>
           <p:cNvSpPr/>
           <p:nvPr/>
         </p:nvSpPr>
@@ -8333,7 +9291,7 @@
       </p:sp>
       <p:sp>
         <p:nvSpPr>
-          <p:cNvPr id="1128" name="ms1-badge"/>
+          <p:cNvPr id="1149" name="ms1-badge"/>
           <p:cNvSpPr/>
           <p:nvPr/>
         </p:nvSpPr>
@@ -8380,7 +9338,7 @@
       </p:sp>
       <p:sp>
         <p:nvSpPr>
-          <p:cNvPr id="1129" name="ms1-badgenum"/>
+          <p:cNvPr id="1150" name="ms1-badgenum"/>
           <p:cNvSpPr txBox="1"/>
           <p:nvPr/>
         </p:nvSpPr>
@@ -8419,7 +9377,7 @@
       </p:sp>
       <p:sp>
         <p:nvSpPr>
-          <p:cNvPr id="1130" name="ms1-title"/>
+          <p:cNvPr id="1151" name="ms1-title"/>
           <p:cNvSpPr txBox="1"/>
           <p:nvPr/>
         </p:nvSpPr>
@@ -8461,7 +9419,7 @@
       </p:sp>
       <p:sp>
         <p:nvSpPr>
-          <p:cNvPr id="1131" name="ms1-body"/>
+          <p:cNvPr id="1152" name="ms1-body"/>
           <p:cNvSpPr txBox="1"/>
           <p:nvPr/>
         </p:nvSpPr>
@@ -8503,7 +9461,7 @@
       </p:sp>
       <p:sp>
         <p:nvSpPr>
-          <p:cNvPr id="1132" name="ms1-chev"/>
+          <p:cNvPr id="1153" name="ms1-chev"/>
           <p:cNvSpPr/>
           <p:nvPr/>
         </p:nvSpPr>
@@ -8552,7 +9510,7 @@
       </p:sp>
       <p:sp>
         <p:nvSpPr>
-          <p:cNvPr id="1133" name="ms2"/>
+          <p:cNvPr id="1154" name="ms2"/>
           <p:cNvSpPr/>
           <p:nvPr/>
         </p:nvSpPr>
@@ -8603,7 +9561,7 @@
       </p:sp>
       <p:sp>
         <p:nvSpPr>
-          <p:cNvPr id="1134" name="ms2-badge"/>
+          <p:cNvPr id="1155" name="ms2-badge"/>
           <p:cNvSpPr/>
           <p:nvPr/>
         </p:nvSpPr>
@@ -8650,7 +9608,7 @@
       </p:sp>
       <p:sp>
         <p:nvSpPr>
-          <p:cNvPr id="1135" name="ms2-badgenum"/>
+          <p:cNvPr id="1156" name="ms2-badgenum"/>
           <p:cNvSpPr txBox="1"/>
           <p:nvPr/>
         </p:nvSpPr>
@@ -8689,7 +9647,7 @@
       </p:sp>
       <p:sp>
         <p:nvSpPr>
-          <p:cNvPr id="1136" name="ms2-title"/>
+          <p:cNvPr id="1157" name="ms2-title"/>
           <p:cNvSpPr txBox="1"/>
           <p:nvPr/>
         </p:nvSpPr>
@@ -8731,7 +9689,7 @@
       </p:sp>
       <p:sp>
         <p:nvSpPr>
-          <p:cNvPr id="1137" name="ms2-body"/>
+          <p:cNvPr id="1158" name="ms2-body"/>
           <p:cNvSpPr txBox="1"/>
           <p:nvPr/>
         </p:nvSpPr>
@@ -8773,7 +9731,7 @@
       </p:sp>
       <p:sp>
         <p:nvSpPr>
-          <p:cNvPr id="1138" name="ms2-chev"/>
+          <p:cNvPr id="1159" name="ms2-chev"/>
           <p:cNvSpPr/>
           <p:nvPr/>
         </p:nvSpPr>
@@ -8822,7 +9780,7 @@
       </p:sp>
       <p:sp>
         <p:nvSpPr>
-          <p:cNvPr id="1139" name="ms3"/>
+          <p:cNvPr id="1160" name="ms3"/>
           <p:cNvSpPr/>
           <p:nvPr/>
         </p:nvSpPr>
@@ -8873,7 +9831,7 @@
       </p:sp>
       <p:sp>
         <p:nvSpPr>
-          <p:cNvPr id="1140" name="ms3-badge"/>
+          <p:cNvPr id="1161" name="ms3-badge"/>
           <p:cNvSpPr/>
           <p:nvPr/>
         </p:nvSpPr>
@@ -8920,7 +9878,7 @@
       </p:sp>
       <p:sp>
         <p:nvSpPr>
-          <p:cNvPr id="1141" name="ms3-badgenum"/>
+          <p:cNvPr id="1162" name="ms3-badgenum"/>
           <p:cNvSpPr txBox="1"/>
           <p:nvPr/>
         </p:nvSpPr>
@@ -8959,7 +9917,7 @@
       </p:sp>
       <p:sp>
         <p:nvSpPr>
-          <p:cNvPr id="1142" name="ms3-title"/>
+          <p:cNvPr id="1163" name="ms3-title"/>
           <p:cNvSpPr txBox="1"/>
           <p:nvPr/>
         </p:nvSpPr>
@@ -9001,7 +9959,7 @@
       </p:sp>
       <p:sp>
         <p:nvSpPr>
-          <p:cNvPr id="1143" name="ms3-body"/>
+          <p:cNvPr id="1164" name="ms3-body"/>
           <p:cNvSpPr txBox="1"/>
           <p:nvPr/>
         </p:nvSpPr>
@@ -9043,7 +10001,7 @@
       </p:sp>
       <p:sp>
         <p:nvSpPr>
-          <p:cNvPr id="1144" name="ms3-chev"/>
+          <p:cNvPr id="1165" name="ms3-chev"/>
           <p:cNvSpPr/>
           <p:nvPr/>
         </p:nvSpPr>
@@ -9092,7 +10050,7 @@
       </p:sp>
       <p:sp>
         <p:nvSpPr>
-          <p:cNvPr id="1145" name="ms4"/>
+          <p:cNvPr id="1166" name="ms4"/>
           <p:cNvSpPr/>
           <p:nvPr/>
         </p:nvSpPr>
@@ -9143,7 +10101,7 @@
       </p:sp>
       <p:sp>
         <p:nvSpPr>
-          <p:cNvPr id="1146" name="ms4-badge"/>
+          <p:cNvPr id="1167" name="ms4-badge"/>
           <p:cNvSpPr/>
           <p:nvPr/>
         </p:nvSpPr>
@@ -9190,7 +10148,7 @@
       </p:sp>
       <p:sp>
         <p:nvSpPr>
-          <p:cNvPr id="1147" name="ms4-badgenum"/>
+          <p:cNvPr id="1168" name="ms4-badgenum"/>
           <p:cNvSpPr txBox="1"/>
           <p:nvPr/>
         </p:nvSpPr>
@@ -9229,7 +10187,7 @@
       </p:sp>
       <p:sp>
         <p:nvSpPr>
-          <p:cNvPr id="1148" name="ms4-title"/>
+          <p:cNvPr id="1169" name="ms4-title"/>
           <p:cNvSpPr txBox="1"/>
           <p:nvPr/>
         </p:nvSpPr>
@@ -9271,7 +10229,7 @@
       </p:sp>
       <p:sp>
         <p:nvSpPr>
-          <p:cNvPr id="1149" name="ms4-body"/>
+          <p:cNvPr id="1170" name="ms4-body"/>
           <p:cNvSpPr txBox="1"/>
           <p:nvPr/>
         </p:nvSpPr>
@@ -9313,7 +10271,7 @@
       </p:sp>
       <p:sp>
         <p:nvSpPr>
-          <p:cNvPr id="1150" name="out"/>
+          <p:cNvPr id="1171" name="out"/>
           <p:cNvSpPr/>
           <p:nvPr/>
         </p:nvSpPr>
@@ -9362,7 +10320,7 @@
       </p:sp>
       <p:sp>
         <p:nvSpPr>
-          <p:cNvPr id="1151" name="out-label"/>
+          <p:cNvPr id="1172" name="out-label"/>
           <p:cNvSpPr txBox="1"/>
           <p:nvPr/>
         </p:nvSpPr>
@@ -9401,7 +10359,7 @@
       </p:sp>
       <p:sp>
         <p:nvSpPr>
-          <p:cNvPr id="1152" name="out-c0"/>
+          <p:cNvPr id="1173" name="out-c0"/>
           <p:cNvSpPr txBox="1"/>
           <p:nvPr/>
         </p:nvSpPr>
@@ -9443,7 +10401,7 @@
       </p:sp>
       <p:sp>
         <p:nvSpPr>
-          <p:cNvPr id="1153" name="out-c1"/>
+          <p:cNvPr id="1174" name="out-c1"/>
           <p:cNvSpPr txBox="1"/>
           <p:nvPr/>
         </p:nvSpPr>
@@ -9485,7 +10443,7 @@
       </p:sp>
       <p:sp>
         <p:nvSpPr>
-          <p:cNvPr id="1154" name="out-c2"/>
+          <p:cNvPr id="1175" name="out-c2"/>
           <p:cNvSpPr txBox="1"/>
           <p:nvPr/>
         </p:nvSpPr>
@@ -9527,7 +10485,7 @@
       </p:sp>
       <p:sp>
         <p:nvSpPr>
-          <p:cNvPr id="1155" name="out-c3"/>
+          <p:cNvPr id="1176" name="out-c3"/>
           <p:cNvSpPr txBox="1"/>
           <p:nvPr/>
         </p:nvSpPr>
@@ -9594,7 +10552,7 @@
       </p:grpSpPr>
       <p:sp>
         <p:nvSpPr>
-          <p:cNvPr id="1156" name="kicker"/>
+          <p:cNvPr id="1177" name="kicker"/>
           <p:cNvSpPr txBox="1"/>
           <p:nvPr/>
         </p:nvSpPr>
@@ -9633,7 +10591,7 @@
       </p:sp>
       <p:sp>
         <p:nvSpPr>
-          <p:cNvPr id="1157" name="title"/>
+          <p:cNvPr id="1178" name="title"/>
           <p:cNvSpPr txBox="1"/>
           <p:nvPr/>
         </p:nvSpPr>
@@ -9675,7 +10633,7 @@
       </p:sp>
       <p:sp>
         <p:nvSpPr>
-          <p:cNvPr id="1158" name="subtitle"/>
+          <p:cNvPr id="1179" name="subtitle"/>
           <p:cNvSpPr txBox="1"/>
           <p:nvPr/>
         </p:nvSpPr>
@@ -9717,7 +10675,7 @@
       </p:sp>
       <p:sp>
         <p:nvSpPr>
-          <p:cNvPr id="1159" name="Slide Number Placeholder"/>
+          <p:cNvPr id="1180" name="Slide Number Placeholder"/>
           <p:cNvSpPr>
             <a:spLocks noGrp="1"/>
           </p:cNvSpPr>
@@ -9742,7 +10700,7 @@
       </p:sp>
       <p:sp>
         <p:nvSpPr>
-          <p:cNvPr id="1160" name="col0"/>
+          <p:cNvPr id="1181" name="col0"/>
           <p:cNvSpPr/>
           <p:nvPr/>
         </p:nvSpPr>
@@ -9800,7 +10758,7 @@
       </p:sp>
       <p:sp>
         <p:nvSpPr>
-          <p:cNvPr id="1161" name="col0-bar"/>
+          <p:cNvPr id="1182" name="col0-bar"/>
           <p:cNvSpPr/>
           <p:nvPr/>
         </p:nvSpPr>
@@ -9849,7 +10807,7 @@
       </p:sp>
       <p:sp>
         <p:nvSpPr>
-          <p:cNvPr id="1162" name="col0-t"/>
+          <p:cNvPr id="1183" name="col0-t"/>
           <p:cNvSpPr txBox="1"/>
           <p:nvPr/>
         </p:nvSpPr>
@@ -9888,7 +10846,7 @@
       </p:sp>
       <p:sp>
         <p:nvSpPr>
-          <p:cNvPr id="1163" name="col0-أبحاث نظرية"/>
+          <p:cNvPr id="1184" name="col0-أبحاث نظرية"/>
           <p:cNvSpPr/>
           <p:nvPr/>
         </p:nvSpPr>
@@ -9937,7 +10895,7 @@
       </p:sp>
       <p:sp>
         <p:nvSpPr>
-          <p:cNvPr id="1164" name="col0-أبحاث نظرية-t"/>
+          <p:cNvPr id="1185" name="col0-أبحاث نظرية-t"/>
           <p:cNvSpPr txBox="1"/>
           <p:nvPr/>
         </p:nvSpPr>
@@ -9976,7 +10934,7 @@
       </p:sp>
       <p:sp>
         <p:nvSpPr>
-          <p:cNvPr id="1165" name="col0-أبحاث تطبيقية"/>
+          <p:cNvPr id="1186" name="col0-أبحاث تطبيقية"/>
           <p:cNvSpPr/>
           <p:nvPr/>
         </p:nvSpPr>
@@ -10025,7 +10983,7 @@
       </p:sp>
       <p:sp>
         <p:nvSpPr>
-          <p:cNvPr id="1166" name="col0-أبحاث تطبيقية-t"/>
+          <p:cNvPr id="1187" name="col0-أبحاث تطبيقية-t"/>
           <p:cNvSpPr txBox="1"/>
           <p:nvPr/>
         </p:nvSpPr>
@@ -10064,7 +11022,7 @@
       </p:sp>
       <p:sp>
         <p:nvSpPr>
-          <p:cNvPr id="1167" name="col0-أبحاث تطويرية"/>
+          <p:cNvPr id="1188" name="col0-أبحاث تطويرية"/>
           <p:cNvSpPr/>
           <p:nvPr/>
         </p:nvSpPr>
@@ -10113,7 +11071,7 @@
       </p:sp>
       <p:sp>
         <p:nvSpPr>
-          <p:cNvPr id="1168" name="col0-أبحاث تطويرية-t"/>
+          <p:cNvPr id="1189" name="col0-أبحاث تطويرية-t"/>
           <p:cNvSpPr txBox="1"/>
           <p:nvPr/>
         </p:nvSpPr>
@@ -10152,7 +11110,7 @@
       </p:sp>
       <p:sp>
         <p:nvSpPr>
-          <p:cNvPr id="1169" name="col0-أبحاث ابتكار"/>
+          <p:cNvPr id="1190" name="col0-أبحاث ابتكار"/>
           <p:cNvSpPr/>
           <p:nvPr/>
         </p:nvSpPr>
@@ -10201,7 +11159,7 @@
       </p:sp>
       <p:sp>
         <p:nvSpPr>
-          <p:cNvPr id="1170" name="col0-أبحاث ابتكار-t"/>
+          <p:cNvPr id="1191" name="col0-أبحاث ابتكار-t"/>
           <p:cNvSpPr txBox="1"/>
           <p:nvPr/>
         </p:nvSpPr>
@@ -10240,7 +11198,7 @@
       </p:sp>
       <p:sp>
         <p:nvSpPr>
-          <p:cNvPr id="1171" name="col1"/>
+          <p:cNvPr id="1192" name="col1"/>
           <p:cNvSpPr/>
           <p:nvPr/>
         </p:nvSpPr>
@@ -10298,7 +11256,7 @@
       </p:sp>
       <p:sp>
         <p:nvSpPr>
-          <p:cNvPr id="1172" name="col1-bar"/>
+          <p:cNvPr id="1193" name="col1-bar"/>
           <p:cNvSpPr/>
           <p:nvPr/>
         </p:nvSpPr>
@@ -10347,7 +11305,7 @@
       </p:sp>
       <p:sp>
         <p:nvSpPr>
-          <p:cNvPr id="1173" name="col1-t"/>
+          <p:cNvPr id="1194" name="col1-t"/>
           <p:cNvSpPr txBox="1"/>
           <p:nvPr/>
         </p:nvSpPr>
@@ -10386,7 +11344,7 @@
       </p:sp>
       <p:sp>
         <p:nvSpPr>
-          <p:cNvPr id="1174" name="col1-دراسات استشرافية"/>
+          <p:cNvPr id="1195" name="col1-دراسات استشرافية"/>
           <p:cNvSpPr/>
           <p:nvPr/>
         </p:nvSpPr>
@@ -10435,7 +11393,7 @@
       </p:sp>
       <p:sp>
         <p:nvSpPr>
-          <p:cNvPr id="1175" name="col1-دراسات استشرافية-t"/>
+          <p:cNvPr id="1196" name="col1-دراسات استشرافية-t"/>
           <p:cNvSpPr txBox="1"/>
           <p:nvPr/>
         </p:nvSpPr>
@@ -10474,7 +11432,7 @@
       </p:sp>
       <p:sp>
         <p:nvSpPr>
-          <p:cNvPr id="1176" name="col1-دراسات معيارية"/>
+          <p:cNvPr id="1197" name="col1-دراسات معيارية"/>
           <p:cNvSpPr/>
           <p:nvPr/>
         </p:nvSpPr>
@@ -10523,7 +11481,7 @@
       </p:sp>
       <p:sp>
         <p:nvSpPr>
-          <p:cNvPr id="1177" name="col1-دراسات معيارية-t"/>
+          <p:cNvPr id="1198" name="col1-دراسات معيارية-t"/>
           <p:cNvSpPr txBox="1"/>
           <p:nvPr/>
         </p:nvSpPr>
@@ -10562,7 +11520,7 @@
       </p:sp>
       <p:sp>
         <p:nvSpPr>
-          <p:cNvPr id="1178" name="col1-دراسات موجزة"/>
+          <p:cNvPr id="1199" name="col1-دراسات موجزة"/>
           <p:cNvSpPr/>
           <p:nvPr/>
         </p:nvSpPr>
@@ -10611,7 +11569,7 @@
       </p:sp>
       <p:sp>
         <p:nvSpPr>
-          <p:cNvPr id="1179" name="col1-دراسات موجزة-t"/>
+          <p:cNvPr id="1200" name="col1-دراسات موجزة-t"/>
           <p:cNvSpPr txBox="1"/>
           <p:nvPr/>
         </p:nvSpPr>
@@ -10650,7 +11608,7 @@
       </p:sp>
       <p:sp>
         <p:nvSpPr>
-          <p:cNvPr id="1180" name="col2"/>
+          <p:cNvPr id="1201" name="col2"/>
           <p:cNvSpPr/>
           <p:nvPr/>
         </p:nvSpPr>
@@ -10708,7 +11666,7 @@
       </p:sp>
       <p:sp>
         <p:nvSpPr>
-          <p:cNvPr id="1181" name="col2-bar"/>
+          <p:cNvPr id="1202" name="col2-bar"/>
           <p:cNvSpPr/>
           <p:nvPr/>
         </p:nvSpPr>
@@ -10757,7 +11715,7 @@
       </p:sp>
       <p:sp>
         <p:nvSpPr>
-          <p:cNvPr id="1182" name="col2-t"/>
+          <p:cNvPr id="1203" name="col2-t"/>
           <p:cNvSpPr txBox="1"/>
           <p:nvPr/>
         </p:nvSpPr>
@@ -10796,7 +11754,7 @@
       </p:sp>
       <p:sp>
         <p:nvSpPr>
-          <p:cNvPr id="1183" name="col2-أوراق وتقارير معرفية"/>
+          <p:cNvPr id="1204" name="col2-أوراق وتقارير معرفية"/>
           <p:cNvSpPr/>
           <p:nvPr/>
         </p:nvSpPr>
@@ -10845,7 +11803,7 @@
       </p:sp>
       <p:sp>
         <p:nvSpPr>
-          <p:cNvPr id="1184" name="col2-أوراق وتقارير معرفية-t"/>
+          <p:cNvPr id="1205" name="col2-أوراق وتقارير معرفية-t"/>
           <p:cNvSpPr txBox="1"/>
           <p:nvPr/>
         </p:nvSpPr>
@@ -10884,7 +11842,7 @@
       </p:sp>
       <p:sp>
         <p:nvSpPr>
-          <p:cNvPr id="1185" name="col2-White Papers"/>
+          <p:cNvPr id="1206" name="col2-White Papers"/>
           <p:cNvSpPr/>
           <p:nvPr/>
         </p:nvSpPr>
@@ -10933,7 +11891,7 @@
       </p:sp>
       <p:sp>
         <p:nvSpPr>
-          <p:cNvPr id="1186" name="col2-White Papers-t"/>
+          <p:cNvPr id="1207" name="col2-White Papers-t"/>
           <p:cNvSpPr txBox="1"/>
           <p:nvPr/>
         </p:nvSpPr>
@@ -10972,7 +11930,7 @@
       </p:sp>
       <p:sp>
         <p:nvSpPr>
-          <p:cNvPr id="1187" name="cb"/>
+          <p:cNvPr id="1208" name="cb"/>
           <p:cNvSpPr/>
           <p:nvPr/>
         </p:nvSpPr>
@@ -11036,7 +11994,7 @@
       </p:sp>
       <p:sp>
         <p:nvSpPr>
-          <p:cNvPr id="1188" name="cb-t"/>
+          <p:cNvPr id="1209" name="cb-t"/>
           <p:cNvSpPr txBox="1"/>
           <p:nvPr/>
         </p:nvSpPr>
@@ -11100,7 +12058,7 @@
       </p:grpSpPr>
       <p:sp>
         <p:nvSpPr>
-          <p:cNvPr id="1189" name="kicker"/>
+          <p:cNvPr id="1210" name="kicker"/>
           <p:cNvSpPr txBox="1"/>
           <p:nvPr/>
         </p:nvSpPr>
@@ -11139,7 +12097,7 @@
       </p:sp>
       <p:sp>
         <p:nvSpPr>
-          <p:cNvPr id="1190" name="title"/>
+          <p:cNvPr id="1211" name="title"/>
           <p:cNvSpPr txBox="1"/>
           <p:nvPr/>
         </p:nvSpPr>
@@ -11181,7 +12139,7 @@
       </p:sp>
       <p:sp>
         <p:nvSpPr>
-          <p:cNvPr id="1191" name="Slide Number Placeholder"/>
+          <p:cNvPr id="1212" name="Slide Number Placeholder"/>
           <p:cNvSpPr>
             <a:spLocks noGrp="1"/>
           </p:cNvSpPr>
@@ -11206,7 +12164,7 @@
       </p:sp>
       <p:cxnSp>
         <p:nvCxnSpPr>
-          <p:cNvPr id="1192" name="spoke0"/>
+          <p:cNvPr id="1213" name="spoke0"/>
           <p:cNvCxnSpPr/>
           <p:nvPr/>
         </p:nvCxnSpPr>
@@ -11229,7 +12187,7 @@
       </p:cxnSp>
       <p:cxnSp>
         <p:nvCxnSpPr>
-          <p:cNvPr id="1193" name="spoke1"/>
+          <p:cNvPr id="1214" name="spoke1"/>
           <p:cNvCxnSpPr/>
           <p:nvPr/>
         </p:nvCxnSpPr>
@@ -11252,7 +12210,7 @@
       </p:cxnSp>
       <p:cxnSp>
         <p:nvCxnSpPr>
-          <p:cNvPr id="1194" name="spoke2"/>
+          <p:cNvPr id="1215" name="spoke2"/>
           <p:cNvCxnSpPr/>
           <p:nvPr/>
         </p:nvCxnSpPr>
@@ -11275,7 +12233,7 @@
       </p:cxnSp>
       <p:cxnSp>
         <p:nvCxnSpPr>
-          <p:cNvPr id="1195" name="spoke3"/>
+          <p:cNvPr id="1216" name="spoke3"/>
           <p:cNvCxnSpPr/>
           <p:nvPr/>
         </p:nvCxnSpPr>
@@ -11298,7 +12256,7 @@
       </p:cxnSp>
       <p:cxnSp>
         <p:nvCxnSpPr>
-          <p:cNvPr id="1196" name="spoke4"/>
+          <p:cNvPr id="1217" name="spoke4"/>
           <p:cNvCxnSpPr/>
           <p:nvPr/>
         </p:nvCxnSpPr>
@@ -11321,7 +12279,7 @@
       </p:cxnSp>
       <p:sp>
         <p:nvSpPr>
-          <p:cNvPr id="1197" name="hub"/>
+          <p:cNvPr id="1218" name="hub"/>
           <p:cNvSpPr/>
           <p:nvPr/>
         </p:nvSpPr>
@@ -11383,7 +12341,7 @@
       </p:sp>
       <p:sp>
         <p:nvSpPr>
-          <p:cNvPr id="1198" name="hub-t"/>
+          <p:cNvPr id="1219" name="hub-t"/>
           <p:cNvSpPr txBox="1"/>
           <p:nvPr/>
         </p:nvSpPr>
@@ -11446,7 +12404,7 @@
       </p:sp>
       <p:sp>
         <p:nvSpPr>
-          <p:cNvPr id="1199" name="node0"/>
+          <p:cNvPr id="1220" name="node0"/>
           <p:cNvSpPr/>
           <p:nvPr/>
         </p:nvSpPr>
@@ -11504,7 +12462,7 @@
       </p:sp>
       <p:sp>
         <p:nvSpPr>
-          <p:cNvPr id="1200" name="node0-t"/>
+          <p:cNvPr id="1221" name="node0-t"/>
           <p:cNvSpPr txBox="1"/>
           <p:nvPr/>
         </p:nvSpPr>
@@ -11546,7 +12504,7 @@
       </p:sp>
       <p:sp>
         <p:nvSpPr>
-          <p:cNvPr id="1201" name="node1"/>
+          <p:cNvPr id="1222" name="node1"/>
           <p:cNvSpPr/>
           <p:nvPr/>
         </p:nvSpPr>
@@ -11604,7 +12562,7 @@
       </p:sp>
       <p:sp>
         <p:nvSpPr>
-          <p:cNvPr id="1202" name="node1-t"/>
+          <p:cNvPr id="1223" name="node1-t"/>
           <p:cNvSpPr txBox="1"/>
           <p:nvPr/>
         </p:nvSpPr>
@@ -11646,7 +12604,7 @@
       </p:sp>
       <p:sp>
         <p:nvSpPr>
-          <p:cNvPr id="1203" name="node2"/>
+          <p:cNvPr id="1224" name="node2"/>
           <p:cNvSpPr/>
           <p:nvPr/>
         </p:nvSpPr>
@@ -11704,7 +12662,7 @@
       </p:sp>
       <p:sp>
         <p:nvSpPr>
-          <p:cNvPr id="1204" name="node2-t"/>
+          <p:cNvPr id="1225" name="node2-t"/>
           <p:cNvSpPr txBox="1"/>
           <p:nvPr/>
         </p:nvSpPr>
@@ -11746,7 +12704,7 @@
       </p:sp>
       <p:sp>
         <p:nvSpPr>
-          <p:cNvPr id="1205" name="node3"/>
+          <p:cNvPr id="1226" name="node3"/>
           <p:cNvSpPr/>
           <p:nvPr/>
         </p:nvSpPr>
@@ -11804,7 +12762,7 @@
       </p:sp>
       <p:sp>
         <p:nvSpPr>
-          <p:cNvPr id="1206" name="node3-t"/>
+          <p:cNvPr id="1227" name="node3-t"/>
           <p:cNvSpPr txBox="1"/>
           <p:nvPr/>
         </p:nvSpPr>
@@ -11846,7 +12804,7 @@
       </p:sp>
       <p:sp>
         <p:nvSpPr>
-          <p:cNvPr id="1207" name="node4"/>
+          <p:cNvPr id="1228" name="node4"/>
           <p:cNvSpPr/>
           <p:nvPr/>
         </p:nvSpPr>
@@ -11904,7 +12862,7 @@
       </p:sp>
       <p:sp>
         <p:nvSpPr>
-          <p:cNvPr id="1208" name="node4-t"/>
+          <p:cNvPr id="1229" name="node4-t"/>
           <p:cNvSpPr txBox="1"/>
           <p:nvPr/>
         </p:nvSpPr>
@@ -11946,7 +12904,7 @@
       </p:sp>
       <p:sp>
         <p:nvSpPr>
-          <p:cNvPr id="1209" name="cb"/>
+          <p:cNvPr id="1230" name="cb"/>
           <p:cNvSpPr/>
           <p:nvPr/>
         </p:nvSpPr>
@@ -12010,7 +12968,7 @@
       </p:sp>
       <p:sp>
         <p:nvSpPr>
-          <p:cNvPr id="1210" name="cb-t"/>
+          <p:cNvPr id="1231" name="cb-t"/>
           <p:cNvSpPr txBox="1"/>
           <p:nvPr/>
         </p:nvSpPr>
@@ -12043,6 +13001,1388 @@
                 <a:cs typeface="DiodrumArabic-Semibold"/>
               </a:rPr>
               <a:t>الحاضنة تعمل كحلقة وصل بين هذه الأطراف حول أولويات مشتركة.</a:t>
+            </a:r>
+          </a:p>
+        </p:txBody>
+      </p:sp>
+    </p:spTree>
+  </p:cSld>
+  <p:clrMapOvr>
+    <a:masterClrMapping/>
+  </p:clrMapOvr>
+</p:sld>
+</file>
+
+<file path=ppt/slides/slide1101.xml><?xml version="1.0" encoding="utf-8"?>
+<p:sld xmlns:a="http://schemas.openxmlformats.org/drawingml/2006/main" xmlns:r="http://schemas.openxmlformats.org/officeDocument/2006/relationships" xmlns:p="http://schemas.openxmlformats.org/presentationml/2006/main">
+  <p:cSld>
+    <p:spTree>
+      <p:nvGrpSpPr>
+        <p:cNvPr id="1" name=""/>
+        <p:cNvGrpSpPr/>
+        <p:nvPr/>
+      </p:nvGrpSpPr>
+      <p:grpSpPr>
+        <a:xfrm>
+          <a:off x="0" y="0"/>
+          <a:ext cx="0" cy="0"/>
+          <a:chOff x="0" y="0"/>
+          <a:chExt cx="0" cy="0"/>
+        </a:xfrm>
+      </p:grpSpPr>
+      <p:sp>
+        <p:nvSpPr>
+          <p:cNvPr id="1232" name="kicker"/>
+          <p:cNvSpPr txBox="1"/>
+          <p:nvPr/>
+        </p:nvSpPr>
+        <p:spPr>
+          <a:xfrm>
+            <a:off x="301752" y="173736"/>
+            <a:ext cx="6254496" cy="128016"/>
+          </a:xfrm>
+          <a:prstGeom prst="rect">
+            <a:avLst/>
+          </a:prstGeom>
+          <a:noFill/>
+        </p:spPr>
+        <p:txBody>
+          <a:bodyPr wrap="square" lIns="0" tIns="0" rIns="0" bIns="0" anchor="t"/>
+          <a:lstStyle/>
+          <a:p>
+            <a:pPr algn="r" rtl="1">
+              <a:spcAft>
+                <a:spcPts val="0"/>
+              </a:spcAft>
+            </a:pPr>
+            <a:r>
+              <a:rPr lang="ar-SA" sz="562" b="0" dirty="0">
+                <a:solidFill>
+                  <a:srgbClr val="753BBD"/>
+                </a:solidFill>
+                <a:latin typeface="DiodrumArabic-Semibold"/>
+                <a:ea typeface="DiodrumArabic-Semibold"/>
+                <a:cs typeface="DiodrumArabic-Semibold"/>
+              </a:rPr>
+              <a:t>القسم الأول: حاضنة الأبحاث</a:t>
+            </a:r>
+          </a:p>
+        </p:txBody>
+      </p:sp>
+      <p:sp>
+        <p:nvSpPr>
+          <p:cNvPr id="1233" name="title"/>
+          <p:cNvSpPr txBox="1"/>
+          <p:nvPr/>
+        </p:nvSpPr>
+        <p:spPr>
+          <a:xfrm>
+            <a:off x="301752" y="329184"/>
+            <a:ext cx="6254496" cy="237744"/>
+          </a:xfrm>
+          <a:prstGeom prst="rect">
+            <a:avLst/>
+          </a:prstGeom>
+          <a:noFill/>
+        </p:spPr>
+        <p:txBody>
+          <a:bodyPr wrap="square" lIns="0" tIns="0" rIns="0" bIns="0" anchor="t"/>
+          <a:lstStyle/>
+          <a:p>
+            <a:pPr algn="r" rtl="1">
+              <a:lnSpc>
+                <a:spcPct val="118000"/>
+              </a:lnSpc>
+              <a:spcAft>
+                <a:spcPts val="0"/>
+              </a:spcAft>
+            </a:pPr>
+            <a:r>
+              <a:rPr lang="ar-SA" sz="1300" b="0" dirty="0">
+                <a:solidFill>
+                  <a:srgbClr val="24135F"/>
+                </a:solidFill>
+                <a:latin typeface="DiodrumArabic-Bold"/>
+                <a:ea typeface="DiodrumArabic-Bold"/>
+                <a:cs typeface="DiodrumArabic-Bold"/>
+              </a:rPr>
+              <a:t>أبرز الجهات البحثية المستهدفة</a:t>
+            </a:r>
+          </a:p>
+        </p:txBody>
+      </p:sp>
+      <p:sp>
+        <p:nvSpPr>
+          <p:cNvPr id="1234" name="Slide Number Placeholder"/>
+          <p:cNvSpPr>
+            <a:spLocks noGrp="1"/>
+          </p:cNvSpPr>
+          <p:nvPr>
+            <p:ph type="sldNum" sz="quarter" idx="12"/>
+          </p:nvPr>
+        </p:nvSpPr>
+        <p:spPr/>
+        <p:txBody>
+          <a:bodyPr/>
+          <a:lstStyle/>
+          <a:p>
+            <a:pPr algn="l"/>
+            <a:fld id="{C1FF6DA9-008F-8B48-92A6-B652298478BF}" type="slidenum">
+              <a:rPr lang="en-US" smtClean="0"/>
+              <a:pPr algn="l"/>
+              <a:t>1</a:t>
+            </a:fld>
+            <a:endParaRPr lang="en-US" dirty="0"/>
+          </a:p>
+        </p:txBody>
+      </p:sp>
+      <p:sp>
+        <p:nvSpPr>
+          <p:cNvPr id="1235" name="kku-card"/>
+          <p:cNvSpPr/>
+          <p:nvPr/>
+        </p:nvSpPr>
+        <p:spPr>
+          <a:xfrm>
+            <a:off x="5733288" y="1325880"/>
+            <a:ext cx="822960" cy="749808"/>
+          </a:xfrm>
+          <a:prstGeom prst="roundRect">
+            <a:avLst>
+              <a:gd name="adj" fmla="val 6341"/>
+            </a:avLst>
+          </a:prstGeom>
+          <a:solidFill>
+            <a:srgbClr val="FFFFFF"/>
+          </a:solidFill>
+          <a:ln w="7144">
+            <a:solidFill>
+              <a:srgbClr val="E0E0E2"/>
+            </a:solidFill>
+          </a:ln>
+          <a:effectLst>
+            <a:outerShdw blurRad="76200" dist="23812" dir="5400000" rotWithShape="0">
+              <a:srgbClr val="24135F">
+                <a:alpha val="10980"/>
+              </a:srgbClr>
+            </a:outerShdw>
+          </a:effectLst>
+        </p:spPr>
+        <p:style>
+          <a:lnRef idx="1">
+            <a:schemeClr val="accent1"/>
+          </a:lnRef>
+          <a:fillRef idx="3">
+            <a:schemeClr val="accent1"/>
+          </a:fillRef>
+          <a:effectRef idx="2">
+            <a:schemeClr val="accent1"/>
+          </a:effectRef>
+          <a:fontRef idx="minor">
+            <a:schemeClr val="lt1"/>
+          </a:fontRef>
+        </p:style>
+        <p:txBody>
+          <a:bodyPr rtlCol="0" anchor="ctr"/>
+          <a:lstStyle/>
+          <a:p>
+            <a:pPr algn="ctr"/>
+            <a:endParaRPr b="0">
+              <a:latin typeface="DiodrumArabic-Regular"/>
+              <a:cs typeface="DiodrumArabic-Regular"/>
+            </a:endParaRPr>
+          </a:p>
+        </p:txBody>
+      </p:sp>
+      <p:pic>
+        <p:nvPicPr>
+          <p:cNvPr id="1236" name="kku-pic"/>
+          <p:cNvPicPr>
+            <a:picLocks noChangeAspect="1"/>
+          </p:cNvPicPr>
+          <p:nvPr/>
+        </p:nvPicPr>
+        <p:blipFill>
+          <a:blip r:embed="rId2"/>
+          <a:stretch>
+            <a:fillRect/>
+          </a:stretch>
+        </p:blipFill>
+        <p:spPr>
+          <a:xfrm>
+            <a:off x="5843016" y="1525006"/>
+            <a:ext cx="603504" cy="351556"/>
+          </a:xfrm>
+          <a:prstGeom prst="rect">
+            <a:avLst/>
+          </a:prstGeom>
+        </p:spPr>
+      </p:pic>
+      <p:sp>
+        <p:nvSpPr>
+          <p:cNvPr id="1237" name="kacst-card"/>
+          <p:cNvSpPr/>
+          <p:nvPr/>
+        </p:nvSpPr>
+        <p:spPr>
+          <a:xfrm>
+            <a:off x="4828032" y="1325880"/>
+            <a:ext cx="822960" cy="749808"/>
+          </a:xfrm>
+          <a:prstGeom prst="roundRect">
+            <a:avLst>
+              <a:gd name="adj" fmla="val 6341"/>
+            </a:avLst>
+          </a:prstGeom>
+          <a:solidFill>
+            <a:srgbClr val="FFFFFF"/>
+          </a:solidFill>
+          <a:ln w="7144">
+            <a:solidFill>
+              <a:srgbClr val="E0E0E2"/>
+            </a:solidFill>
+          </a:ln>
+          <a:effectLst>
+            <a:outerShdw blurRad="76200" dist="23812" dir="5400000" rotWithShape="0">
+              <a:srgbClr val="24135F">
+                <a:alpha val="10980"/>
+              </a:srgbClr>
+            </a:outerShdw>
+          </a:effectLst>
+        </p:spPr>
+        <p:style>
+          <a:lnRef idx="1">
+            <a:schemeClr val="accent1"/>
+          </a:lnRef>
+          <a:fillRef idx="3">
+            <a:schemeClr val="accent1"/>
+          </a:fillRef>
+          <a:effectRef idx="2">
+            <a:schemeClr val="accent1"/>
+          </a:effectRef>
+          <a:fontRef idx="minor">
+            <a:schemeClr val="lt1"/>
+          </a:fontRef>
+        </p:style>
+        <p:txBody>
+          <a:bodyPr rtlCol="0" anchor="ctr"/>
+          <a:lstStyle/>
+          <a:p>
+            <a:pPr algn="ctr"/>
+            <a:endParaRPr b="0">
+              <a:latin typeface="DiodrumArabic-Regular"/>
+              <a:cs typeface="DiodrumArabic-Regular"/>
+            </a:endParaRPr>
+          </a:p>
+        </p:txBody>
+      </p:sp>
+      <p:pic>
+        <p:nvPicPr>
+          <p:cNvPr id="1238" name="kacst-pic"/>
+          <p:cNvPicPr>
+            <a:picLocks noChangeAspect="1"/>
+          </p:cNvPicPr>
+          <p:nvPr/>
+        </p:nvPicPr>
+        <p:blipFill>
+          <a:blip r:embed="rId3"/>
+          <a:stretch>
+            <a:fillRect/>
+          </a:stretch>
+        </p:blipFill>
+        <p:spPr>
+          <a:xfrm>
+            <a:off x="4937760" y="1585886"/>
+            <a:ext cx="603504" cy="229796"/>
+          </a:xfrm>
+          <a:prstGeom prst="rect">
+            <a:avLst/>
+          </a:prstGeom>
+        </p:spPr>
+      </p:pic>
+      <p:sp>
+        <p:nvSpPr>
+          <p:cNvPr id="1239" name="kfupm-card"/>
+          <p:cNvSpPr/>
+          <p:nvPr/>
+        </p:nvSpPr>
+        <p:spPr>
+          <a:xfrm>
+            <a:off x="3922776" y="1325880"/>
+            <a:ext cx="822960" cy="749808"/>
+          </a:xfrm>
+          <a:prstGeom prst="roundRect">
+            <a:avLst>
+              <a:gd name="adj" fmla="val 6341"/>
+            </a:avLst>
+          </a:prstGeom>
+          <a:solidFill>
+            <a:srgbClr val="FFFFFF"/>
+          </a:solidFill>
+          <a:ln w="7144">
+            <a:solidFill>
+              <a:srgbClr val="E0E0E2"/>
+            </a:solidFill>
+          </a:ln>
+          <a:effectLst>
+            <a:outerShdw blurRad="76200" dist="23812" dir="5400000" rotWithShape="0">
+              <a:srgbClr val="24135F">
+                <a:alpha val="10980"/>
+              </a:srgbClr>
+            </a:outerShdw>
+          </a:effectLst>
+        </p:spPr>
+        <p:style>
+          <a:lnRef idx="1">
+            <a:schemeClr val="accent1"/>
+          </a:lnRef>
+          <a:fillRef idx="3">
+            <a:schemeClr val="accent1"/>
+          </a:fillRef>
+          <a:effectRef idx="2">
+            <a:schemeClr val="accent1"/>
+          </a:effectRef>
+          <a:fontRef idx="minor">
+            <a:schemeClr val="lt1"/>
+          </a:fontRef>
+        </p:style>
+        <p:txBody>
+          <a:bodyPr rtlCol="0" anchor="ctr"/>
+          <a:lstStyle/>
+          <a:p>
+            <a:pPr algn="ctr"/>
+            <a:endParaRPr b="0">
+              <a:latin typeface="DiodrumArabic-Regular"/>
+              <a:cs typeface="DiodrumArabic-Regular"/>
+            </a:endParaRPr>
+          </a:p>
+        </p:txBody>
+      </p:sp>
+      <p:pic>
+        <p:nvPicPr>
+          <p:cNvPr id="1240" name="kfupm-pic"/>
+          <p:cNvPicPr>
+            <a:picLocks noChangeAspect="1"/>
+          </p:cNvPicPr>
+          <p:nvPr/>
+        </p:nvPicPr>
+        <p:blipFill>
+          <a:blip r:embed="rId4"/>
+          <a:stretch>
+            <a:fillRect/>
+          </a:stretch>
+        </p:blipFill>
+        <p:spPr>
+          <a:xfrm>
+            <a:off x="4032504" y="1600823"/>
+            <a:ext cx="603504" cy="199922"/>
+          </a:xfrm>
+          <a:prstGeom prst="rect">
+            <a:avLst/>
+          </a:prstGeom>
+        </p:spPr>
+      </p:pic>
+      <p:sp>
+        <p:nvSpPr>
+          <p:cNvPr id="1241" name="shaqra-card"/>
+          <p:cNvSpPr/>
+          <p:nvPr/>
+        </p:nvSpPr>
+        <p:spPr>
+          <a:xfrm>
+            <a:off x="3017520" y="1325880"/>
+            <a:ext cx="822960" cy="749808"/>
+          </a:xfrm>
+          <a:prstGeom prst="roundRect">
+            <a:avLst>
+              <a:gd name="adj" fmla="val 6341"/>
+            </a:avLst>
+          </a:prstGeom>
+          <a:solidFill>
+            <a:srgbClr val="FFFFFF"/>
+          </a:solidFill>
+          <a:ln w="7144">
+            <a:solidFill>
+              <a:srgbClr val="E0E0E2"/>
+            </a:solidFill>
+          </a:ln>
+          <a:effectLst>
+            <a:outerShdw blurRad="76200" dist="23812" dir="5400000" rotWithShape="0">
+              <a:srgbClr val="24135F">
+                <a:alpha val="10980"/>
+              </a:srgbClr>
+            </a:outerShdw>
+          </a:effectLst>
+        </p:spPr>
+        <p:style>
+          <a:lnRef idx="1">
+            <a:schemeClr val="accent1"/>
+          </a:lnRef>
+          <a:fillRef idx="3">
+            <a:schemeClr val="accent1"/>
+          </a:fillRef>
+          <a:effectRef idx="2">
+            <a:schemeClr val="accent1"/>
+          </a:effectRef>
+          <a:fontRef idx="minor">
+            <a:schemeClr val="lt1"/>
+          </a:fontRef>
+        </p:style>
+        <p:txBody>
+          <a:bodyPr rtlCol="0" anchor="ctr"/>
+          <a:lstStyle/>
+          <a:p>
+            <a:pPr algn="ctr"/>
+            <a:endParaRPr b="0">
+              <a:latin typeface="DiodrumArabic-Regular"/>
+              <a:cs typeface="DiodrumArabic-Regular"/>
+            </a:endParaRPr>
+          </a:p>
+        </p:txBody>
+      </p:sp>
+      <p:pic>
+        <p:nvPicPr>
+          <p:cNvPr id="1242" name="shaqra-pic"/>
+          <p:cNvPicPr>
+            <a:picLocks noChangeAspect="1"/>
+          </p:cNvPicPr>
+          <p:nvPr/>
+        </p:nvPicPr>
+        <p:blipFill>
+          <a:blip r:embed="rId5"/>
+          <a:stretch>
+            <a:fillRect/>
+          </a:stretch>
+        </p:blipFill>
+        <p:spPr>
+          <a:xfrm>
+            <a:off x="3144867" y="1463040"/>
+            <a:ext cx="568266" cy="475488"/>
+          </a:xfrm>
+          <a:prstGeom prst="rect">
+            <a:avLst/>
+          </a:prstGeom>
+        </p:spPr>
+      </p:pic>
+      <p:sp>
+        <p:nvSpPr>
+          <p:cNvPr id="1243" name="unident_teal-card"/>
+          <p:cNvSpPr/>
+          <p:nvPr/>
+        </p:nvSpPr>
+        <p:spPr>
+          <a:xfrm>
+            <a:off x="2112264" y="1325880"/>
+            <a:ext cx="822960" cy="749808"/>
+          </a:xfrm>
+          <a:prstGeom prst="roundRect">
+            <a:avLst>
+              <a:gd name="adj" fmla="val 6341"/>
+            </a:avLst>
+          </a:prstGeom>
+          <a:solidFill>
+            <a:srgbClr val="FFFFFF"/>
+          </a:solidFill>
+          <a:ln w="7144">
+            <a:solidFill>
+              <a:srgbClr val="E0E0E2"/>
+            </a:solidFill>
+          </a:ln>
+          <a:effectLst>
+            <a:outerShdw blurRad="76200" dist="23812" dir="5400000" rotWithShape="0">
+              <a:srgbClr val="24135F">
+                <a:alpha val="10980"/>
+              </a:srgbClr>
+            </a:outerShdw>
+          </a:effectLst>
+        </p:spPr>
+        <p:style>
+          <a:lnRef idx="1">
+            <a:schemeClr val="accent1"/>
+          </a:lnRef>
+          <a:fillRef idx="3">
+            <a:schemeClr val="accent1"/>
+          </a:fillRef>
+          <a:effectRef idx="2">
+            <a:schemeClr val="accent1"/>
+          </a:effectRef>
+          <a:fontRef idx="minor">
+            <a:schemeClr val="lt1"/>
+          </a:fontRef>
+        </p:style>
+        <p:txBody>
+          <a:bodyPr rtlCol="0" anchor="ctr"/>
+          <a:lstStyle/>
+          <a:p>
+            <a:pPr algn="ctr"/>
+            <a:endParaRPr b="0">
+              <a:latin typeface="DiodrumArabic-Regular"/>
+              <a:cs typeface="DiodrumArabic-Regular"/>
+            </a:endParaRPr>
+          </a:p>
+        </p:txBody>
+      </p:sp>
+      <p:pic>
+        <p:nvPicPr>
+          <p:cNvPr id="1244" name="unident_teal-pic"/>
+          <p:cNvPicPr>
+            <a:picLocks noChangeAspect="1"/>
+          </p:cNvPicPr>
+          <p:nvPr/>
+        </p:nvPicPr>
+        <p:blipFill>
+          <a:blip r:embed="rId6"/>
+          <a:stretch>
+            <a:fillRect/>
+          </a:stretch>
+        </p:blipFill>
+        <p:spPr>
+          <a:xfrm>
+            <a:off x="2221992" y="1508417"/>
+            <a:ext cx="603504" cy="384734"/>
+          </a:xfrm>
+          <a:prstGeom prst="rect">
+            <a:avLst/>
+          </a:prstGeom>
+        </p:spPr>
+      </p:pic>
+      <p:sp>
+        <p:nvSpPr>
+          <p:cNvPr id="1245" name="rdia-card"/>
+          <p:cNvSpPr/>
+          <p:nvPr/>
+        </p:nvSpPr>
+        <p:spPr>
+          <a:xfrm>
+            <a:off x="1207008" y="1325880"/>
+            <a:ext cx="822960" cy="749808"/>
+          </a:xfrm>
+          <a:prstGeom prst="roundRect">
+            <a:avLst>
+              <a:gd name="adj" fmla="val 6341"/>
+            </a:avLst>
+          </a:prstGeom>
+          <a:solidFill>
+            <a:srgbClr val="FFFFFF"/>
+          </a:solidFill>
+          <a:ln w="7144">
+            <a:solidFill>
+              <a:srgbClr val="E0E0E2"/>
+            </a:solidFill>
+          </a:ln>
+          <a:effectLst>
+            <a:outerShdw blurRad="76200" dist="23812" dir="5400000" rotWithShape="0">
+              <a:srgbClr val="24135F">
+                <a:alpha val="10980"/>
+              </a:srgbClr>
+            </a:outerShdw>
+          </a:effectLst>
+        </p:spPr>
+        <p:style>
+          <a:lnRef idx="1">
+            <a:schemeClr val="accent1"/>
+          </a:lnRef>
+          <a:fillRef idx="3">
+            <a:schemeClr val="accent1"/>
+          </a:fillRef>
+          <a:effectRef idx="2">
+            <a:schemeClr val="accent1"/>
+          </a:effectRef>
+          <a:fontRef idx="minor">
+            <a:schemeClr val="lt1"/>
+          </a:fontRef>
+        </p:style>
+        <p:txBody>
+          <a:bodyPr rtlCol="0" anchor="ctr"/>
+          <a:lstStyle/>
+          <a:p>
+            <a:pPr algn="ctr"/>
+            <a:endParaRPr b="0">
+              <a:latin typeface="DiodrumArabic-Regular"/>
+              <a:cs typeface="DiodrumArabic-Regular"/>
+            </a:endParaRPr>
+          </a:p>
+        </p:txBody>
+      </p:sp>
+      <p:pic>
+        <p:nvPicPr>
+          <p:cNvPr id="1246" name="rdia-pic"/>
+          <p:cNvPicPr>
+            <a:picLocks noChangeAspect="1"/>
+          </p:cNvPicPr>
+          <p:nvPr/>
+        </p:nvPicPr>
+        <p:blipFill>
+          <a:blip r:embed="rId7"/>
+          <a:stretch>
+            <a:fillRect/>
+          </a:stretch>
+        </p:blipFill>
+        <p:spPr>
+          <a:xfrm>
+            <a:off x="1316736" y="1599242"/>
+            <a:ext cx="603504" cy="203084"/>
+          </a:xfrm>
+          <a:prstGeom prst="rect">
+            <a:avLst/>
+          </a:prstGeom>
+        </p:spPr>
+      </p:pic>
+      <p:sp>
+        <p:nvSpPr>
+          <p:cNvPr id="1247" name="dco-card"/>
+          <p:cNvSpPr/>
+          <p:nvPr/>
+        </p:nvSpPr>
+        <p:spPr>
+          <a:xfrm>
+            <a:off x="301752" y="1325880"/>
+            <a:ext cx="822960" cy="749808"/>
+          </a:xfrm>
+          <a:prstGeom prst="roundRect">
+            <a:avLst>
+              <a:gd name="adj" fmla="val 6341"/>
+            </a:avLst>
+          </a:prstGeom>
+          <a:solidFill>
+            <a:srgbClr val="FFFFFF"/>
+          </a:solidFill>
+          <a:ln w="7144">
+            <a:solidFill>
+              <a:srgbClr val="E0E0E2"/>
+            </a:solidFill>
+          </a:ln>
+          <a:effectLst>
+            <a:outerShdw blurRad="76200" dist="23812" dir="5400000" rotWithShape="0">
+              <a:srgbClr val="24135F">
+                <a:alpha val="10980"/>
+              </a:srgbClr>
+            </a:outerShdw>
+          </a:effectLst>
+        </p:spPr>
+        <p:style>
+          <a:lnRef idx="1">
+            <a:schemeClr val="accent1"/>
+          </a:lnRef>
+          <a:fillRef idx="3">
+            <a:schemeClr val="accent1"/>
+          </a:fillRef>
+          <a:effectRef idx="2">
+            <a:schemeClr val="accent1"/>
+          </a:effectRef>
+          <a:fontRef idx="minor">
+            <a:schemeClr val="lt1"/>
+          </a:fontRef>
+        </p:style>
+        <p:txBody>
+          <a:bodyPr rtlCol="0" anchor="ctr"/>
+          <a:lstStyle/>
+          <a:p>
+            <a:pPr algn="ctr"/>
+            <a:endParaRPr b="0">
+              <a:latin typeface="DiodrumArabic-Regular"/>
+              <a:cs typeface="DiodrumArabic-Regular"/>
+            </a:endParaRPr>
+          </a:p>
+        </p:txBody>
+      </p:sp>
+      <p:pic>
+        <p:nvPicPr>
+          <p:cNvPr id="1248" name="dco-pic"/>
+          <p:cNvPicPr>
+            <a:picLocks noChangeAspect="1"/>
+          </p:cNvPicPr>
+          <p:nvPr/>
+        </p:nvPicPr>
+        <p:blipFill>
+          <a:blip r:embed="rId8"/>
+          <a:stretch>
+            <a:fillRect/>
+          </a:stretch>
+        </p:blipFill>
+        <p:spPr>
+          <a:xfrm>
+            <a:off x="411480" y="1536333"/>
+            <a:ext cx="603504" cy="328902"/>
+          </a:xfrm>
+          <a:prstGeom prst="rect">
+            <a:avLst/>
+          </a:prstGeom>
+        </p:spPr>
+      </p:pic>
+      <p:sp>
+        <p:nvSpPr>
+          <p:cNvPr id="1249" name="unident_1998-card"/>
+          <p:cNvSpPr/>
+          <p:nvPr/>
+        </p:nvSpPr>
+        <p:spPr>
+          <a:xfrm>
+            <a:off x="5733288" y="2203704"/>
+            <a:ext cx="822960" cy="749808"/>
+          </a:xfrm>
+          <a:prstGeom prst="roundRect">
+            <a:avLst>
+              <a:gd name="adj" fmla="val 6341"/>
+            </a:avLst>
+          </a:prstGeom>
+          <a:solidFill>
+            <a:srgbClr val="FFFFFF"/>
+          </a:solidFill>
+          <a:ln w="7144">
+            <a:solidFill>
+              <a:srgbClr val="E0E0E2"/>
+            </a:solidFill>
+          </a:ln>
+          <a:effectLst>
+            <a:outerShdw blurRad="76200" dist="23812" dir="5400000" rotWithShape="0">
+              <a:srgbClr val="24135F">
+                <a:alpha val="10980"/>
+              </a:srgbClr>
+            </a:outerShdw>
+          </a:effectLst>
+        </p:spPr>
+        <p:style>
+          <a:lnRef idx="1">
+            <a:schemeClr val="accent1"/>
+          </a:lnRef>
+          <a:fillRef idx="3">
+            <a:schemeClr val="accent1"/>
+          </a:fillRef>
+          <a:effectRef idx="2">
+            <a:schemeClr val="accent1"/>
+          </a:effectRef>
+          <a:fontRef idx="minor">
+            <a:schemeClr val="lt1"/>
+          </a:fontRef>
+        </p:style>
+        <p:txBody>
+          <a:bodyPr rtlCol="0" anchor="ctr"/>
+          <a:lstStyle/>
+          <a:p>
+            <a:pPr algn="ctr"/>
+            <a:endParaRPr b="0">
+              <a:latin typeface="DiodrumArabic-Regular"/>
+              <a:cs typeface="DiodrumArabic-Regular"/>
+            </a:endParaRPr>
+          </a:p>
+        </p:txBody>
+      </p:sp>
+      <p:pic>
+        <p:nvPicPr>
+          <p:cNvPr id="1250" name="unident_1998-pic"/>
+          <p:cNvPicPr>
+            <a:picLocks noChangeAspect="1"/>
+          </p:cNvPicPr>
+          <p:nvPr/>
+        </p:nvPicPr>
+        <p:blipFill>
+          <a:blip r:embed="rId9"/>
+          <a:stretch>
+            <a:fillRect/>
+          </a:stretch>
+        </p:blipFill>
+        <p:spPr>
+          <a:xfrm>
+            <a:off x="5884535" y="2340864"/>
+            <a:ext cx="520467" cy="475488"/>
+          </a:xfrm>
+          <a:prstGeom prst="rect">
+            <a:avLst/>
+          </a:prstGeom>
+        </p:spPr>
+      </p:pic>
+      <p:sp>
+        <p:nvSpPr>
+          <p:cNvPr id="1251" name="imam-card"/>
+          <p:cNvSpPr/>
+          <p:nvPr/>
+        </p:nvSpPr>
+        <p:spPr>
+          <a:xfrm>
+            <a:off x="4828032" y="2203704"/>
+            <a:ext cx="822960" cy="749808"/>
+          </a:xfrm>
+          <a:prstGeom prst="roundRect">
+            <a:avLst>
+              <a:gd name="adj" fmla="val 6341"/>
+            </a:avLst>
+          </a:prstGeom>
+          <a:solidFill>
+            <a:srgbClr val="FFFFFF"/>
+          </a:solidFill>
+          <a:ln w="7144">
+            <a:solidFill>
+              <a:srgbClr val="E0E0E2"/>
+            </a:solidFill>
+          </a:ln>
+          <a:effectLst>
+            <a:outerShdw blurRad="76200" dist="23812" dir="5400000" rotWithShape="0">
+              <a:srgbClr val="24135F">
+                <a:alpha val="10980"/>
+              </a:srgbClr>
+            </a:outerShdw>
+          </a:effectLst>
+        </p:spPr>
+        <p:style>
+          <a:lnRef idx="1">
+            <a:schemeClr val="accent1"/>
+          </a:lnRef>
+          <a:fillRef idx="3">
+            <a:schemeClr val="accent1"/>
+          </a:fillRef>
+          <a:effectRef idx="2">
+            <a:schemeClr val="accent1"/>
+          </a:effectRef>
+          <a:fontRef idx="minor">
+            <a:schemeClr val="lt1"/>
+          </a:fontRef>
+        </p:style>
+        <p:txBody>
+          <a:bodyPr rtlCol="0" anchor="ctr"/>
+          <a:lstStyle/>
+          <a:p>
+            <a:pPr algn="ctr"/>
+            <a:endParaRPr b="0">
+              <a:latin typeface="DiodrumArabic-Regular"/>
+              <a:cs typeface="DiodrumArabic-Regular"/>
+            </a:endParaRPr>
+          </a:p>
+        </p:txBody>
+      </p:sp>
+      <p:pic>
+        <p:nvPicPr>
+          <p:cNvPr id="1252" name="imam-pic"/>
+          <p:cNvPicPr>
+            <a:picLocks noChangeAspect="1"/>
+          </p:cNvPicPr>
+          <p:nvPr/>
+        </p:nvPicPr>
+        <p:blipFill>
+          <a:blip r:embed="rId10"/>
+          <a:stretch>
+            <a:fillRect/>
+          </a:stretch>
+        </p:blipFill>
+        <p:spPr>
+          <a:xfrm>
+            <a:off x="4946191" y="2340864"/>
+            <a:ext cx="586641" cy="475488"/>
+          </a:xfrm>
+          <a:prstGeom prst="rect">
+            <a:avLst/>
+          </a:prstGeom>
+        </p:spPr>
+      </p:pic>
+      <p:sp>
+        <p:nvSpPr>
+          <p:cNvPr id="1253" name="ksu-card"/>
+          <p:cNvSpPr/>
+          <p:nvPr/>
+        </p:nvSpPr>
+        <p:spPr>
+          <a:xfrm>
+            <a:off x="3922776" y="2203704"/>
+            <a:ext cx="822960" cy="749808"/>
+          </a:xfrm>
+          <a:prstGeom prst="roundRect">
+            <a:avLst>
+              <a:gd name="adj" fmla="val 6341"/>
+            </a:avLst>
+          </a:prstGeom>
+          <a:solidFill>
+            <a:srgbClr val="FFFFFF"/>
+          </a:solidFill>
+          <a:ln w="7144">
+            <a:solidFill>
+              <a:srgbClr val="E0E0E2"/>
+            </a:solidFill>
+          </a:ln>
+          <a:effectLst>
+            <a:outerShdw blurRad="76200" dist="23812" dir="5400000" rotWithShape="0">
+              <a:srgbClr val="24135F">
+                <a:alpha val="10980"/>
+              </a:srgbClr>
+            </a:outerShdw>
+          </a:effectLst>
+        </p:spPr>
+        <p:style>
+          <a:lnRef idx="1">
+            <a:schemeClr val="accent1"/>
+          </a:lnRef>
+          <a:fillRef idx="3">
+            <a:schemeClr val="accent1"/>
+          </a:fillRef>
+          <a:effectRef idx="2">
+            <a:schemeClr val="accent1"/>
+          </a:effectRef>
+          <a:fontRef idx="minor">
+            <a:schemeClr val="lt1"/>
+          </a:fontRef>
+        </p:style>
+        <p:txBody>
+          <a:bodyPr rtlCol="0" anchor="ctr"/>
+          <a:lstStyle/>
+          <a:p>
+            <a:pPr algn="ctr"/>
+            <a:endParaRPr b="0">
+              <a:latin typeface="DiodrumArabic-Regular"/>
+              <a:cs typeface="DiodrumArabic-Regular"/>
+            </a:endParaRPr>
+          </a:p>
+        </p:txBody>
+      </p:sp>
+      <p:pic>
+        <p:nvPicPr>
+          <p:cNvPr id="1254" name="ksu-pic"/>
+          <p:cNvPicPr>
+            <a:picLocks noChangeAspect="1"/>
+          </p:cNvPicPr>
+          <p:nvPr/>
+        </p:nvPicPr>
+        <p:blipFill>
+          <a:blip r:embed="rId11"/>
+          <a:stretch>
+            <a:fillRect/>
+          </a:stretch>
+        </p:blipFill>
+        <p:spPr>
+          <a:xfrm>
+            <a:off x="4032504" y="2467080"/>
+            <a:ext cx="603504" cy="223057"/>
+          </a:xfrm>
+          <a:prstGeom prst="rect">
+            <a:avLst/>
+          </a:prstGeom>
+        </p:spPr>
+      </p:pic>
+      <p:sp>
+        <p:nvSpPr>
+          <p:cNvPr id="1255" name="alfaisal-card"/>
+          <p:cNvSpPr/>
+          <p:nvPr/>
+        </p:nvSpPr>
+        <p:spPr>
+          <a:xfrm>
+            <a:off x="3017520" y="2203704"/>
+            <a:ext cx="822960" cy="749808"/>
+          </a:xfrm>
+          <a:prstGeom prst="roundRect">
+            <a:avLst>
+              <a:gd name="adj" fmla="val 6341"/>
+            </a:avLst>
+          </a:prstGeom>
+          <a:solidFill>
+            <a:srgbClr val="FFFFFF"/>
+          </a:solidFill>
+          <a:ln w="7144">
+            <a:solidFill>
+              <a:srgbClr val="E0E0E2"/>
+            </a:solidFill>
+          </a:ln>
+          <a:effectLst>
+            <a:outerShdw blurRad="76200" dist="23812" dir="5400000" rotWithShape="0">
+              <a:srgbClr val="24135F">
+                <a:alpha val="10980"/>
+              </a:srgbClr>
+            </a:outerShdw>
+          </a:effectLst>
+        </p:spPr>
+        <p:style>
+          <a:lnRef idx="1">
+            <a:schemeClr val="accent1"/>
+          </a:lnRef>
+          <a:fillRef idx="3">
+            <a:schemeClr val="accent1"/>
+          </a:fillRef>
+          <a:effectRef idx="2">
+            <a:schemeClr val="accent1"/>
+          </a:effectRef>
+          <a:fontRef idx="minor">
+            <a:schemeClr val="lt1"/>
+          </a:fontRef>
+        </p:style>
+        <p:txBody>
+          <a:bodyPr rtlCol="0" anchor="ctr"/>
+          <a:lstStyle/>
+          <a:p>
+            <a:pPr algn="ctr"/>
+            <a:endParaRPr b="0">
+              <a:latin typeface="DiodrumArabic-Regular"/>
+              <a:cs typeface="DiodrumArabic-Regular"/>
+            </a:endParaRPr>
+          </a:p>
+        </p:txBody>
+      </p:sp>
+      <p:pic>
+        <p:nvPicPr>
+          <p:cNvPr id="1256" name="alfaisal-pic"/>
+          <p:cNvPicPr>
+            <a:picLocks noChangeAspect="1"/>
+          </p:cNvPicPr>
+          <p:nvPr/>
+        </p:nvPicPr>
+        <p:blipFill>
+          <a:blip r:embed="rId12"/>
+          <a:stretch>
+            <a:fillRect/>
+          </a:stretch>
+        </p:blipFill>
+        <p:spPr>
+          <a:xfrm>
+            <a:off x="3127248" y="2430247"/>
+            <a:ext cx="603504" cy="296723"/>
+          </a:xfrm>
+          <a:prstGeom prst="rect">
+            <a:avLst/>
+          </a:prstGeom>
+        </p:spPr>
+      </p:pic>
+      <p:sp>
+        <p:nvSpPr>
+          <p:cNvPr id="1257" name="seu-card"/>
+          <p:cNvSpPr/>
+          <p:nvPr/>
+        </p:nvSpPr>
+        <p:spPr>
+          <a:xfrm>
+            <a:off x="2112264" y="2203704"/>
+            <a:ext cx="822960" cy="749808"/>
+          </a:xfrm>
+          <a:prstGeom prst="roundRect">
+            <a:avLst>
+              <a:gd name="adj" fmla="val 6341"/>
+            </a:avLst>
+          </a:prstGeom>
+          <a:solidFill>
+            <a:srgbClr val="FFFFFF"/>
+          </a:solidFill>
+          <a:ln w="7144">
+            <a:solidFill>
+              <a:srgbClr val="E0E0E2"/>
+            </a:solidFill>
+          </a:ln>
+          <a:effectLst>
+            <a:outerShdw blurRad="76200" dist="23812" dir="5400000" rotWithShape="0">
+              <a:srgbClr val="24135F">
+                <a:alpha val="10980"/>
+              </a:srgbClr>
+            </a:outerShdw>
+          </a:effectLst>
+        </p:spPr>
+        <p:style>
+          <a:lnRef idx="1">
+            <a:schemeClr val="accent1"/>
+          </a:lnRef>
+          <a:fillRef idx="3">
+            <a:schemeClr val="accent1"/>
+          </a:fillRef>
+          <a:effectRef idx="2">
+            <a:schemeClr val="accent1"/>
+          </a:effectRef>
+          <a:fontRef idx="minor">
+            <a:schemeClr val="lt1"/>
+          </a:fontRef>
+        </p:style>
+        <p:txBody>
+          <a:bodyPr rtlCol="0" anchor="ctr"/>
+          <a:lstStyle/>
+          <a:p>
+            <a:pPr algn="ctr"/>
+            <a:endParaRPr b="0">
+              <a:latin typeface="DiodrumArabic-Regular"/>
+              <a:cs typeface="DiodrumArabic-Regular"/>
+            </a:endParaRPr>
+          </a:p>
+        </p:txBody>
+      </p:sp>
+      <p:pic>
+        <p:nvPicPr>
+          <p:cNvPr id="1258" name="seu-pic"/>
+          <p:cNvPicPr>
+            <a:picLocks noChangeAspect="1"/>
+          </p:cNvPicPr>
+          <p:nvPr/>
+        </p:nvPicPr>
+        <p:blipFill>
+          <a:blip r:embed="rId13"/>
+          <a:stretch>
+            <a:fillRect/>
+          </a:stretch>
+        </p:blipFill>
+        <p:spPr>
+          <a:xfrm>
+            <a:off x="2221992" y="2502199"/>
+            <a:ext cx="603504" cy="152819"/>
+          </a:xfrm>
+          <a:prstGeom prst="rect">
+            <a:avLst/>
+          </a:prstGeom>
+        </p:spPr>
+      </p:pic>
+      <p:sp>
+        <p:nvSpPr>
+          <p:cNvPr id="1259" name="kaust-card"/>
+          <p:cNvSpPr/>
+          <p:nvPr/>
+        </p:nvSpPr>
+        <p:spPr>
+          <a:xfrm>
+            <a:off x="1207008" y="2203704"/>
+            <a:ext cx="822960" cy="749808"/>
+          </a:xfrm>
+          <a:prstGeom prst="roundRect">
+            <a:avLst>
+              <a:gd name="adj" fmla="val 6341"/>
+            </a:avLst>
+          </a:prstGeom>
+          <a:solidFill>
+            <a:srgbClr val="FFFFFF"/>
+          </a:solidFill>
+          <a:ln w="7144">
+            <a:solidFill>
+              <a:srgbClr val="E0E0E2"/>
+            </a:solidFill>
+          </a:ln>
+          <a:effectLst>
+            <a:outerShdw blurRad="76200" dist="23812" dir="5400000" rotWithShape="0">
+              <a:srgbClr val="24135F">
+                <a:alpha val="10980"/>
+              </a:srgbClr>
+            </a:outerShdw>
+          </a:effectLst>
+        </p:spPr>
+        <p:style>
+          <a:lnRef idx="1">
+            <a:schemeClr val="accent1"/>
+          </a:lnRef>
+          <a:fillRef idx="3">
+            <a:schemeClr val="accent1"/>
+          </a:fillRef>
+          <a:effectRef idx="2">
+            <a:schemeClr val="accent1"/>
+          </a:effectRef>
+          <a:fontRef idx="minor">
+            <a:schemeClr val="lt1"/>
+          </a:fontRef>
+        </p:style>
+        <p:txBody>
+          <a:bodyPr rtlCol="0" anchor="ctr"/>
+          <a:lstStyle/>
+          <a:p>
+            <a:pPr algn="ctr"/>
+            <a:endParaRPr b="0">
+              <a:latin typeface="DiodrumArabic-Regular"/>
+              <a:cs typeface="DiodrumArabic-Regular"/>
+            </a:endParaRPr>
+          </a:p>
+        </p:txBody>
+      </p:sp>
+      <p:pic>
+        <p:nvPicPr>
+          <p:cNvPr id="1260" name="kaust-pic"/>
+          <p:cNvPicPr>
+            <a:picLocks noChangeAspect="1"/>
+          </p:cNvPicPr>
+          <p:nvPr/>
+        </p:nvPicPr>
+        <p:blipFill>
+          <a:blip r:embed="rId14"/>
+          <a:stretch>
+            <a:fillRect/>
+          </a:stretch>
+        </p:blipFill>
+        <p:spPr>
+          <a:xfrm>
+            <a:off x="1316736" y="2454357"/>
+            <a:ext cx="603504" cy="248502"/>
+          </a:xfrm>
+          <a:prstGeom prst="rect">
+            <a:avLst/>
+          </a:prstGeom>
+        </p:spPr>
+      </p:pic>
+      <p:sp>
+        <p:nvSpPr>
+          <p:cNvPr id="1261" name="kau-card"/>
+          <p:cNvSpPr/>
+          <p:nvPr/>
+        </p:nvSpPr>
+        <p:spPr>
+          <a:xfrm>
+            <a:off x="301752" y="2203704"/>
+            <a:ext cx="822960" cy="749808"/>
+          </a:xfrm>
+          <a:prstGeom prst="roundRect">
+            <a:avLst>
+              <a:gd name="adj" fmla="val 6341"/>
+            </a:avLst>
+          </a:prstGeom>
+          <a:solidFill>
+            <a:srgbClr val="FFFFFF"/>
+          </a:solidFill>
+          <a:ln w="7144">
+            <a:solidFill>
+              <a:srgbClr val="E0E0E2"/>
+            </a:solidFill>
+          </a:ln>
+          <a:effectLst>
+            <a:outerShdw blurRad="76200" dist="23812" dir="5400000" rotWithShape="0">
+              <a:srgbClr val="24135F">
+                <a:alpha val="10980"/>
+              </a:srgbClr>
+            </a:outerShdw>
+          </a:effectLst>
+        </p:spPr>
+        <p:style>
+          <a:lnRef idx="1">
+            <a:schemeClr val="accent1"/>
+          </a:lnRef>
+          <a:fillRef idx="3">
+            <a:schemeClr val="accent1"/>
+          </a:fillRef>
+          <a:effectRef idx="2">
+            <a:schemeClr val="accent1"/>
+          </a:effectRef>
+          <a:fontRef idx="minor">
+            <a:schemeClr val="lt1"/>
+          </a:fontRef>
+        </p:style>
+        <p:txBody>
+          <a:bodyPr rtlCol="0" anchor="ctr"/>
+          <a:lstStyle/>
+          <a:p>
+            <a:pPr algn="ctr"/>
+            <a:endParaRPr b="0">
+              <a:latin typeface="DiodrumArabic-Regular"/>
+              <a:cs typeface="DiodrumArabic-Regular"/>
+            </a:endParaRPr>
+          </a:p>
+        </p:txBody>
+      </p:sp>
+      <p:pic>
+        <p:nvPicPr>
+          <p:cNvPr id="1262" name="kau-pic"/>
+          <p:cNvPicPr>
+            <a:picLocks noChangeAspect="1"/>
+          </p:cNvPicPr>
+          <p:nvPr/>
+        </p:nvPicPr>
+        <p:blipFill>
+          <a:blip r:embed="rId15"/>
+          <a:stretch>
+            <a:fillRect/>
+          </a:stretch>
+        </p:blipFill>
+        <p:spPr>
+          <a:xfrm>
+            <a:off x="471926" y="2340864"/>
+            <a:ext cx="482611" cy="475488"/>
+          </a:xfrm>
+          <a:prstGeom prst="rect">
+            <a:avLst/>
+          </a:prstGeom>
+        </p:spPr>
+      </p:pic>
+      <p:sp>
+        <p:nvSpPr>
+          <p:cNvPr id="1263" name="cb"/>
+          <p:cNvSpPr/>
+          <p:nvPr/>
+        </p:nvSpPr>
+        <p:spPr>
+          <a:xfrm>
+            <a:off x="301752" y="3127248"/>
+            <a:ext cx="6254496" cy="310896"/>
+          </a:xfrm>
+          <a:prstGeom prst="roundRect">
+            <a:avLst>
+              <a:gd name="adj" fmla="val 13541"/>
+            </a:avLst>
+          </a:prstGeom>
+          <a:gradFill>
+            <a:gsLst>
+              <a:gs pos="0">
+                <a:srgbClr val="24135F"/>
+              </a:gs>
+              <a:gs pos="100000">
+                <a:srgbClr val="753BBD"/>
+              </a:gs>
+            </a:gsLst>
+            <a:lin ang="8100000" scaled="1"/>
+          </a:gradFill>
+          <a:ln>
+            <a:noFill/>
+          </a:ln>
+          <a:effectLst>
+            <a:outerShdw blurRad="85725" dist="28575" dir="5400000" rotWithShape="0">
+              <a:srgbClr val="1A0B3D">
+                <a:alpha val="21961"/>
+              </a:srgbClr>
+            </a:outerShdw>
+          </a:effectLst>
+        </p:spPr>
+        <p:style>
+          <a:lnRef idx="1">
+            <a:schemeClr val="accent1"/>
+          </a:lnRef>
+          <a:fillRef idx="3">
+            <a:schemeClr val="accent1"/>
+          </a:fillRef>
+          <a:effectRef idx="2">
+            <a:schemeClr val="accent1"/>
+          </a:effectRef>
+          <a:fontRef idx="minor">
+            <a:schemeClr val="lt1"/>
+          </a:fontRef>
+        </p:style>
+        <p:txBody>
+          <a:bodyPr rtlCol="0" anchor="ctr"/>
+          <a:lstStyle/>
+          <a:p>
+            <a:pPr algn="ctr"/>
+            <a:endParaRPr b="0">
+              <a:latin typeface="DiodrumArabic-Regular"/>
+              <a:cs typeface="DiodrumArabic-Regular"/>
+            </a:endParaRPr>
+          </a:p>
+        </p:txBody>
+      </p:sp>
+      <p:sp>
+        <p:nvSpPr>
+          <p:cNvPr id="1264" name="cb-t"/>
+          <p:cNvSpPr txBox="1"/>
+          <p:nvPr/>
+        </p:nvSpPr>
+        <p:spPr>
+          <a:xfrm>
+            <a:off x="484632" y="3127248"/>
+            <a:ext cx="5888736" cy="310896"/>
+          </a:xfrm>
+          <a:prstGeom prst="rect">
+            <a:avLst/>
+          </a:prstGeom>
+          <a:noFill/>
+        </p:spPr>
+        <p:txBody>
+          <a:bodyPr wrap="square" lIns="0" tIns="0" rIns="0" bIns="0" anchor="ctr"/>
+          <a:lstStyle/>
+          <a:p>
+            <a:pPr algn="ctr" rtl="1">
+              <a:spcAft>
+                <a:spcPts val="0"/>
+              </a:spcAft>
+            </a:pPr>
+            <a:r>
+              <a:rPr lang="ar-SA" sz="560" b="0" dirty="0">
+                <a:solidFill>
+                  <a:srgbClr val="FFFFFF"/>
+                </a:solidFill>
+                <a:latin typeface="DiodrumArabic-Semibold"/>
+                <a:ea typeface="DiodrumArabic-Semibold"/>
+                <a:cs typeface="DiodrumArabic-Semibold"/>
+              </a:rPr>
+              <a:t>نطاق أولي للجهات المستهدفة؛ تُستكمل منظومة الشراكات وفق نطاق التنفيذ المعتمد.</a:t>
             </a:r>
           </a:p>
         </p:txBody>
@@ -12074,7 +14414,7 @@
       </p:grpSpPr>
       <p:sp>
         <p:nvSpPr>
-          <p:cNvPr id="1211" name="kicker"/>
+          <p:cNvPr id="1265" name="kicker"/>
           <p:cNvSpPr txBox="1"/>
           <p:nvPr/>
         </p:nvSpPr>
@@ -12113,7 +14453,7 @@
       </p:sp>
       <p:sp>
         <p:nvSpPr>
-          <p:cNvPr id="1212" name="title"/>
+          <p:cNvPr id="1266" name="title"/>
           <p:cNvSpPr txBox="1"/>
           <p:nvPr/>
         </p:nvSpPr>
@@ -12155,7 +14495,7 @@
       </p:sp>
       <p:sp>
         <p:nvSpPr>
-          <p:cNvPr id="1213" name="Slide Number Placeholder"/>
+          <p:cNvPr id="1267" name="Slide Number Placeholder"/>
           <p:cNvSpPr>
             <a:spLocks noGrp="1"/>
           </p:cNvSpPr>
@@ -12180,7 +14520,7 @@
       </p:sp>
       <p:cxnSp>
         <p:nvCxnSpPr>
-          <p:cNvPr id="1214" name="mt-axis"/>
+          <p:cNvPr id="1268" name="mt-axis"/>
           <p:cNvCxnSpPr/>
           <p:nvPr/>
         </p:nvCxnSpPr>
@@ -12201,7 +14541,7 @@
       </p:cxnSp>
       <p:sp>
         <p:nvSpPr>
-          <p:cNvPr id="1215" name="mt0-ring"/>
+          <p:cNvPr id="1269" name="mt0-ring"/>
           <p:cNvSpPr/>
           <p:nvPr/>
         </p:nvSpPr>
@@ -12250,7 +14590,7 @@
       </p:sp>
       <p:sp>
         <p:nvSpPr>
-          <p:cNvPr id="1216" name="mt0-dot"/>
+          <p:cNvPr id="1270" name="mt0-dot"/>
           <p:cNvSpPr/>
           <p:nvPr/>
         </p:nvSpPr>
@@ -12297,7 +14637,7 @@
       </p:sp>
       <p:sp>
         <p:nvSpPr>
-          <p:cNvPr id="1217" name="mt0-label"/>
+          <p:cNvPr id="1271" name="mt0-label"/>
           <p:cNvSpPr txBox="1"/>
           <p:nvPr/>
         </p:nvSpPr>
@@ -12336,7 +14676,7 @@
       </p:sp>
       <p:sp>
         <p:nvSpPr>
-          <p:cNvPr id="1218" name="mt0-title"/>
+          <p:cNvPr id="1272" name="mt0-title"/>
           <p:cNvSpPr txBox="1"/>
           <p:nvPr/>
         </p:nvSpPr>
@@ -12375,7 +14715,7 @@
       </p:sp>
       <p:sp>
         <p:nvSpPr>
-          <p:cNvPr id="1219" name="mt0-body"/>
+          <p:cNvPr id="1273" name="mt0-body"/>
           <p:cNvSpPr txBox="1"/>
           <p:nvPr/>
         </p:nvSpPr>
@@ -12417,7 +14757,7 @@
       </p:sp>
       <p:sp>
         <p:nvSpPr>
-          <p:cNvPr id="1220" name="mt1-ring"/>
+          <p:cNvPr id="1274" name="mt1-ring"/>
           <p:cNvSpPr/>
           <p:nvPr/>
         </p:nvSpPr>
@@ -12466,7 +14806,7 @@
       </p:sp>
       <p:sp>
         <p:nvSpPr>
-          <p:cNvPr id="1221" name="mt1-dot"/>
+          <p:cNvPr id="1275" name="mt1-dot"/>
           <p:cNvSpPr/>
           <p:nvPr/>
         </p:nvSpPr>
@@ -12513,7 +14853,7 @@
       </p:sp>
       <p:sp>
         <p:nvSpPr>
-          <p:cNvPr id="1222" name="mt1-label"/>
+          <p:cNvPr id="1276" name="mt1-label"/>
           <p:cNvSpPr txBox="1"/>
           <p:nvPr/>
         </p:nvSpPr>
@@ -12552,7 +14892,7 @@
       </p:sp>
       <p:sp>
         <p:nvSpPr>
-          <p:cNvPr id="1223" name="mt1-title"/>
+          <p:cNvPr id="1277" name="mt1-title"/>
           <p:cNvSpPr txBox="1"/>
           <p:nvPr/>
         </p:nvSpPr>
@@ -12591,7 +14931,7 @@
       </p:sp>
       <p:sp>
         <p:nvSpPr>
-          <p:cNvPr id="1224" name="mt1-body"/>
+          <p:cNvPr id="1278" name="mt1-body"/>
           <p:cNvSpPr txBox="1"/>
           <p:nvPr/>
         </p:nvSpPr>
@@ -12633,7 +14973,7 @@
       </p:sp>
       <p:sp>
         <p:nvSpPr>
-          <p:cNvPr id="1225" name="mt2-ring"/>
+          <p:cNvPr id="1279" name="mt2-ring"/>
           <p:cNvSpPr/>
           <p:nvPr/>
         </p:nvSpPr>
@@ -12682,7 +15022,7 @@
       </p:sp>
       <p:sp>
         <p:nvSpPr>
-          <p:cNvPr id="1226" name="mt2-dot"/>
+          <p:cNvPr id="1280" name="mt2-dot"/>
           <p:cNvSpPr/>
           <p:nvPr/>
         </p:nvSpPr>
@@ -12729,7 +15069,7 @@
       </p:sp>
       <p:sp>
         <p:nvSpPr>
-          <p:cNvPr id="1227" name="mt2-label"/>
+          <p:cNvPr id="1281" name="mt2-label"/>
           <p:cNvSpPr txBox="1"/>
           <p:nvPr/>
         </p:nvSpPr>
@@ -12768,7 +15108,7 @@
       </p:sp>
       <p:sp>
         <p:nvSpPr>
-          <p:cNvPr id="1228" name="mt2-title"/>
+          <p:cNvPr id="1282" name="mt2-title"/>
           <p:cNvSpPr txBox="1"/>
           <p:nvPr/>
         </p:nvSpPr>
@@ -12807,7 +15147,7 @@
       </p:sp>
       <p:sp>
         <p:nvSpPr>
-          <p:cNvPr id="1229" name="mt2-body"/>
+          <p:cNvPr id="1283" name="mt2-body"/>
           <p:cNvSpPr txBox="1"/>
           <p:nvPr/>
         </p:nvSpPr>
@@ -12849,7 +15189,7 @@
       </p:sp>
       <p:sp>
         <p:nvSpPr>
-          <p:cNvPr id="1230" name="cb"/>
+          <p:cNvPr id="1284" name="cb"/>
           <p:cNvSpPr/>
           <p:nvPr/>
         </p:nvSpPr>
@@ -12913,7 +15253,7 @@
       </p:sp>
       <p:sp>
         <p:nvSpPr>
-          <p:cNvPr id="1231" name="cb-t"/>
+          <p:cNvPr id="1285" name="cb-t"/>
           <p:cNvSpPr txBox="1"/>
           <p:nvPr/>
         </p:nvSpPr>
@@ -12977,7 +15317,7 @@
       </p:grpSpPr>
       <p:sp>
         <p:nvSpPr>
-          <p:cNvPr id="1232" name="kicker"/>
+          <p:cNvPr id="1286" name="kicker"/>
           <p:cNvSpPr txBox="1"/>
           <p:nvPr/>
         </p:nvSpPr>
@@ -13016,7 +15356,7 @@
       </p:sp>
       <p:sp>
         <p:nvSpPr>
-          <p:cNvPr id="1233" name="title"/>
+          <p:cNvPr id="1287" name="title"/>
           <p:cNvSpPr txBox="1"/>
           <p:nvPr/>
         </p:nvSpPr>
@@ -13058,7 +15398,7 @@
       </p:sp>
       <p:sp>
         <p:nvSpPr>
-          <p:cNvPr id="1234" name="Slide Number Placeholder"/>
+          <p:cNvPr id="1288" name="Slide Number Placeholder"/>
           <p:cNvSpPr>
             <a:spLocks noGrp="1"/>
           </p:cNvSpPr>
@@ -13083,7 +15423,7 @@
       </p:sp>
       <p:sp>
         <p:nvSpPr>
-          <p:cNvPr id="1235" name="ch0-0"/>
+          <p:cNvPr id="1289" name="ch0-0"/>
           <p:cNvSpPr/>
           <p:nvPr/>
         </p:nvSpPr>
@@ -13141,7 +15481,7 @@
       </p:sp>
       <p:sp>
         <p:nvSpPr>
-          <p:cNvPr id="1236" name="ch0-0-bar"/>
+          <p:cNvPr id="1290" name="ch0-0-bar"/>
           <p:cNvSpPr/>
           <p:nvPr/>
         </p:nvSpPr>
@@ -13190,7 +15530,7 @@
       </p:sp>
       <p:sp>
         <p:nvSpPr>
-          <p:cNvPr id="1237" name="ch0-0-title"/>
+          <p:cNvPr id="1291" name="ch0-0-title"/>
           <p:cNvSpPr txBox="1"/>
           <p:nvPr/>
         </p:nvSpPr>
@@ -13232,7 +15572,7 @@
       </p:sp>
       <p:sp>
         <p:nvSpPr>
-          <p:cNvPr id="1238" name="ch0-0-body"/>
+          <p:cNvPr id="1292" name="ch0-0-body"/>
           <p:cNvSpPr txBox="1"/>
           <p:nvPr/>
         </p:nvSpPr>
@@ -13274,7 +15614,7 @@
       </p:sp>
       <p:sp>
         <p:nvSpPr>
-          <p:cNvPr id="1239" name="ch0-1"/>
+          <p:cNvPr id="1293" name="ch0-1"/>
           <p:cNvSpPr/>
           <p:nvPr/>
         </p:nvSpPr>
@@ -13332,7 +15672,7 @@
       </p:sp>
       <p:sp>
         <p:nvSpPr>
-          <p:cNvPr id="1240" name="ch0-1-bar"/>
+          <p:cNvPr id="1294" name="ch0-1-bar"/>
           <p:cNvSpPr/>
           <p:nvPr/>
         </p:nvSpPr>
@@ -13381,7 +15721,7 @@
       </p:sp>
       <p:sp>
         <p:nvSpPr>
-          <p:cNvPr id="1241" name="ch0-1-title"/>
+          <p:cNvPr id="1295" name="ch0-1-title"/>
           <p:cNvSpPr txBox="1"/>
           <p:nvPr/>
         </p:nvSpPr>
@@ -13423,7 +15763,7 @@
       </p:sp>
       <p:sp>
         <p:nvSpPr>
-          <p:cNvPr id="1242" name="ch0-1-body"/>
+          <p:cNvPr id="1296" name="ch0-1-body"/>
           <p:cNvSpPr txBox="1"/>
           <p:nvPr/>
         </p:nvSpPr>
@@ -13465,7 +15805,7 @@
       </p:sp>
       <p:sp>
         <p:nvSpPr>
-          <p:cNvPr id="1243" name="ch0-2"/>
+          <p:cNvPr id="1297" name="ch0-2"/>
           <p:cNvSpPr/>
           <p:nvPr/>
         </p:nvSpPr>
@@ -13523,7 +15863,7 @@
       </p:sp>
       <p:sp>
         <p:nvSpPr>
-          <p:cNvPr id="1244" name="ch0-2-bar"/>
+          <p:cNvPr id="1298" name="ch0-2-bar"/>
           <p:cNvSpPr/>
           <p:nvPr/>
         </p:nvSpPr>
@@ -13572,7 +15912,7 @@
       </p:sp>
       <p:sp>
         <p:nvSpPr>
-          <p:cNvPr id="1245" name="ch0-2-title"/>
+          <p:cNvPr id="1299" name="ch0-2-title"/>
           <p:cNvSpPr txBox="1"/>
           <p:nvPr/>
         </p:nvSpPr>
@@ -13614,7 +15954,7 @@
       </p:sp>
       <p:sp>
         <p:nvSpPr>
-          <p:cNvPr id="1246" name="ch0-2-body"/>
+          <p:cNvPr id="1300" name="ch0-2-body"/>
           <p:cNvSpPr txBox="1"/>
           <p:nvPr/>
         </p:nvSpPr>
@@ -13656,7 +15996,7 @@
       </p:sp>
       <p:sp>
         <p:nvSpPr>
-          <p:cNvPr id="1247" name="ch1-0"/>
+          <p:cNvPr id="1301" name="ch1-0"/>
           <p:cNvSpPr/>
           <p:nvPr/>
         </p:nvSpPr>
@@ -13714,7 +16054,7 @@
       </p:sp>
       <p:sp>
         <p:nvSpPr>
-          <p:cNvPr id="1248" name="ch1-0-bar"/>
+          <p:cNvPr id="1302" name="ch1-0-bar"/>
           <p:cNvSpPr/>
           <p:nvPr/>
         </p:nvSpPr>
@@ -13763,7 +16103,7 @@
       </p:sp>
       <p:sp>
         <p:nvSpPr>
-          <p:cNvPr id="1249" name="ch1-0-title"/>
+          <p:cNvPr id="1303" name="ch1-0-title"/>
           <p:cNvSpPr txBox="1"/>
           <p:nvPr/>
         </p:nvSpPr>
@@ -13805,7 +16145,7 @@
       </p:sp>
       <p:sp>
         <p:nvSpPr>
-          <p:cNvPr id="1250" name="ch1-0-body"/>
+          <p:cNvPr id="1304" name="ch1-0-body"/>
           <p:cNvSpPr txBox="1"/>
           <p:nvPr/>
         </p:nvSpPr>
@@ -13847,7 +16187,7 @@
       </p:sp>
       <p:sp>
         <p:nvSpPr>
-          <p:cNvPr id="1251" name="ch1-1"/>
+          <p:cNvPr id="1305" name="ch1-1"/>
           <p:cNvSpPr/>
           <p:nvPr/>
         </p:nvSpPr>
@@ -13905,7 +16245,7 @@
       </p:sp>
       <p:sp>
         <p:nvSpPr>
-          <p:cNvPr id="1252" name="ch1-1-bar"/>
+          <p:cNvPr id="1306" name="ch1-1-bar"/>
           <p:cNvSpPr/>
           <p:nvPr/>
         </p:nvSpPr>
@@ -13954,7 +16294,7 @@
       </p:sp>
       <p:sp>
         <p:nvSpPr>
-          <p:cNvPr id="1253" name="ch1-1-title"/>
+          <p:cNvPr id="1307" name="ch1-1-title"/>
           <p:cNvSpPr txBox="1"/>
           <p:nvPr/>
         </p:nvSpPr>
@@ -13996,7 +16336,7 @@
       </p:sp>
       <p:sp>
         <p:nvSpPr>
-          <p:cNvPr id="1254" name="ch1-1-body"/>
+          <p:cNvPr id="1308" name="ch1-1-body"/>
           <p:cNvSpPr txBox="1"/>
           <p:nvPr/>
         </p:nvSpPr>
@@ -14038,7 +16378,7 @@
       </p:sp>
       <p:sp>
         <p:nvSpPr>
-          <p:cNvPr id="1255" name="ch1-2"/>
+          <p:cNvPr id="1309" name="ch1-2"/>
           <p:cNvSpPr/>
           <p:nvPr/>
         </p:nvSpPr>
@@ -14102,7 +16442,7 @@
       </p:sp>
       <p:sp>
         <p:nvSpPr>
-          <p:cNvPr id="1256" name="ch1-2-title"/>
+          <p:cNvPr id="1310" name="ch1-2-title"/>
           <p:cNvSpPr txBox="1"/>
           <p:nvPr/>
         </p:nvSpPr>
@@ -14144,7 +16484,7 @@
       </p:sp>
       <p:sp>
         <p:nvSpPr>
-          <p:cNvPr id="1257" name="ch1-2-body"/>
+          <p:cNvPr id="1311" name="ch1-2-body"/>
           <p:cNvSpPr txBox="1"/>
           <p:nvPr/>
         </p:nvSpPr>
@@ -14211,7 +16551,7 @@
       </p:grpSpPr>
       <p:sp>
         <p:nvSpPr>
-          <p:cNvPr id="1258" name="big-num"/>
+          <p:cNvPr id="1312" name="big-num"/>
           <p:cNvSpPr txBox="1"/>
           <p:nvPr/>
         </p:nvSpPr>
@@ -14250,7 +16590,7 @@
       </p:sp>
       <p:sp>
         <p:nvSpPr>
-          <p:cNvPr id="1259" name="kicker"/>
+          <p:cNvPr id="1313" name="kicker"/>
           <p:cNvSpPr txBox="1"/>
           <p:nvPr/>
         </p:nvSpPr>
@@ -14289,7 +16629,7 @@
       </p:sp>
       <p:sp>
         <p:nvSpPr>
-          <p:cNvPr id="1260" name="title"/>
+          <p:cNvPr id="1314" name="title"/>
           <p:cNvSpPr txBox="1"/>
           <p:nvPr/>
         </p:nvSpPr>
@@ -14331,7 +16671,7 @@
       </p:sp>
       <p:sp>
         <p:nvSpPr>
-          <p:cNvPr id="1261" name="desc"/>
+          <p:cNvPr id="1315" name="desc"/>
           <p:cNvSpPr txBox="1"/>
           <p:nvPr/>
         </p:nvSpPr>
@@ -14373,7 +16713,7 @@
       </p:sp>
       <p:sp>
         <p:nvSpPr>
-          <p:cNvPr id="1262" name="prog1"/>
+          <p:cNvPr id="1316" name="prog1"/>
           <p:cNvSpPr/>
           <p:nvPr/>
         </p:nvSpPr>
@@ -14424,7 +16764,7 @@
       </p:sp>
       <p:sp>
         <p:nvSpPr>
-          <p:cNvPr id="1263" name="prog2"/>
+          <p:cNvPr id="1317" name="prog2"/>
           <p:cNvSpPr/>
           <p:nvPr/>
         </p:nvSpPr>
@@ -14473,7 +16813,7 @@
       </p:sp>
       <p:sp>
         <p:nvSpPr>
-          <p:cNvPr id="1264" name="prog3"/>
+          <p:cNvPr id="1318" name="prog3"/>
           <p:cNvSpPr/>
           <p:nvPr/>
         </p:nvSpPr>
@@ -14549,7 +16889,7 @@
       </p:grpSpPr>
       <p:sp>
         <p:nvSpPr>
-          <p:cNvPr id="1265" name="kicker"/>
+          <p:cNvPr id="1319" name="kicker"/>
           <p:cNvSpPr txBox="1"/>
           <p:nvPr/>
         </p:nvSpPr>
@@ -14588,7 +16928,7 @@
       </p:sp>
       <p:sp>
         <p:nvSpPr>
-          <p:cNvPr id="1266" name="title"/>
+          <p:cNvPr id="1320" name="title"/>
           <p:cNvSpPr txBox="1"/>
           <p:nvPr/>
         </p:nvSpPr>
@@ -14630,7 +16970,7 @@
       </p:sp>
       <p:sp>
         <p:nvSpPr>
-          <p:cNvPr id="1267" name="subtitle"/>
+          <p:cNvPr id="1321" name="subtitle"/>
           <p:cNvSpPr txBox="1"/>
           <p:nvPr/>
         </p:nvSpPr>
@@ -14672,7 +17012,7 @@
       </p:sp>
       <p:sp>
         <p:nvSpPr>
-          <p:cNvPr id="1268" name="Slide Number Placeholder"/>
+          <p:cNvPr id="1322" name="Slide Number Placeholder"/>
           <p:cNvSpPr>
             <a:spLocks noGrp="1"/>
           </p:cNvSpPr>
@@ -14697,7 +17037,7 @@
       </p:sp>
       <p:sp>
         <p:nvSpPr>
-          <p:cNvPr id="1269" name="fg0"/>
+          <p:cNvPr id="1323" name="fg0"/>
           <p:cNvSpPr/>
           <p:nvPr/>
         </p:nvSpPr>
@@ -14755,7 +17095,7 @@
       </p:sp>
       <p:sp>
         <p:nvSpPr>
-          <p:cNvPr id="1270" name="fg0-bar"/>
+          <p:cNvPr id="1324" name="fg0-bar"/>
           <p:cNvSpPr/>
           <p:nvPr/>
         </p:nvSpPr>
@@ -14804,7 +17144,7 @@
       </p:sp>
       <p:sp>
         <p:nvSpPr>
-          <p:cNvPr id="1271" name="fg0-title"/>
+          <p:cNvPr id="1325" name="fg0-title"/>
           <p:cNvSpPr txBox="1"/>
           <p:nvPr/>
         </p:nvSpPr>
@@ -14846,7 +17186,7 @@
       </p:sp>
       <p:sp>
         <p:nvSpPr>
-          <p:cNvPr id="1272" name="fg0-body"/>
+          <p:cNvPr id="1326" name="fg0-body"/>
           <p:cNvSpPr txBox="1"/>
           <p:nvPr/>
         </p:nvSpPr>
@@ -14888,7 +17228,7 @@
       </p:sp>
       <p:sp>
         <p:nvSpPr>
-          <p:cNvPr id="1273" name="fg1"/>
+          <p:cNvPr id="1327" name="fg1"/>
           <p:cNvSpPr/>
           <p:nvPr/>
         </p:nvSpPr>
@@ -14946,7 +17286,7 @@
       </p:sp>
       <p:sp>
         <p:nvSpPr>
-          <p:cNvPr id="1274" name="fg1-bar"/>
+          <p:cNvPr id="1328" name="fg1-bar"/>
           <p:cNvSpPr/>
           <p:nvPr/>
         </p:nvSpPr>
@@ -14995,7 +17335,7 @@
       </p:sp>
       <p:sp>
         <p:nvSpPr>
-          <p:cNvPr id="1275" name="fg1-title"/>
+          <p:cNvPr id="1329" name="fg1-title"/>
           <p:cNvSpPr txBox="1"/>
           <p:nvPr/>
         </p:nvSpPr>
@@ -15037,7 +17377,7 @@
       </p:sp>
       <p:sp>
         <p:nvSpPr>
-          <p:cNvPr id="1276" name="fg1-body"/>
+          <p:cNvPr id="1330" name="fg1-body"/>
           <p:cNvSpPr txBox="1"/>
           <p:nvPr/>
         </p:nvSpPr>
@@ -15079,7 +17419,7 @@
       </p:sp>
       <p:sp>
         <p:nvSpPr>
-          <p:cNvPr id="1277" name="fg2"/>
+          <p:cNvPr id="1331" name="fg2"/>
           <p:cNvSpPr/>
           <p:nvPr/>
         </p:nvSpPr>
@@ -15137,7 +17477,7 @@
       </p:sp>
       <p:sp>
         <p:nvSpPr>
-          <p:cNvPr id="1278" name="fg2-bar"/>
+          <p:cNvPr id="1332" name="fg2-bar"/>
           <p:cNvSpPr/>
           <p:nvPr/>
         </p:nvSpPr>
@@ -15186,7 +17526,7 @@
       </p:sp>
       <p:sp>
         <p:nvSpPr>
-          <p:cNvPr id="1279" name="fg2-title"/>
+          <p:cNvPr id="1333" name="fg2-title"/>
           <p:cNvSpPr txBox="1"/>
           <p:nvPr/>
         </p:nvSpPr>
@@ -15228,7 +17568,7 @@
       </p:sp>
       <p:sp>
         <p:nvSpPr>
-          <p:cNvPr id="1280" name="fg2-body"/>
+          <p:cNvPr id="1334" name="fg2-body"/>
           <p:cNvSpPr txBox="1"/>
           <p:nvPr/>
         </p:nvSpPr>
@@ -15270,7 +17610,7 @@
       </p:sp>
       <p:sp>
         <p:nvSpPr>
-          <p:cNvPr id="1281" name="fg3"/>
+          <p:cNvPr id="1335" name="fg3"/>
           <p:cNvSpPr/>
           <p:nvPr/>
         </p:nvSpPr>
@@ -15328,7 +17668,7 @@
       </p:sp>
       <p:sp>
         <p:nvSpPr>
-          <p:cNvPr id="1282" name="fg3-bar"/>
+          <p:cNvPr id="1336" name="fg3-bar"/>
           <p:cNvSpPr/>
           <p:nvPr/>
         </p:nvSpPr>
@@ -15377,7 +17717,7 @@
       </p:sp>
       <p:sp>
         <p:nvSpPr>
-          <p:cNvPr id="1283" name="fg3-title"/>
+          <p:cNvPr id="1337" name="fg3-title"/>
           <p:cNvSpPr txBox="1"/>
           <p:nvPr/>
         </p:nvSpPr>
@@ -15419,7 +17759,7 @@
       </p:sp>
       <p:sp>
         <p:nvSpPr>
-          <p:cNvPr id="1284" name="fg3-body"/>
+          <p:cNvPr id="1338" name="fg3-body"/>
           <p:cNvSpPr txBox="1"/>
           <p:nvPr/>
         </p:nvSpPr>
@@ -15461,7 +17801,7 @@
       </p:sp>
       <p:sp>
         <p:nvSpPr>
-          <p:cNvPr id="1285" name="cb"/>
+          <p:cNvPr id="1339" name="cb"/>
           <p:cNvSpPr/>
           <p:nvPr/>
         </p:nvSpPr>
@@ -15525,7 +17865,7 @@
       </p:sp>
       <p:sp>
         <p:nvSpPr>
-          <p:cNvPr id="1286" name="cb-t"/>
+          <p:cNvPr id="1340" name="cb-t"/>
           <p:cNvSpPr txBox="1"/>
           <p:nvPr/>
         </p:nvSpPr>
@@ -15589,7 +17929,7 @@
       </p:grpSpPr>
       <p:sp>
         <p:nvSpPr>
-          <p:cNvPr id="1287" name="kicker"/>
+          <p:cNvPr id="1341" name="kicker"/>
           <p:cNvSpPr txBox="1"/>
           <p:nvPr/>
         </p:nvSpPr>
@@ -15628,7 +17968,7 @@
       </p:sp>
       <p:sp>
         <p:nvSpPr>
-          <p:cNvPr id="1288" name="title"/>
+          <p:cNvPr id="1342" name="title"/>
           <p:cNvSpPr txBox="1"/>
           <p:nvPr/>
         </p:nvSpPr>
@@ -15670,7 +18010,7 @@
       </p:sp>
       <p:sp>
         <p:nvSpPr>
-          <p:cNvPr id="1289" name="Slide Number Placeholder"/>
+          <p:cNvPr id="1343" name="Slide Number Placeholder"/>
           <p:cNvSpPr>
             <a:spLocks noGrp="1"/>
           </p:cNvSpPr>
@@ -15695,7 +18035,7 @@
       </p:sp>
       <p:sp>
         <p:nvSpPr>
-          <p:cNvPr id="1290" name="info"/>
+          <p:cNvPr id="1344" name="info"/>
           <p:cNvSpPr/>
           <p:nvPr/>
         </p:nvSpPr>
@@ -15744,7 +18084,7 @@
       </p:sp>
       <p:sp>
         <p:nvSpPr>
-          <p:cNvPr id="1291" name="info-التاريخ"/>
+          <p:cNvPr id="1345" name="info-التاريخ"/>
           <p:cNvSpPr txBox="1"/>
           <p:nvPr/>
         </p:nvSpPr>
@@ -15783,7 +18123,7 @@
       </p:sp>
       <p:sp>
         <p:nvSpPr>
-          <p:cNvPr id="1292" name="info-التاريخ-v"/>
+          <p:cNvPr id="1346" name="info-التاريخ-v"/>
           <p:cNvSpPr txBox="1"/>
           <p:nvPr/>
         </p:nvSpPr>
@@ -15822,7 +18162,7 @@
       </p:sp>
       <p:sp>
         <p:nvSpPr>
-          <p:cNvPr id="1293" name="info-الوقت"/>
+          <p:cNvPr id="1347" name="info-الوقت"/>
           <p:cNvSpPr txBox="1"/>
           <p:nvPr/>
         </p:nvSpPr>
@@ -15861,7 +18201,7 @@
       </p:sp>
       <p:sp>
         <p:nvSpPr>
-          <p:cNvPr id="1294" name="info-الوقت-v"/>
+          <p:cNvPr id="1348" name="info-الوقت-v"/>
           <p:cNvSpPr txBox="1"/>
           <p:nvPr/>
         </p:nvSpPr>
@@ -15900,7 +18240,7 @@
       </p:sp>
       <p:sp>
         <p:nvSpPr>
-          <p:cNvPr id="1295" name="info-الموقع"/>
+          <p:cNvPr id="1349" name="info-الموقع"/>
           <p:cNvSpPr txBox="1"/>
           <p:nvPr/>
         </p:nvSpPr>
@@ -15939,7 +18279,7 @@
       </p:sp>
       <p:sp>
         <p:nvSpPr>
-          <p:cNvPr id="1296" name="info-الموقع-v"/>
+          <p:cNvPr id="1350" name="info-الموقع-v"/>
           <p:cNvSpPr txBox="1"/>
           <p:nvPr/>
         </p:nvSpPr>
@@ -15978,7 +18318,7 @@
       </p:sp>
       <p:cxnSp>
         <p:nvCxnSpPr>
-          <p:cNvPr id="1297" name="info-rule"/>
+          <p:cNvPr id="1351" name="info-rule"/>
           <p:cNvCxnSpPr/>
           <p:nvPr/>
         </p:nvCxnSpPr>
@@ -15999,7 +18339,7 @@
       </p:cxnSp>
       <p:sp>
         <p:nvSpPr>
-          <p:cNvPr id="1298" name="info-aud"/>
+          <p:cNvPr id="1352" name="info-aud"/>
           <p:cNvSpPr txBox="1"/>
           <p:nvPr/>
         </p:nvSpPr>
@@ -16038,7 +18378,7 @@
       </p:sp>
       <p:sp>
         <p:nvSpPr>
-          <p:cNvPr id="1299" name="info-aud-v"/>
+          <p:cNvPr id="1353" name="info-aud-v"/>
           <p:cNvSpPr txBox="1"/>
           <p:nvPr/>
         </p:nvSpPr>
@@ -16080,7 +18420,7 @@
       </p:sp>
       <p:sp>
         <p:nvSpPr>
-          <p:cNvPr id="1300" name="stat-lbl"/>
+          <p:cNvPr id="1354" name="stat-lbl"/>
           <p:cNvSpPr txBox="1"/>
           <p:nvPr/>
         </p:nvSpPr>
@@ -16119,7 +18459,7 @@
       </p:sp>
       <p:sp>
         <p:nvSpPr>
-          <p:cNvPr id="1301" name="stat1"/>
+          <p:cNvPr id="1355" name="stat1"/>
           <p:cNvSpPr txBox="1"/>
           <p:nvPr/>
         </p:nvSpPr>
@@ -16158,7 +18498,7 @@
       </p:sp>
       <p:sp>
         <p:nvSpPr>
-          <p:cNvPr id="1302" name="stat1-l"/>
+          <p:cNvPr id="1356" name="stat1-l"/>
           <p:cNvSpPr txBox="1"/>
           <p:nvPr/>
         </p:nvSpPr>
@@ -16197,7 +18537,7 @@
       </p:sp>
       <p:sp>
         <p:nvSpPr>
-          <p:cNvPr id="1303" name="stat2"/>
+          <p:cNvPr id="1357" name="stat2"/>
           <p:cNvSpPr txBox="1"/>
           <p:nvPr/>
         </p:nvSpPr>
@@ -16236,7 +18576,7 @@
       </p:sp>
       <p:sp>
         <p:nvSpPr>
-          <p:cNvPr id="1304" name="stat2-l"/>
+          <p:cNvPr id="1358" name="stat2-l"/>
           <p:cNvSpPr txBox="1"/>
           <p:nvPr/>
         </p:nvSpPr>
@@ -16300,7 +18640,7 @@
       </p:grpSpPr>
       <p:sp>
         <p:nvSpPr>
-          <p:cNvPr id="1305" name="kicker"/>
+          <p:cNvPr id="1359" name="kicker"/>
           <p:cNvSpPr txBox="1"/>
           <p:nvPr/>
         </p:nvSpPr>
@@ -16339,7 +18679,7 @@
       </p:sp>
       <p:sp>
         <p:nvSpPr>
-          <p:cNvPr id="1306" name="title"/>
+          <p:cNvPr id="1360" name="title"/>
           <p:cNvSpPr txBox="1"/>
           <p:nvPr/>
         </p:nvSpPr>
@@ -16381,7 +18721,7 @@
       </p:sp>
       <p:sp>
         <p:nvSpPr>
-          <p:cNvPr id="1307" name="Slide Number Placeholder"/>
+          <p:cNvPr id="1361" name="Slide Number Placeholder"/>
           <p:cNvSpPr>
             <a:spLocks noGrp="1"/>
           </p:cNvSpPr>
@@ -16406,7 +18746,7 @@
       </p:sp>
       <p:sp>
         <p:nvSpPr>
-          <p:cNvPr id="1308" name="ez0"/>
+          <p:cNvPr id="1362" name="ez0"/>
           <p:cNvSpPr/>
           <p:nvPr/>
         </p:nvSpPr>
@@ -16470,7 +18810,7 @@
       </p:sp>
       <p:sp>
         <p:nvSpPr>
-          <p:cNvPr id="1309" name="ez0-title"/>
+          <p:cNvPr id="1363" name="ez0-title"/>
           <p:cNvSpPr txBox="1"/>
           <p:nvPr/>
         </p:nvSpPr>
@@ -16512,7 +18852,7 @@
       </p:sp>
       <p:sp>
         <p:nvSpPr>
-          <p:cNvPr id="1310" name="ez0-body"/>
+          <p:cNvPr id="1364" name="ez0-body"/>
           <p:cNvSpPr txBox="1"/>
           <p:nvPr/>
         </p:nvSpPr>
@@ -16554,7 +18894,7 @@
       </p:sp>
       <p:sp>
         <p:nvSpPr>
-          <p:cNvPr id="1311" name="ez1"/>
+          <p:cNvPr id="1365" name="ez1"/>
           <p:cNvSpPr/>
           <p:nvPr/>
         </p:nvSpPr>
@@ -16612,7 +18952,7 @@
       </p:sp>
       <p:sp>
         <p:nvSpPr>
-          <p:cNvPr id="1312" name="ez1-bar"/>
+          <p:cNvPr id="1366" name="ez1-bar"/>
           <p:cNvSpPr/>
           <p:nvPr/>
         </p:nvSpPr>
@@ -16661,7 +19001,7 @@
       </p:sp>
       <p:sp>
         <p:nvSpPr>
-          <p:cNvPr id="1313" name="ez1-title"/>
+          <p:cNvPr id="1367" name="ez1-title"/>
           <p:cNvSpPr txBox="1"/>
           <p:nvPr/>
         </p:nvSpPr>
@@ -16703,7 +19043,7 @@
       </p:sp>
       <p:sp>
         <p:nvSpPr>
-          <p:cNvPr id="1314" name="ez1-body"/>
+          <p:cNvPr id="1368" name="ez1-body"/>
           <p:cNvSpPr txBox="1"/>
           <p:nvPr/>
         </p:nvSpPr>
@@ -16745,7 +19085,7 @@
       </p:sp>
       <p:sp>
         <p:nvSpPr>
-          <p:cNvPr id="1315" name="ez2"/>
+          <p:cNvPr id="1369" name="ez2"/>
           <p:cNvSpPr/>
           <p:nvPr/>
         </p:nvSpPr>
@@ -16803,7 +19143,7 @@
       </p:sp>
       <p:sp>
         <p:nvSpPr>
-          <p:cNvPr id="1316" name="ez2-bar"/>
+          <p:cNvPr id="1370" name="ez2-bar"/>
           <p:cNvSpPr/>
           <p:nvPr/>
         </p:nvSpPr>
@@ -16852,7 +19192,7 @@
       </p:sp>
       <p:sp>
         <p:nvSpPr>
-          <p:cNvPr id="1317" name="ez2-title"/>
+          <p:cNvPr id="1371" name="ez2-title"/>
           <p:cNvSpPr txBox="1"/>
           <p:nvPr/>
         </p:nvSpPr>
@@ -16894,7 +19234,7 @@
       </p:sp>
       <p:sp>
         <p:nvSpPr>
-          <p:cNvPr id="1318" name="ez2-body"/>
+          <p:cNvPr id="1372" name="ez2-body"/>
           <p:cNvSpPr txBox="1"/>
           <p:nvPr/>
         </p:nvSpPr>
@@ -16936,7 +19276,7 @@
       </p:sp>
       <p:sp>
         <p:nvSpPr>
-          <p:cNvPr id="1319" name="ez3"/>
+          <p:cNvPr id="1373" name="ez3"/>
           <p:cNvSpPr/>
           <p:nvPr/>
         </p:nvSpPr>
@@ -16994,7 +19334,7 @@
       </p:sp>
       <p:sp>
         <p:nvSpPr>
-          <p:cNvPr id="1320" name="ez3-bar"/>
+          <p:cNvPr id="1374" name="ez3-bar"/>
           <p:cNvSpPr/>
           <p:nvPr/>
         </p:nvSpPr>
@@ -17043,7 +19383,7 @@
       </p:sp>
       <p:sp>
         <p:nvSpPr>
-          <p:cNvPr id="1321" name="ez3-title"/>
+          <p:cNvPr id="1375" name="ez3-title"/>
           <p:cNvSpPr txBox="1"/>
           <p:nvPr/>
         </p:nvSpPr>
@@ -17085,7 +19425,7 @@
       </p:sp>
       <p:sp>
         <p:nvSpPr>
-          <p:cNvPr id="1322" name="ez3-body"/>
+          <p:cNvPr id="1376" name="ez3-body"/>
           <p:cNvSpPr txBox="1"/>
           <p:nvPr/>
         </p:nvSpPr>
@@ -17127,7 +19467,7 @@
       </p:sp>
       <p:sp>
         <p:nvSpPr>
-          <p:cNvPr id="1323" name="cb"/>
+          <p:cNvPr id="1377" name="cb"/>
           <p:cNvSpPr/>
           <p:nvPr/>
         </p:nvSpPr>
@@ -17191,7 +19531,7 @@
       </p:sp>
       <p:sp>
         <p:nvSpPr>
-          <p:cNvPr id="1324" name="cb-t"/>
+          <p:cNvPr id="1378" name="cb-t"/>
           <p:cNvSpPr txBox="1"/>
           <p:nvPr/>
         </p:nvSpPr>
@@ -17255,7 +19595,7 @@
       </p:grpSpPr>
       <p:sp>
         <p:nvSpPr>
-          <p:cNvPr id="1325" name="kicker"/>
+          <p:cNvPr id="1379" name="kicker"/>
           <p:cNvSpPr txBox="1"/>
           <p:nvPr/>
         </p:nvSpPr>
@@ -17294,7 +19634,7 @@
       </p:sp>
       <p:sp>
         <p:nvSpPr>
-          <p:cNvPr id="1326" name="title"/>
+          <p:cNvPr id="1380" name="title"/>
           <p:cNvSpPr txBox="1"/>
           <p:nvPr/>
         </p:nvSpPr>
@@ -17336,7 +19676,7 @@
       </p:sp>
       <p:sp>
         <p:nvSpPr>
-          <p:cNvPr id="1327" name="Slide Number Placeholder"/>
+          <p:cNvPr id="1381" name="Slide Number Placeholder"/>
           <p:cNvSpPr>
             <a:spLocks noGrp="1"/>
           </p:cNvSpPr>
@@ -17361,7 +19701,7 @@
       </p:sp>
       <p:cxnSp>
         <p:nvCxnSpPr>
-          <p:cNvPr id="1328" name="r-rail"/>
+          <p:cNvPr id="1382" name="r-rail"/>
           <p:cNvCxnSpPr/>
           <p:nvPr/>
         </p:nvCxnSpPr>
@@ -17382,7 +19722,7 @@
       </p:cxnSp>
       <p:sp>
         <p:nvSpPr>
-          <p:cNvPr id="1329" name="r0-dot"/>
+          <p:cNvPr id="1383" name="r0-dot"/>
           <p:cNvSpPr/>
           <p:nvPr/>
         </p:nvSpPr>
@@ -17429,7 +19769,7 @@
       </p:sp>
       <p:sp>
         <p:nvSpPr>
-          <p:cNvPr id="1330" name="r0-time"/>
+          <p:cNvPr id="1384" name="r0-time"/>
           <p:cNvSpPr txBox="1"/>
           <p:nvPr/>
         </p:nvSpPr>
@@ -17468,7 +19808,7 @@
       </p:sp>
       <p:sp>
         <p:nvSpPr>
-          <p:cNvPr id="1331" name="r0-title"/>
+          <p:cNvPr id="1385" name="r0-title"/>
           <p:cNvSpPr txBox="1"/>
           <p:nvPr/>
         </p:nvSpPr>
@@ -17510,7 +19850,7 @@
       </p:sp>
       <p:sp>
         <p:nvSpPr>
-          <p:cNvPr id="1332" name="r1-dot"/>
+          <p:cNvPr id="1386" name="r1-dot"/>
           <p:cNvSpPr/>
           <p:nvPr/>
         </p:nvSpPr>
@@ -17557,7 +19897,7 @@
       </p:sp>
       <p:sp>
         <p:nvSpPr>
-          <p:cNvPr id="1333" name="r1-time"/>
+          <p:cNvPr id="1387" name="r1-time"/>
           <p:cNvSpPr txBox="1"/>
           <p:nvPr/>
         </p:nvSpPr>
@@ -17596,7 +19936,7 @@
       </p:sp>
       <p:sp>
         <p:nvSpPr>
-          <p:cNvPr id="1334" name="r1-title"/>
+          <p:cNvPr id="1388" name="r1-title"/>
           <p:cNvSpPr txBox="1"/>
           <p:nvPr/>
         </p:nvSpPr>
@@ -17638,7 +19978,7 @@
       </p:sp>
       <p:sp>
         <p:nvSpPr>
-          <p:cNvPr id="1335" name="r2-dot"/>
+          <p:cNvPr id="1389" name="r2-dot"/>
           <p:cNvSpPr/>
           <p:nvPr/>
         </p:nvSpPr>
@@ -17685,7 +20025,7 @@
       </p:sp>
       <p:sp>
         <p:nvSpPr>
-          <p:cNvPr id="1336" name="r2-time"/>
+          <p:cNvPr id="1390" name="r2-time"/>
           <p:cNvSpPr txBox="1"/>
           <p:nvPr/>
         </p:nvSpPr>
@@ -17724,7 +20064,7 @@
       </p:sp>
       <p:sp>
         <p:nvSpPr>
-          <p:cNvPr id="1337" name="r2-title"/>
+          <p:cNvPr id="1391" name="r2-title"/>
           <p:cNvSpPr txBox="1"/>
           <p:nvPr/>
         </p:nvSpPr>
@@ -17766,7 +20106,7 @@
       </p:sp>
       <p:sp>
         <p:nvSpPr>
-          <p:cNvPr id="1338" name="r3-dot"/>
+          <p:cNvPr id="1392" name="r3-dot"/>
           <p:cNvSpPr/>
           <p:nvPr/>
         </p:nvSpPr>
@@ -17813,7 +20153,7 @@
       </p:sp>
       <p:sp>
         <p:nvSpPr>
-          <p:cNvPr id="1339" name="r3-time"/>
+          <p:cNvPr id="1393" name="r3-time"/>
           <p:cNvSpPr txBox="1"/>
           <p:nvPr/>
         </p:nvSpPr>
@@ -17852,7 +20192,7 @@
       </p:sp>
       <p:sp>
         <p:nvSpPr>
-          <p:cNvPr id="1340" name="r3-title"/>
+          <p:cNvPr id="1394" name="r3-title"/>
           <p:cNvSpPr txBox="1"/>
           <p:nvPr/>
         </p:nvSpPr>
@@ -17894,7 +20234,7 @@
       </p:sp>
       <p:sp>
         <p:nvSpPr>
-          <p:cNvPr id="1341" name="r4-dot"/>
+          <p:cNvPr id="1395" name="r4-dot"/>
           <p:cNvSpPr/>
           <p:nvPr/>
         </p:nvSpPr>
@@ -17941,7 +20281,7 @@
       </p:sp>
       <p:sp>
         <p:nvSpPr>
-          <p:cNvPr id="1342" name="r4-time"/>
+          <p:cNvPr id="1396" name="r4-time"/>
           <p:cNvSpPr txBox="1"/>
           <p:nvPr/>
         </p:nvSpPr>
@@ -17980,7 +20320,7 @@
       </p:sp>
       <p:sp>
         <p:nvSpPr>
-          <p:cNvPr id="1343" name="r4-title"/>
+          <p:cNvPr id="1397" name="r4-title"/>
           <p:cNvSpPr txBox="1"/>
           <p:nvPr/>
         </p:nvSpPr>
@@ -18022,7 +20362,7 @@
       </p:sp>
       <p:sp>
         <p:nvSpPr>
-          <p:cNvPr id="1344" name="r5-dot"/>
+          <p:cNvPr id="1398" name="r5-dot"/>
           <p:cNvSpPr/>
           <p:nvPr/>
         </p:nvSpPr>
@@ -18069,7 +20409,7 @@
       </p:sp>
       <p:sp>
         <p:nvSpPr>
-          <p:cNvPr id="1345" name="r5-time"/>
+          <p:cNvPr id="1399" name="r5-time"/>
           <p:cNvSpPr txBox="1"/>
           <p:nvPr/>
         </p:nvSpPr>
@@ -18108,7 +20448,7 @@
       </p:sp>
       <p:sp>
         <p:nvSpPr>
-          <p:cNvPr id="1346" name="r5-title"/>
+          <p:cNvPr id="1400" name="r5-title"/>
           <p:cNvSpPr txBox="1"/>
           <p:nvPr/>
         </p:nvSpPr>
@@ -18150,7 +20490,7 @@
       </p:sp>
       <p:sp>
         <p:nvSpPr>
-          <p:cNvPr id="1347" name="r6-dot"/>
+          <p:cNvPr id="1401" name="r6-dot"/>
           <p:cNvSpPr/>
           <p:nvPr/>
         </p:nvSpPr>
@@ -18197,7 +20537,7 @@
       </p:sp>
       <p:sp>
         <p:nvSpPr>
-          <p:cNvPr id="1348" name="r6-time"/>
+          <p:cNvPr id="1402" name="r6-time"/>
           <p:cNvSpPr txBox="1"/>
           <p:nvPr/>
         </p:nvSpPr>
@@ -18236,7 +20576,7 @@
       </p:sp>
       <p:sp>
         <p:nvSpPr>
-          <p:cNvPr id="1349" name="r6-title"/>
+          <p:cNvPr id="1403" name="r6-title"/>
           <p:cNvSpPr txBox="1"/>
           <p:nvPr/>
         </p:nvSpPr>
@@ -18278,7 +20618,7 @@
       </p:sp>
       <p:cxnSp>
         <p:nvCxnSpPr>
-          <p:cNvPr id="1350" name="l-rail"/>
+          <p:cNvPr id="1404" name="l-rail"/>
           <p:cNvCxnSpPr/>
           <p:nvPr/>
         </p:nvCxnSpPr>
@@ -18299,7 +20639,7 @@
       </p:cxnSp>
       <p:sp>
         <p:nvSpPr>
-          <p:cNvPr id="1351" name="l0-dot"/>
+          <p:cNvPr id="1405" name="l0-dot"/>
           <p:cNvSpPr/>
           <p:nvPr/>
         </p:nvSpPr>
@@ -18346,7 +20686,7 @@
       </p:sp>
       <p:sp>
         <p:nvSpPr>
-          <p:cNvPr id="1352" name="l0-time"/>
+          <p:cNvPr id="1406" name="l0-time"/>
           <p:cNvSpPr txBox="1"/>
           <p:nvPr/>
         </p:nvSpPr>
@@ -18385,7 +20725,7 @@
       </p:sp>
       <p:sp>
         <p:nvSpPr>
-          <p:cNvPr id="1353" name="l0-title"/>
+          <p:cNvPr id="1407" name="l0-title"/>
           <p:cNvSpPr txBox="1"/>
           <p:nvPr/>
         </p:nvSpPr>
@@ -18427,7 +20767,7 @@
       </p:sp>
       <p:sp>
         <p:nvSpPr>
-          <p:cNvPr id="1354" name="l1-dot"/>
+          <p:cNvPr id="1408" name="l1-dot"/>
           <p:cNvSpPr/>
           <p:nvPr/>
         </p:nvSpPr>
@@ -18474,7 +20814,7 @@
       </p:sp>
       <p:sp>
         <p:nvSpPr>
-          <p:cNvPr id="1355" name="l1-time"/>
+          <p:cNvPr id="1409" name="l1-time"/>
           <p:cNvSpPr txBox="1"/>
           <p:nvPr/>
         </p:nvSpPr>
@@ -18513,7 +20853,7 @@
       </p:sp>
       <p:sp>
         <p:nvSpPr>
-          <p:cNvPr id="1356" name="l1-title"/>
+          <p:cNvPr id="1410" name="l1-title"/>
           <p:cNvSpPr txBox="1"/>
           <p:nvPr/>
         </p:nvSpPr>
@@ -18555,7 +20895,7 @@
       </p:sp>
       <p:sp>
         <p:nvSpPr>
-          <p:cNvPr id="1357" name="l2-dot"/>
+          <p:cNvPr id="1411" name="l2-dot"/>
           <p:cNvSpPr/>
           <p:nvPr/>
         </p:nvSpPr>
@@ -18602,7 +20942,7 @@
       </p:sp>
       <p:sp>
         <p:nvSpPr>
-          <p:cNvPr id="1358" name="l2-time"/>
+          <p:cNvPr id="1412" name="l2-time"/>
           <p:cNvSpPr txBox="1"/>
           <p:nvPr/>
         </p:nvSpPr>
@@ -18641,7 +20981,7 @@
       </p:sp>
       <p:sp>
         <p:nvSpPr>
-          <p:cNvPr id="1359" name="l2-title"/>
+          <p:cNvPr id="1413" name="l2-title"/>
           <p:cNvSpPr txBox="1"/>
           <p:nvPr/>
         </p:nvSpPr>
@@ -18683,7 +21023,7 @@
       </p:sp>
       <p:sp>
         <p:nvSpPr>
-          <p:cNvPr id="1360" name="l3-dot"/>
+          <p:cNvPr id="1414" name="l3-dot"/>
           <p:cNvSpPr/>
           <p:nvPr/>
         </p:nvSpPr>
@@ -18730,7 +21070,7 @@
       </p:sp>
       <p:sp>
         <p:nvSpPr>
-          <p:cNvPr id="1361" name="l3-time"/>
+          <p:cNvPr id="1415" name="l3-time"/>
           <p:cNvSpPr txBox="1"/>
           <p:nvPr/>
         </p:nvSpPr>
@@ -18769,7 +21109,7 @@
       </p:sp>
       <p:sp>
         <p:nvSpPr>
-          <p:cNvPr id="1362" name="l3-title"/>
+          <p:cNvPr id="1416" name="l3-title"/>
           <p:cNvSpPr txBox="1"/>
           <p:nvPr/>
         </p:nvSpPr>
@@ -18811,7 +21151,7 @@
       </p:sp>
       <p:sp>
         <p:nvSpPr>
-          <p:cNvPr id="1363" name="l4-dot"/>
+          <p:cNvPr id="1417" name="l4-dot"/>
           <p:cNvSpPr/>
           <p:nvPr/>
         </p:nvSpPr>
@@ -18858,7 +21198,7 @@
       </p:sp>
       <p:sp>
         <p:nvSpPr>
-          <p:cNvPr id="1364" name="l4-time"/>
+          <p:cNvPr id="1418" name="l4-time"/>
           <p:cNvSpPr txBox="1"/>
           <p:nvPr/>
         </p:nvSpPr>
@@ -18897,7 +21237,7 @@
       </p:sp>
       <p:sp>
         <p:nvSpPr>
-          <p:cNvPr id="1365" name="l4-title"/>
+          <p:cNvPr id="1419" name="l4-title"/>
           <p:cNvSpPr txBox="1"/>
           <p:nvPr/>
         </p:nvSpPr>
@@ -18939,7 +21279,7 @@
       </p:sp>
       <p:sp>
         <p:nvSpPr>
-          <p:cNvPr id="1366" name="l5-dot"/>
+          <p:cNvPr id="1420" name="l5-dot"/>
           <p:cNvSpPr/>
           <p:nvPr/>
         </p:nvSpPr>
@@ -18986,7 +21326,7 @@
       </p:sp>
       <p:sp>
         <p:nvSpPr>
-          <p:cNvPr id="1367" name="l5-time"/>
+          <p:cNvPr id="1421" name="l5-time"/>
           <p:cNvSpPr txBox="1"/>
           <p:nvPr/>
         </p:nvSpPr>
@@ -19025,7 +21365,7 @@
       </p:sp>
       <p:sp>
         <p:nvSpPr>
-          <p:cNvPr id="1368" name="l5-title"/>
+          <p:cNvPr id="1422" name="l5-title"/>
           <p:cNvSpPr txBox="1"/>
           <p:nvPr/>
         </p:nvSpPr>
@@ -19067,7 +21407,7 @@
       </p:sp>
       <p:sp>
         <p:nvSpPr>
-          <p:cNvPr id="1369" name="l6-dot"/>
+          <p:cNvPr id="1423" name="l6-dot"/>
           <p:cNvSpPr/>
           <p:nvPr/>
         </p:nvSpPr>
@@ -19114,7 +21454,7 @@
       </p:sp>
       <p:sp>
         <p:nvSpPr>
-          <p:cNvPr id="1370" name="l6-time"/>
+          <p:cNvPr id="1424" name="l6-time"/>
           <p:cNvSpPr txBox="1"/>
           <p:nvPr/>
         </p:nvSpPr>
@@ -19153,7 +21493,7 @@
       </p:sp>
       <p:sp>
         <p:nvSpPr>
-          <p:cNvPr id="1371" name="l6-title"/>
+          <p:cNvPr id="1425" name="l6-title"/>
           <p:cNvSpPr txBox="1"/>
           <p:nvPr/>
         </p:nvSpPr>
@@ -19220,7 +21560,7 @@
       </p:grpSpPr>
       <p:sp>
         <p:nvSpPr>
-          <p:cNvPr id="1372" name="kicker"/>
+          <p:cNvPr id="1426" name="kicker"/>
           <p:cNvSpPr txBox="1"/>
           <p:nvPr/>
         </p:nvSpPr>
@@ -19259,7 +21599,7 @@
       </p:sp>
       <p:sp>
         <p:nvSpPr>
-          <p:cNvPr id="1373" name="title"/>
+          <p:cNvPr id="1427" name="title"/>
           <p:cNvSpPr txBox="1"/>
           <p:nvPr/>
         </p:nvSpPr>
@@ -19301,7 +21641,7 @@
       </p:sp>
       <p:sp>
         <p:nvSpPr>
-          <p:cNvPr id="1374" name="Slide Number Placeholder"/>
+          <p:cNvPr id="1428" name="Slide Number Placeholder"/>
           <p:cNvSpPr>
             <a:spLocks noGrp="1"/>
           </p:cNvSpPr>
@@ -19326,7 +21666,7 @@
       </p:sp>
       <p:sp>
         <p:nvSpPr>
-          <p:cNvPr id="1375" name="ss0"/>
+          <p:cNvPr id="1429" name="ss0"/>
           <p:cNvSpPr/>
           <p:nvPr/>
         </p:nvSpPr>
@@ -19384,7 +21724,7 @@
       </p:sp>
       <p:sp>
         <p:nvSpPr>
-          <p:cNvPr id="1376" name="ss0-bar"/>
+          <p:cNvPr id="1430" name="ss0-bar"/>
           <p:cNvSpPr/>
           <p:nvPr/>
         </p:nvSpPr>
@@ -19433,7 +21773,7 @@
       </p:sp>
       <p:sp>
         <p:nvSpPr>
-          <p:cNvPr id="1377" name="ss0-title"/>
+          <p:cNvPr id="1431" name="ss0-title"/>
           <p:cNvSpPr txBox="1"/>
           <p:nvPr/>
         </p:nvSpPr>
@@ -19475,7 +21815,7 @@
       </p:sp>
       <p:sp>
         <p:nvSpPr>
-          <p:cNvPr id="1378" name="ss0-body"/>
+          <p:cNvPr id="1432" name="ss0-body"/>
           <p:cNvSpPr txBox="1"/>
           <p:nvPr/>
         </p:nvSpPr>
@@ -19517,7 +21857,7 @@
       </p:sp>
       <p:sp>
         <p:nvSpPr>
-          <p:cNvPr id="1379" name="ss1"/>
+          <p:cNvPr id="1433" name="ss1"/>
           <p:cNvSpPr/>
           <p:nvPr/>
         </p:nvSpPr>
@@ -19575,7 +21915,7 @@
       </p:sp>
       <p:sp>
         <p:nvSpPr>
-          <p:cNvPr id="1380" name="ss1-bar"/>
+          <p:cNvPr id="1434" name="ss1-bar"/>
           <p:cNvSpPr/>
           <p:nvPr/>
         </p:nvSpPr>
@@ -19624,7 +21964,7 @@
       </p:sp>
       <p:sp>
         <p:nvSpPr>
-          <p:cNvPr id="1381" name="ss1-title"/>
+          <p:cNvPr id="1435" name="ss1-title"/>
           <p:cNvSpPr txBox="1"/>
           <p:nvPr/>
         </p:nvSpPr>
@@ -19666,7 +22006,7 @@
       </p:sp>
       <p:sp>
         <p:nvSpPr>
-          <p:cNvPr id="1382" name="ss1-body"/>
+          <p:cNvPr id="1436" name="ss1-body"/>
           <p:cNvSpPr txBox="1"/>
           <p:nvPr/>
         </p:nvSpPr>
@@ -19708,7 +22048,7 @@
       </p:sp>
       <p:sp>
         <p:nvSpPr>
-          <p:cNvPr id="1383" name="ss2"/>
+          <p:cNvPr id="1437" name="ss2"/>
           <p:cNvSpPr/>
           <p:nvPr/>
         </p:nvSpPr>
@@ -19766,7 +22106,7 @@
       </p:sp>
       <p:sp>
         <p:nvSpPr>
-          <p:cNvPr id="1384" name="ss2-bar"/>
+          <p:cNvPr id="1438" name="ss2-bar"/>
           <p:cNvSpPr/>
           <p:nvPr/>
         </p:nvSpPr>
@@ -19815,7 +22155,7 @@
       </p:sp>
       <p:sp>
         <p:nvSpPr>
-          <p:cNvPr id="1385" name="ss2-title"/>
+          <p:cNvPr id="1439" name="ss2-title"/>
           <p:cNvSpPr txBox="1"/>
           <p:nvPr/>
         </p:nvSpPr>
@@ -19857,7 +22197,7 @@
       </p:sp>
       <p:sp>
         <p:nvSpPr>
-          <p:cNvPr id="1386" name="ss2-body"/>
+          <p:cNvPr id="1440" name="ss2-body"/>
           <p:cNvSpPr txBox="1"/>
           <p:nvPr/>
         </p:nvSpPr>
@@ -19899,7 +22239,7 @@
       </p:sp>
       <p:sp>
         <p:nvSpPr>
-          <p:cNvPr id="1387" name="ss3"/>
+          <p:cNvPr id="1441" name="ss3"/>
           <p:cNvSpPr/>
           <p:nvPr/>
         </p:nvSpPr>
@@ -19957,7 +22297,7 @@
       </p:sp>
       <p:sp>
         <p:nvSpPr>
-          <p:cNvPr id="1388" name="ss3-bar"/>
+          <p:cNvPr id="1442" name="ss3-bar"/>
           <p:cNvSpPr/>
           <p:nvPr/>
         </p:nvSpPr>
@@ -20006,7 +22346,7 @@
       </p:sp>
       <p:sp>
         <p:nvSpPr>
-          <p:cNvPr id="1389" name="ss3-title"/>
+          <p:cNvPr id="1443" name="ss3-title"/>
           <p:cNvSpPr txBox="1"/>
           <p:nvPr/>
         </p:nvSpPr>
@@ -20048,7 +22388,7 @@
       </p:sp>
       <p:sp>
         <p:nvSpPr>
-          <p:cNvPr id="1390" name="ss3-body"/>
+          <p:cNvPr id="1444" name="ss3-body"/>
           <p:cNvSpPr txBox="1"/>
           <p:nvPr/>
         </p:nvSpPr>
@@ -20090,7 +22430,7 @@
       </p:sp>
       <p:sp>
         <p:nvSpPr>
-          <p:cNvPr id="1391" name="cb"/>
+          <p:cNvPr id="1445" name="cb"/>
           <p:cNvSpPr/>
           <p:nvPr/>
         </p:nvSpPr>
@@ -20154,7 +22494,7 @@
       </p:sp>
       <p:sp>
         <p:nvSpPr>
-          <p:cNvPr id="1392" name="cb-t"/>
+          <p:cNvPr id="1446" name="cb-t"/>
           <p:cNvSpPr txBox="1"/>
           <p:nvPr/>
         </p:nvSpPr>
@@ -20218,7 +22558,7 @@
       </p:grpSpPr>
       <p:sp>
         <p:nvSpPr>
-          <p:cNvPr id="1393" name="kicker"/>
+          <p:cNvPr id="1447" name="kicker"/>
           <p:cNvSpPr txBox="1"/>
           <p:nvPr/>
         </p:nvSpPr>
@@ -20257,7 +22597,7 @@
       </p:sp>
       <p:sp>
         <p:nvSpPr>
-          <p:cNvPr id="1394" name="title"/>
+          <p:cNvPr id="1448" name="title"/>
           <p:cNvSpPr txBox="1"/>
           <p:nvPr/>
         </p:nvSpPr>
@@ -20299,7 +22639,7 @@
       </p:sp>
       <p:sp>
         <p:nvSpPr>
-          <p:cNvPr id="1395" name="subtitle"/>
+          <p:cNvPr id="1449" name="subtitle"/>
           <p:cNvSpPr txBox="1"/>
           <p:nvPr/>
         </p:nvSpPr>
@@ -20341,7 +22681,7 @@
       </p:sp>
       <p:sp>
         <p:nvSpPr>
-          <p:cNvPr id="1396" name="Slide Number Placeholder"/>
+          <p:cNvPr id="1450" name="Slide Number Placeholder"/>
           <p:cNvSpPr>
             <a:spLocks noGrp="1"/>
           </p:cNvSpPr>
@@ -20366,7 +22706,7 @@
       </p:sp>
       <p:sp>
         <p:nvSpPr>
-          <p:cNvPr id="1397" name="fl0"/>
+          <p:cNvPr id="1451" name="fl0"/>
           <p:cNvSpPr/>
           <p:nvPr/>
         </p:nvSpPr>
@@ -20417,7 +22757,7 @@
       </p:sp>
       <p:sp>
         <p:nvSpPr>
-          <p:cNvPr id="1398" name="fl0-title"/>
+          <p:cNvPr id="1452" name="fl0-title"/>
           <p:cNvSpPr txBox="1"/>
           <p:nvPr/>
         </p:nvSpPr>
@@ -20459,7 +22799,7 @@
       </p:sp>
       <p:sp>
         <p:nvSpPr>
-          <p:cNvPr id="1399" name="fl0-chev"/>
+          <p:cNvPr id="1453" name="fl0-chev"/>
           <p:cNvSpPr/>
           <p:nvPr/>
         </p:nvSpPr>
@@ -20508,7 +22848,7 @@
       </p:sp>
       <p:sp>
         <p:nvSpPr>
-          <p:cNvPr id="1400" name="fl1"/>
+          <p:cNvPr id="1454" name="fl1"/>
           <p:cNvSpPr/>
           <p:nvPr/>
         </p:nvSpPr>
@@ -20559,7 +22899,7 @@
       </p:sp>
       <p:sp>
         <p:nvSpPr>
-          <p:cNvPr id="1401" name="fl1-title"/>
+          <p:cNvPr id="1455" name="fl1-title"/>
           <p:cNvSpPr txBox="1"/>
           <p:nvPr/>
         </p:nvSpPr>
@@ -20601,7 +22941,7 @@
       </p:sp>
       <p:sp>
         <p:nvSpPr>
-          <p:cNvPr id="1402" name="fl1-chev"/>
+          <p:cNvPr id="1456" name="fl1-chev"/>
           <p:cNvSpPr/>
           <p:nvPr/>
         </p:nvSpPr>
@@ -20650,7 +22990,7 @@
       </p:sp>
       <p:sp>
         <p:nvSpPr>
-          <p:cNvPr id="1403" name="fl2"/>
+          <p:cNvPr id="1457" name="fl2"/>
           <p:cNvSpPr/>
           <p:nvPr/>
         </p:nvSpPr>
@@ -20701,7 +23041,7 @@
       </p:sp>
       <p:sp>
         <p:nvSpPr>
-          <p:cNvPr id="1404" name="fl2-title"/>
+          <p:cNvPr id="1458" name="fl2-title"/>
           <p:cNvSpPr txBox="1"/>
           <p:nvPr/>
         </p:nvSpPr>
@@ -20743,7 +23083,7 @@
       </p:sp>
       <p:sp>
         <p:nvSpPr>
-          <p:cNvPr id="1405" name="fl2-chev"/>
+          <p:cNvPr id="1459" name="fl2-chev"/>
           <p:cNvSpPr/>
           <p:nvPr/>
         </p:nvSpPr>
@@ -20792,7 +23132,7 @@
       </p:sp>
       <p:sp>
         <p:nvSpPr>
-          <p:cNvPr id="1406" name="fl3"/>
+          <p:cNvPr id="1460" name="fl3"/>
           <p:cNvSpPr/>
           <p:nvPr/>
         </p:nvSpPr>
@@ -20843,7 +23183,7 @@
       </p:sp>
       <p:sp>
         <p:nvSpPr>
-          <p:cNvPr id="1407" name="fl3-title"/>
+          <p:cNvPr id="1461" name="fl3-title"/>
           <p:cNvSpPr txBox="1"/>
           <p:nvPr/>
         </p:nvSpPr>
@@ -20885,7 +23225,7 @@
       </p:sp>
       <p:sp>
         <p:nvSpPr>
-          <p:cNvPr id="1408" name="fl3-chev"/>
+          <p:cNvPr id="1462" name="fl3-chev"/>
           <p:cNvSpPr/>
           <p:nvPr/>
         </p:nvSpPr>
@@ -20934,7 +23274,7 @@
       </p:sp>
       <p:sp>
         <p:nvSpPr>
-          <p:cNvPr id="1409" name="fl4"/>
+          <p:cNvPr id="1463" name="fl4"/>
           <p:cNvSpPr/>
           <p:nvPr/>
         </p:nvSpPr>
@@ -20985,7 +23325,7 @@
       </p:sp>
       <p:sp>
         <p:nvSpPr>
-          <p:cNvPr id="1410" name="fl4-title"/>
+          <p:cNvPr id="1464" name="fl4-title"/>
           <p:cNvSpPr txBox="1"/>
           <p:nvPr/>
         </p:nvSpPr>
@@ -21027,7 +23367,7 @@
       </p:sp>
       <p:sp>
         <p:nvSpPr>
-          <p:cNvPr id="1411" name="oc0"/>
+          <p:cNvPr id="1465" name="oc0"/>
           <p:cNvSpPr/>
           <p:nvPr/>
         </p:nvSpPr>
@@ -21085,7 +23425,7 @@
       </p:sp>
       <p:sp>
         <p:nvSpPr>
-          <p:cNvPr id="1412" name="oc0-bar"/>
+          <p:cNvPr id="1466" name="oc0-bar"/>
           <p:cNvSpPr/>
           <p:nvPr/>
         </p:nvSpPr>
@@ -21134,7 +23474,7 @@
       </p:sp>
       <p:sp>
         <p:nvSpPr>
-          <p:cNvPr id="1413" name="oc0-title"/>
+          <p:cNvPr id="1467" name="oc0-title"/>
           <p:cNvSpPr txBox="1"/>
           <p:nvPr/>
         </p:nvSpPr>
@@ -21176,7 +23516,7 @@
       </p:sp>
       <p:sp>
         <p:nvSpPr>
-          <p:cNvPr id="1414" name="oc0-body"/>
+          <p:cNvPr id="1468" name="oc0-body"/>
           <p:cNvSpPr txBox="1"/>
           <p:nvPr/>
         </p:nvSpPr>
@@ -21218,7 +23558,7 @@
       </p:sp>
       <p:sp>
         <p:nvSpPr>
-          <p:cNvPr id="1415" name="oc1"/>
+          <p:cNvPr id="1469" name="oc1"/>
           <p:cNvSpPr/>
           <p:nvPr/>
         </p:nvSpPr>
@@ -21276,7 +23616,7 @@
       </p:sp>
       <p:sp>
         <p:nvSpPr>
-          <p:cNvPr id="1416" name="oc1-bar"/>
+          <p:cNvPr id="1470" name="oc1-bar"/>
           <p:cNvSpPr/>
           <p:nvPr/>
         </p:nvSpPr>
@@ -21325,7 +23665,7 @@
       </p:sp>
       <p:sp>
         <p:nvSpPr>
-          <p:cNvPr id="1417" name="oc1-title"/>
+          <p:cNvPr id="1471" name="oc1-title"/>
           <p:cNvSpPr txBox="1"/>
           <p:nvPr/>
         </p:nvSpPr>
@@ -21367,7 +23707,7 @@
       </p:sp>
       <p:sp>
         <p:nvSpPr>
-          <p:cNvPr id="1418" name="oc1-body"/>
+          <p:cNvPr id="1472" name="oc1-body"/>
           <p:cNvSpPr txBox="1"/>
           <p:nvPr/>
         </p:nvSpPr>
@@ -21409,7 +23749,7 @@
       </p:sp>
       <p:sp>
         <p:nvSpPr>
-          <p:cNvPr id="1419" name="oc2"/>
+          <p:cNvPr id="1473" name="oc2"/>
           <p:cNvSpPr/>
           <p:nvPr/>
         </p:nvSpPr>
@@ -21467,7 +23807,7 @@
       </p:sp>
       <p:sp>
         <p:nvSpPr>
-          <p:cNvPr id="1420" name="oc2-bar"/>
+          <p:cNvPr id="1474" name="oc2-bar"/>
           <p:cNvSpPr/>
           <p:nvPr/>
         </p:nvSpPr>
@@ -21516,7 +23856,7 @@
       </p:sp>
       <p:sp>
         <p:nvSpPr>
-          <p:cNvPr id="1421" name="oc2-title"/>
+          <p:cNvPr id="1475" name="oc2-title"/>
           <p:cNvSpPr txBox="1"/>
           <p:nvPr/>
         </p:nvSpPr>
@@ -21558,7 +23898,7 @@
       </p:sp>
       <p:sp>
         <p:nvSpPr>
-          <p:cNvPr id="1422" name="oc2-body"/>
+          <p:cNvPr id="1476" name="oc2-body"/>
           <p:cNvSpPr txBox="1"/>
           <p:nvPr/>
         </p:nvSpPr>
@@ -21600,7 +23940,7 @@
       </p:sp>
       <p:sp>
         <p:nvSpPr>
-          <p:cNvPr id="1423" name="oc3"/>
+          <p:cNvPr id="1477" name="oc3"/>
           <p:cNvSpPr/>
           <p:nvPr/>
         </p:nvSpPr>
@@ -21658,7 +23998,7 @@
       </p:sp>
       <p:sp>
         <p:nvSpPr>
-          <p:cNvPr id="1424" name="oc3-bar"/>
+          <p:cNvPr id="1478" name="oc3-bar"/>
           <p:cNvSpPr/>
           <p:nvPr/>
         </p:nvSpPr>
@@ -21707,7 +24047,7 @@
       </p:sp>
       <p:sp>
         <p:nvSpPr>
-          <p:cNvPr id="1425" name="oc3-title"/>
+          <p:cNvPr id="1479" name="oc3-title"/>
           <p:cNvSpPr txBox="1"/>
           <p:nvPr/>
         </p:nvSpPr>
@@ -21749,7 +24089,7 @@
       </p:sp>
       <p:sp>
         <p:nvSpPr>
-          <p:cNvPr id="1426" name="oc3-body"/>
+          <p:cNvPr id="1480" name="oc3-body"/>
           <p:cNvSpPr txBox="1"/>
           <p:nvPr/>
         </p:nvSpPr>
@@ -21791,7 +24131,7 @@
       </p:sp>
       <p:sp>
         <p:nvSpPr>
-          <p:cNvPr id="1427" name="oc4"/>
+          <p:cNvPr id="1481" name="oc4"/>
           <p:cNvSpPr/>
           <p:nvPr/>
         </p:nvSpPr>
@@ -21849,7 +24189,7 @@
       </p:sp>
       <p:sp>
         <p:nvSpPr>
-          <p:cNvPr id="1428" name="oc4-bar"/>
+          <p:cNvPr id="1482" name="oc4-bar"/>
           <p:cNvSpPr/>
           <p:nvPr/>
         </p:nvSpPr>
@@ -21898,7 +24238,7 @@
       </p:sp>
       <p:sp>
         <p:nvSpPr>
-          <p:cNvPr id="1429" name="oc4-title"/>
+          <p:cNvPr id="1483" name="oc4-title"/>
           <p:cNvSpPr txBox="1"/>
           <p:nvPr/>
         </p:nvSpPr>
@@ -21940,7 +24280,7 @@
       </p:sp>
       <p:sp>
         <p:nvSpPr>
-          <p:cNvPr id="1430" name="oc4-body"/>
+          <p:cNvPr id="1484" name="oc4-body"/>
           <p:cNvSpPr txBox="1"/>
           <p:nvPr/>
         </p:nvSpPr>
@@ -22007,7 +24347,7 @@
       </p:grpSpPr>
       <p:sp>
         <p:nvSpPr>
-          <p:cNvPr id="1431" name="kicker"/>
+          <p:cNvPr id="1485" name="kicker"/>
           <p:cNvSpPr txBox="1"/>
           <p:nvPr/>
         </p:nvSpPr>
@@ -22046,7 +24386,7 @@
       </p:sp>
       <p:sp>
         <p:nvSpPr>
-          <p:cNvPr id="1432" name="title"/>
+          <p:cNvPr id="1486" name="title"/>
           <p:cNvSpPr txBox="1"/>
           <p:nvPr/>
         </p:nvSpPr>
@@ -22088,7 +24428,7 @@
       </p:sp>
       <p:sp>
         <p:nvSpPr>
-          <p:cNvPr id="1433" name="Slide Number Placeholder"/>
+          <p:cNvPr id="1487" name="Slide Number Placeholder"/>
           <p:cNvSpPr>
             <a:spLocks noGrp="1"/>
           </p:cNvSpPr>
@@ -22113,7 +24453,7 @@
       </p:sp>
       <p:sp>
         <p:nvSpPr>
-          <p:cNvPr id="1434" name="flow"/>
+          <p:cNvPr id="1488" name="flow"/>
           <p:cNvSpPr txBox="1"/>
           <p:nvPr/>
         </p:nvSpPr>
@@ -22152,7 +24492,7 @@
       </p:sp>
       <p:cxnSp>
         <p:nvCxnSpPr>
-          <p:cNvPr id="1435" name="lp0"/>
+          <p:cNvPr id="1489" name="lp0"/>
           <p:cNvCxnSpPr/>
           <p:nvPr/>
         </p:nvCxnSpPr>
@@ -22173,7 +24513,7 @@
       </p:cxnSp>
       <p:cxnSp>
         <p:nvCxnSpPr>
-          <p:cNvPr id="1436" name="lp1"/>
+          <p:cNvPr id="1490" name="lp1"/>
           <p:cNvCxnSpPr/>
           <p:nvPr/>
         </p:nvCxnSpPr>
@@ -22194,7 +24534,7 @@
       </p:cxnSp>
       <p:cxnSp>
         <p:nvCxnSpPr>
-          <p:cNvPr id="1437" name="lp2"/>
+          <p:cNvPr id="1491" name="lp2"/>
           <p:cNvCxnSpPr/>
           <p:nvPr/>
         </p:nvCxnSpPr>
@@ -22215,7 +24555,7 @@
       </p:cxnSp>
       <p:cxnSp>
         <p:nvCxnSpPr>
-          <p:cNvPr id="1438" name="lp3"/>
+          <p:cNvPr id="1492" name="lp3"/>
           <p:cNvCxnSpPr/>
           <p:nvPr/>
         </p:nvCxnSpPr>
@@ -22236,7 +24576,7 @@
       </p:cxnSp>
       <p:cxnSp>
         <p:nvCxnSpPr>
-          <p:cNvPr id="1439" name="lp4"/>
+          <p:cNvPr id="1493" name="lp4"/>
           <p:cNvCxnSpPr/>
           <p:nvPr/>
         </p:nvCxnSpPr>
@@ -22257,7 +24597,7 @@
       </p:cxnSp>
       <p:sp>
         <p:nvSpPr>
-          <p:cNvPr id="1440" name="lo0"/>
+          <p:cNvPr id="1494" name="lo0"/>
           <p:cNvSpPr/>
           <p:nvPr/>
         </p:nvSpPr>
@@ -22313,7 +24653,7 @@
       </p:sp>
       <p:sp>
         <p:nvSpPr>
-          <p:cNvPr id="1441" name="lo0-n"/>
+          <p:cNvPr id="1495" name="lo0-n"/>
           <p:cNvSpPr txBox="1"/>
           <p:nvPr/>
         </p:nvSpPr>
@@ -22352,7 +24692,7 @@
       </p:sp>
       <p:sp>
         <p:nvSpPr>
-          <p:cNvPr id="1442" name="lo0-t"/>
+          <p:cNvPr id="1496" name="lo0-t"/>
           <p:cNvSpPr txBox="1"/>
           <p:nvPr/>
         </p:nvSpPr>
@@ -22394,7 +24734,7 @@
       </p:sp>
       <p:sp>
         <p:nvSpPr>
-          <p:cNvPr id="1443" name="lo0-b"/>
+          <p:cNvPr id="1497" name="lo0-b"/>
           <p:cNvSpPr txBox="1"/>
           <p:nvPr/>
         </p:nvSpPr>
@@ -22436,7 +24776,7 @@
       </p:sp>
       <p:sp>
         <p:nvSpPr>
-          <p:cNvPr id="1444" name="lo1"/>
+          <p:cNvPr id="1498" name="lo1"/>
           <p:cNvSpPr/>
           <p:nvPr/>
         </p:nvSpPr>
@@ -22492,7 +24832,7 @@
       </p:sp>
       <p:sp>
         <p:nvSpPr>
-          <p:cNvPr id="1445" name="lo1-n"/>
+          <p:cNvPr id="1499" name="lo1-n"/>
           <p:cNvSpPr txBox="1"/>
           <p:nvPr/>
         </p:nvSpPr>
@@ -22531,7 +24871,7 @@
       </p:sp>
       <p:sp>
         <p:nvSpPr>
-          <p:cNvPr id="1446" name="lo1-t"/>
+          <p:cNvPr id="1500" name="lo1-t"/>
           <p:cNvSpPr txBox="1"/>
           <p:nvPr/>
         </p:nvSpPr>
@@ -22573,7 +24913,7 @@
       </p:sp>
       <p:sp>
         <p:nvSpPr>
-          <p:cNvPr id="1447" name="lo1-b"/>
+          <p:cNvPr id="1501" name="lo1-b"/>
           <p:cNvSpPr txBox="1"/>
           <p:nvPr/>
         </p:nvSpPr>
@@ -22615,7 +24955,7 @@
       </p:sp>
       <p:sp>
         <p:nvSpPr>
-          <p:cNvPr id="1448" name="lo2"/>
+          <p:cNvPr id="1502" name="lo2"/>
           <p:cNvSpPr/>
           <p:nvPr/>
         </p:nvSpPr>
@@ -22671,7 +25011,7 @@
       </p:sp>
       <p:sp>
         <p:nvSpPr>
-          <p:cNvPr id="1449" name="lo2-n"/>
+          <p:cNvPr id="1503" name="lo2-n"/>
           <p:cNvSpPr txBox="1"/>
           <p:nvPr/>
         </p:nvSpPr>
@@ -22710,7 +25050,7 @@
       </p:sp>
       <p:sp>
         <p:nvSpPr>
-          <p:cNvPr id="1450" name="lo2-t"/>
+          <p:cNvPr id="1504" name="lo2-t"/>
           <p:cNvSpPr txBox="1"/>
           <p:nvPr/>
         </p:nvSpPr>
@@ -22752,7 +25092,7 @@
       </p:sp>
       <p:sp>
         <p:nvSpPr>
-          <p:cNvPr id="1451" name="lo2-b"/>
+          <p:cNvPr id="1505" name="lo2-b"/>
           <p:cNvSpPr txBox="1"/>
           <p:nvPr/>
         </p:nvSpPr>
@@ -22794,7 +25134,7 @@
       </p:sp>
       <p:sp>
         <p:nvSpPr>
-          <p:cNvPr id="1452" name="lo3"/>
+          <p:cNvPr id="1506" name="lo3"/>
           <p:cNvSpPr/>
           <p:nvPr/>
         </p:nvSpPr>
@@ -22850,7 +25190,7 @@
       </p:sp>
       <p:sp>
         <p:nvSpPr>
-          <p:cNvPr id="1453" name="lo3-n"/>
+          <p:cNvPr id="1507" name="lo3-n"/>
           <p:cNvSpPr txBox="1"/>
           <p:nvPr/>
         </p:nvSpPr>
@@ -22889,7 +25229,7 @@
       </p:sp>
       <p:sp>
         <p:nvSpPr>
-          <p:cNvPr id="1454" name="lo3-t"/>
+          <p:cNvPr id="1508" name="lo3-t"/>
           <p:cNvSpPr txBox="1"/>
           <p:nvPr/>
         </p:nvSpPr>
@@ -22931,7 +25271,7 @@
       </p:sp>
       <p:sp>
         <p:nvSpPr>
-          <p:cNvPr id="1455" name="lo3-b"/>
+          <p:cNvPr id="1509" name="lo3-b"/>
           <p:cNvSpPr txBox="1"/>
           <p:nvPr/>
         </p:nvSpPr>
@@ -22973,7 +25313,7 @@
       </p:sp>
       <p:sp>
         <p:nvSpPr>
-          <p:cNvPr id="1456" name="lo4"/>
+          <p:cNvPr id="1510" name="lo4"/>
           <p:cNvSpPr/>
           <p:nvPr/>
         </p:nvSpPr>
@@ -23029,7 +25369,7 @@
       </p:sp>
       <p:sp>
         <p:nvSpPr>
-          <p:cNvPr id="1457" name="lo4-n"/>
+          <p:cNvPr id="1511" name="lo4-n"/>
           <p:cNvSpPr txBox="1"/>
           <p:nvPr/>
         </p:nvSpPr>
@@ -23068,7 +25408,7 @@
       </p:sp>
       <p:sp>
         <p:nvSpPr>
-          <p:cNvPr id="1458" name="lo4-t"/>
+          <p:cNvPr id="1512" name="lo4-t"/>
           <p:cNvSpPr txBox="1"/>
           <p:nvPr/>
         </p:nvSpPr>
@@ -23110,7 +25450,7 @@
       </p:sp>
       <p:sp>
         <p:nvSpPr>
-          <p:cNvPr id="1459" name="lo4-b"/>
+          <p:cNvPr id="1513" name="lo4-b"/>
           <p:cNvSpPr txBox="1"/>
           <p:nvPr/>
         </p:nvSpPr>
@@ -23177,7 +25517,7 @@
       </p:grpSpPr>
       <p:sp>
         <p:nvSpPr>
-          <p:cNvPr id="1460" name="kicker"/>
+          <p:cNvPr id="1514" name="kicker"/>
           <p:cNvSpPr txBox="1"/>
           <p:nvPr/>
         </p:nvSpPr>
@@ -23216,7 +25556,7 @@
       </p:sp>
       <p:sp>
         <p:nvSpPr>
-          <p:cNvPr id="1461" name="title"/>
+          <p:cNvPr id="1515" name="title"/>
           <p:cNvSpPr txBox="1"/>
           <p:nvPr/>
         </p:nvSpPr>
@@ -23258,7 +25598,7 @@
       </p:sp>
       <p:sp>
         <p:nvSpPr>
-          <p:cNvPr id="1462" name="subtitle"/>
+          <p:cNvPr id="1516" name="subtitle"/>
           <p:cNvSpPr txBox="1"/>
           <p:nvPr/>
         </p:nvSpPr>
@@ -23300,7 +25640,7 @@
       </p:sp>
       <p:sp>
         <p:nvSpPr>
-          <p:cNvPr id="1463" name="Slide Number Placeholder"/>
+          <p:cNvPr id="1517" name="Slide Number Placeholder"/>
           <p:cNvSpPr>
             <a:spLocks noGrp="1"/>
           </p:cNvSpPr>
@@ -23325,7 +25665,7 @@
       </p:sp>
       <p:sp>
         <p:nvSpPr>
-          <p:cNvPr id="1464" name="k0"/>
+          <p:cNvPr id="1518" name="k0"/>
           <p:cNvSpPr/>
           <p:nvPr/>
         </p:nvSpPr>
@@ -23383,7 +25723,7 @@
       </p:sp>
       <p:sp>
         <p:nvSpPr>
-          <p:cNvPr id="1465" name="k0-bar"/>
+          <p:cNvPr id="1519" name="k0-bar"/>
           <p:cNvSpPr/>
           <p:nvPr/>
         </p:nvSpPr>
@@ -23432,7 +25772,7 @@
       </p:sp>
       <p:sp>
         <p:nvSpPr>
-          <p:cNvPr id="1466" name="k0-num"/>
+          <p:cNvPr id="1520" name="k0-num"/>
           <p:cNvSpPr txBox="1"/>
           <p:nvPr/>
         </p:nvSpPr>
@@ -23471,7 +25811,7 @@
       </p:sp>
       <p:sp>
         <p:nvSpPr>
-          <p:cNvPr id="1467" name="k0-t"/>
+          <p:cNvPr id="1521" name="k0-t"/>
           <p:cNvSpPr txBox="1"/>
           <p:nvPr/>
         </p:nvSpPr>
@@ -23510,7 +25850,7 @@
       </p:sp>
       <p:sp>
         <p:nvSpPr>
-          <p:cNvPr id="1468" name="k0-b"/>
+          <p:cNvPr id="1522" name="k0-b"/>
           <p:cNvSpPr txBox="1"/>
           <p:nvPr/>
         </p:nvSpPr>
@@ -23552,7 +25892,7 @@
       </p:sp>
       <p:sp>
         <p:nvSpPr>
-          <p:cNvPr id="1469" name="k1"/>
+          <p:cNvPr id="1523" name="k1"/>
           <p:cNvSpPr/>
           <p:nvPr/>
         </p:nvSpPr>
@@ -23610,7 +25950,7 @@
       </p:sp>
       <p:sp>
         <p:nvSpPr>
-          <p:cNvPr id="1470" name="k1-bar"/>
+          <p:cNvPr id="1524" name="k1-bar"/>
           <p:cNvSpPr/>
           <p:nvPr/>
         </p:nvSpPr>
@@ -23659,7 +25999,7 @@
       </p:sp>
       <p:sp>
         <p:nvSpPr>
-          <p:cNvPr id="1471" name="k1-num"/>
+          <p:cNvPr id="1525" name="k1-num"/>
           <p:cNvSpPr txBox="1"/>
           <p:nvPr/>
         </p:nvSpPr>
@@ -23698,7 +26038,7 @@
       </p:sp>
       <p:sp>
         <p:nvSpPr>
-          <p:cNvPr id="1472" name="k1-t"/>
+          <p:cNvPr id="1526" name="k1-t"/>
           <p:cNvSpPr txBox="1"/>
           <p:nvPr/>
         </p:nvSpPr>
@@ -23737,7 +26077,7 @@
       </p:sp>
       <p:sp>
         <p:nvSpPr>
-          <p:cNvPr id="1473" name="k1-b"/>
+          <p:cNvPr id="1527" name="k1-b"/>
           <p:cNvSpPr txBox="1"/>
           <p:nvPr/>
         </p:nvSpPr>
@@ -23779,7 +26119,7 @@
       </p:sp>
       <p:sp>
         <p:nvSpPr>
-          <p:cNvPr id="1474" name="k2"/>
+          <p:cNvPr id="1528" name="k2"/>
           <p:cNvSpPr/>
           <p:nvPr/>
         </p:nvSpPr>
@@ -23837,7 +26177,7 @@
       </p:sp>
       <p:sp>
         <p:nvSpPr>
-          <p:cNvPr id="1475" name="k2-bar"/>
+          <p:cNvPr id="1529" name="k2-bar"/>
           <p:cNvSpPr/>
           <p:nvPr/>
         </p:nvSpPr>
@@ -23886,7 +26226,7 @@
       </p:sp>
       <p:sp>
         <p:nvSpPr>
-          <p:cNvPr id="1476" name="k2-num"/>
+          <p:cNvPr id="1530" name="k2-num"/>
           <p:cNvSpPr txBox="1"/>
           <p:nvPr/>
         </p:nvSpPr>
@@ -23925,7 +26265,7 @@
       </p:sp>
       <p:sp>
         <p:nvSpPr>
-          <p:cNvPr id="1477" name="k2-t"/>
+          <p:cNvPr id="1531" name="k2-t"/>
           <p:cNvSpPr txBox="1"/>
           <p:nvPr/>
         </p:nvSpPr>
@@ -23964,7 +26304,7 @@
       </p:sp>
       <p:sp>
         <p:nvSpPr>
-          <p:cNvPr id="1478" name="k2-b"/>
+          <p:cNvPr id="1532" name="k2-b"/>
           <p:cNvSpPr txBox="1"/>
           <p:nvPr/>
         </p:nvSpPr>
@@ -24006,7 +26346,7 @@
       </p:sp>
       <p:sp>
         <p:nvSpPr>
-          <p:cNvPr id="1479" name="k3"/>
+          <p:cNvPr id="1533" name="k3"/>
           <p:cNvSpPr/>
           <p:nvPr/>
         </p:nvSpPr>
@@ -24064,7 +26404,7 @@
       </p:sp>
       <p:sp>
         <p:nvSpPr>
-          <p:cNvPr id="1480" name="k3-bar"/>
+          <p:cNvPr id="1534" name="k3-bar"/>
           <p:cNvSpPr/>
           <p:nvPr/>
         </p:nvSpPr>
@@ -24113,7 +26453,7 @@
       </p:sp>
       <p:sp>
         <p:nvSpPr>
-          <p:cNvPr id="1481" name="k3-num"/>
+          <p:cNvPr id="1535" name="k3-num"/>
           <p:cNvSpPr txBox="1"/>
           <p:nvPr/>
         </p:nvSpPr>
@@ -24152,7 +26492,7 @@
       </p:sp>
       <p:sp>
         <p:nvSpPr>
-          <p:cNvPr id="1482" name="k3-t"/>
+          <p:cNvPr id="1536" name="k3-t"/>
           <p:cNvSpPr txBox="1"/>
           <p:nvPr/>
         </p:nvSpPr>
@@ -24191,7 +26531,7 @@
       </p:sp>
       <p:sp>
         <p:nvSpPr>
-          <p:cNvPr id="1483" name="k3-b"/>
+          <p:cNvPr id="1537" name="k3-b"/>
           <p:cNvSpPr txBox="1"/>
           <p:nvPr/>
         </p:nvSpPr>
@@ -24233,7 +26573,7 @@
       </p:sp>
       <p:sp>
         <p:nvSpPr>
-          <p:cNvPr id="1484" name="k4"/>
+          <p:cNvPr id="1538" name="k4"/>
           <p:cNvSpPr/>
           <p:nvPr/>
         </p:nvSpPr>
@@ -24291,7 +26631,7 @@
       </p:sp>
       <p:sp>
         <p:nvSpPr>
-          <p:cNvPr id="1485" name="k4-bar"/>
+          <p:cNvPr id="1539" name="k4-bar"/>
           <p:cNvSpPr/>
           <p:nvPr/>
         </p:nvSpPr>
@@ -24340,7 +26680,7 @@
       </p:sp>
       <p:sp>
         <p:nvSpPr>
-          <p:cNvPr id="1486" name="k4-num"/>
+          <p:cNvPr id="1540" name="k4-num"/>
           <p:cNvSpPr txBox="1"/>
           <p:nvPr/>
         </p:nvSpPr>
@@ -24379,7 +26719,7 @@
       </p:sp>
       <p:sp>
         <p:nvSpPr>
-          <p:cNvPr id="1487" name="k4-t"/>
+          <p:cNvPr id="1541" name="k4-t"/>
           <p:cNvSpPr txBox="1"/>
           <p:nvPr/>
         </p:nvSpPr>
@@ -24418,7 +26758,7 @@
       </p:sp>
       <p:sp>
         <p:nvSpPr>
-          <p:cNvPr id="1488" name="k4-b"/>
+          <p:cNvPr id="1542" name="k4-b"/>
           <p:cNvSpPr txBox="1"/>
           <p:nvPr/>
         </p:nvSpPr>
@@ -24460,7 +26800,7 @@
       </p:sp>
       <p:sp>
         <p:nvSpPr>
-          <p:cNvPr id="1489" name="note"/>
+          <p:cNvPr id="1543" name="note"/>
           <p:cNvSpPr txBox="1"/>
           <p:nvPr/>
         </p:nvSpPr>
@@ -24524,7 +26864,7 @@
       </p:grpSpPr>
       <p:sp>
         <p:nvSpPr>
-          <p:cNvPr id="1490" name="big-num"/>
+          <p:cNvPr id="1544" name="big-num"/>
           <p:cNvSpPr txBox="1"/>
           <p:nvPr/>
         </p:nvSpPr>
@@ -24563,7 +26903,7 @@
       </p:sp>
       <p:sp>
         <p:nvSpPr>
-          <p:cNvPr id="1491" name="kicker"/>
+          <p:cNvPr id="1545" name="kicker"/>
           <p:cNvSpPr txBox="1"/>
           <p:nvPr/>
         </p:nvSpPr>
@@ -24602,7 +26942,7 @@
       </p:sp>
       <p:sp>
         <p:nvSpPr>
-          <p:cNvPr id="1492" name="title"/>
+          <p:cNvPr id="1546" name="title"/>
           <p:cNvSpPr txBox="1"/>
           <p:nvPr/>
         </p:nvSpPr>
@@ -24644,7 +26984,7 @@
       </p:sp>
       <p:sp>
         <p:nvSpPr>
-          <p:cNvPr id="1493" name="desc"/>
+          <p:cNvPr id="1547" name="desc"/>
           <p:cNvSpPr txBox="1"/>
           <p:nvPr/>
         </p:nvSpPr>
@@ -24686,7 +27026,7 @@
       </p:sp>
       <p:sp>
         <p:nvSpPr>
-          <p:cNvPr id="1494" name="prog1"/>
+          <p:cNvPr id="1548" name="prog1"/>
           <p:cNvSpPr/>
           <p:nvPr/>
         </p:nvSpPr>
@@ -24737,7 +27077,7 @@
       </p:sp>
       <p:sp>
         <p:nvSpPr>
-          <p:cNvPr id="1495" name="prog2"/>
+          <p:cNvPr id="1549" name="prog2"/>
           <p:cNvSpPr/>
           <p:nvPr/>
         </p:nvSpPr>
@@ -24788,7 +27128,7 @@
       </p:sp>
       <p:sp>
         <p:nvSpPr>
-          <p:cNvPr id="1496" name="prog3"/>
+          <p:cNvPr id="1550" name="prog3"/>
           <p:cNvSpPr/>
           <p:nvPr/>
         </p:nvSpPr>
@@ -24862,7 +27202,7 @@
       </p:grpSpPr>
       <p:sp>
         <p:nvSpPr>
-          <p:cNvPr id="1497" name="kicker"/>
+          <p:cNvPr id="1551" name="kicker"/>
           <p:cNvSpPr txBox="1"/>
           <p:nvPr/>
         </p:nvSpPr>
@@ -24901,7 +27241,7 @@
       </p:sp>
       <p:sp>
         <p:nvSpPr>
-          <p:cNvPr id="1498" name="title"/>
+          <p:cNvPr id="1552" name="title"/>
           <p:cNvSpPr txBox="1"/>
           <p:nvPr/>
         </p:nvSpPr>
@@ -24943,7 +27283,7 @@
       </p:sp>
       <p:sp>
         <p:nvSpPr>
-          <p:cNvPr id="1499" name="Slide Number Placeholder"/>
+          <p:cNvPr id="1553" name="Slide Number Placeholder"/>
           <p:cNvSpPr>
             <a:spLocks noGrp="1"/>
           </p:cNvSpPr>
@@ -24968,7 +27308,7 @@
       </p:sp>
       <p:sp>
         <p:nvSpPr>
-          <p:cNvPr id="1500" name="r0"/>
+          <p:cNvPr id="1554" name="r0"/>
           <p:cNvSpPr/>
           <p:nvPr/>
         </p:nvSpPr>
@@ -25026,7 +27366,7 @@
       </p:sp>
       <p:sp>
         <p:nvSpPr>
-          <p:cNvPr id="1501" name="r0-num"/>
+          <p:cNvPr id="1555" name="r0-num"/>
           <p:cNvSpPr txBox="1"/>
           <p:nvPr/>
         </p:nvSpPr>
@@ -25065,7 +27405,7 @@
       </p:sp>
       <p:sp>
         <p:nvSpPr>
-          <p:cNvPr id="1502" name="r0-t"/>
+          <p:cNvPr id="1556" name="r0-t"/>
           <p:cNvSpPr txBox="1"/>
           <p:nvPr/>
         </p:nvSpPr>
@@ -25104,7 +27444,7 @@
       </p:sp>
       <p:sp>
         <p:nvSpPr>
-          <p:cNvPr id="1503" name="r0-b"/>
+          <p:cNvPr id="1557" name="r0-b"/>
           <p:cNvSpPr txBox="1"/>
           <p:nvPr/>
         </p:nvSpPr>
@@ -25146,7 +27486,7 @@
       </p:sp>
       <p:sp>
         <p:nvSpPr>
-          <p:cNvPr id="1504" name="r1"/>
+          <p:cNvPr id="1558" name="r1"/>
           <p:cNvSpPr/>
           <p:nvPr/>
         </p:nvSpPr>
@@ -25204,7 +27544,7 @@
       </p:sp>
       <p:sp>
         <p:nvSpPr>
-          <p:cNvPr id="1505" name="r1-num"/>
+          <p:cNvPr id="1559" name="r1-num"/>
           <p:cNvSpPr txBox="1"/>
           <p:nvPr/>
         </p:nvSpPr>
@@ -25243,7 +27583,7 @@
       </p:sp>
       <p:sp>
         <p:nvSpPr>
-          <p:cNvPr id="1506" name="r1-t"/>
+          <p:cNvPr id="1560" name="r1-t"/>
           <p:cNvSpPr txBox="1"/>
           <p:nvPr/>
         </p:nvSpPr>
@@ -25282,7 +27622,7 @@
       </p:sp>
       <p:sp>
         <p:nvSpPr>
-          <p:cNvPr id="1507" name="r1-b"/>
+          <p:cNvPr id="1561" name="r1-b"/>
           <p:cNvSpPr txBox="1"/>
           <p:nvPr/>
         </p:nvSpPr>
@@ -25324,7 +27664,7 @@
       </p:sp>
       <p:sp>
         <p:nvSpPr>
-          <p:cNvPr id="1508" name="r2"/>
+          <p:cNvPr id="1562" name="r2"/>
           <p:cNvSpPr/>
           <p:nvPr/>
         </p:nvSpPr>
@@ -25382,7 +27722,7 @@
       </p:sp>
       <p:sp>
         <p:nvSpPr>
-          <p:cNvPr id="1509" name="r2-num"/>
+          <p:cNvPr id="1563" name="r2-num"/>
           <p:cNvSpPr txBox="1"/>
           <p:nvPr/>
         </p:nvSpPr>
@@ -25421,7 +27761,7 @@
       </p:sp>
       <p:sp>
         <p:nvSpPr>
-          <p:cNvPr id="1510" name="r2-t"/>
+          <p:cNvPr id="1564" name="r2-t"/>
           <p:cNvSpPr txBox="1"/>
           <p:nvPr/>
         </p:nvSpPr>
@@ -25460,7 +27800,7 @@
       </p:sp>
       <p:sp>
         <p:nvSpPr>
-          <p:cNvPr id="1511" name="r2-b"/>
+          <p:cNvPr id="1565" name="r2-b"/>
           <p:cNvSpPr txBox="1"/>
           <p:nvPr/>
         </p:nvSpPr>
@@ -25502,7 +27842,7 @@
       </p:sp>
       <p:sp>
         <p:nvSpPr>
-          <p:cNvPr id="1512" name="r3"/>
+          <p:cNvPr id="1566" name="r3"/>
           <p:cNvSpPr/>
           <p:nvPr/>
         </p:nvSpPr>
@@ -25560,7 +27900,7 @@
       </p:sp>
       <p:sp>
         <p:nvSpPr>
-          <p:cNvPr id="1513" name="r3-num"/>
+          <p:cNvPr id="1567" name="r3-num"/>
           <p:cNvSpPr txBox="1"/>
           <p:nvPr/>
         </p:nvSpPr>
@@ -25599,7 +27939,7 @@
       </p:sp>
       <p:sp>
         <p:nvSpPr>
-          <p:cNvPr id="1514" name="r3-t"/>
+          <p:cNvPr id="1568" name="r3-t"/>
           <p:cNvSpPr txBox="1"/>
           <p:nvPr/>
         </p:nvSpPr>
@@ -25638,7 +27978,7 @@
       </p:sp>
       <p:sp>
         <p:nvSpPr>
-          <p:cNvPr id="1515" name="r3-b"/>
+          <p:cNvPr id="1569" name="r3-b"/>
           <p:cNvSpPr txBox="1"/>
           <p:nvPr/>
         </p:nvSpPr>
@@ -25680,7 +28020,7 @@
       </p:sp>
       <p:sp>
         <p:nvSpPr>
-          <p:cNvPr id="1516" name="cta"/>
+          <p:cNvPr id="1570" name="cta"/>
           <p:cNvSpPr/>
           <p:nvPr/>
         </p:nvSpPr>
@@ -25744,7 +28084,7 @@
       </p:sp>
       <p:sp>
         <p:nvSpPr>
-          <p:cNvPr id="1517" name="cta-t"/>
+          <p:cNvPr id="1571" name="cta-t"/>
           <p:cNvSpPr txBox="1"/>
           <p:nvPr/>
         </p:nvSpPr>
@@ -25808,7 +28148,7 @@
       </p:grpSpPr>
       <p:sp>
         <p:nvSpPr>
-          <p:cNvPr id="1518" name="title"/>
+          <p:cNvPr id="1572" name="title"/>
           <p:cNvSpPr txBox="1"/>
           <p:nvPr/>
         </p:nvSpPr>
@@ -25850,7 +28190,7 @@
       </p:sp>
       <p:sp>
         <p:nvSpPr>
-          <p:cNvPr id="1519" name="desc"/>
+          <p:cNvPr id="1573" name="desc"/>
           <p:cNvSpPr txBox="1"/>
           <p:nvPr/>
         </p:nvSpPr>
@@ -25917,7 +28257,7 @@
       </p:grpSpPr>
       <p:sp>
         <p:nvSpPr>
-          <p:cNvPr id="1520" name="kicker"/>
+          <p:cNvPr id="1574" name="kicker"/>
           <p:cNvSpPr txBox="1"/>
           <p:nvPr/>
         </p:nvSpPr>
@@ -25956,7 +28296,7 @@
       </p:sp>
       <p:sp>
         <p:nvSpPr>
-          <p:cNvPr id="1521" name="title"/>
+          <p:cNvPr id="1575" name="title"/>
           <p:cNvSpPr txBox="1"/>
           <p:nvPr/>
         </p:nvSpPr>
@@ -25998,7 +28338,7 @@
       </p:sp>
       <p:sp>
         <p:nvSpPr>
-          <p:cNvPr id="1522" name="Slide Number Placeholder"/>
+          <p:cNvPr id="1576" name="Slide Number Placeholder"/>
           <p:cNvSpPr>
             <a:spLocks noGrp="1"/>
           </p:cNvSpPr>
@@ -26023,7 +28363,7 @@
       </p:sp>
       <p:cxnSp>
         <p:nvCxnSpPr>
-          <p:cNvPr id="1523" name="r-rail"/>
+          <p:cNvPr id="1577" name="r-rail"/>
           <p:cNvCxnSpPr/>
           <p:nvPr/>
         </p:nvCxnSpPr>
@@ -26044,7 +28384,7 @@
       </p:cxnSp>
       <p:sp>
         <p:nvSpPr>
-          <p:cNvPr id="1524" name="r0-dot"/>
+          <p:cNvPr id="1578" name="r0-dot"/>
           <p:cNvSpPr/>
           <p:nvPr/>
         </p:nvSpPr>
@@ -26091,7 +28431,7 @@
       </p:sp>
       <p:sp>
         <p:nvSpPr>
-          <p:cNvPr id="1525" name="r0-time"/>
+          <p:cNvPr id="1579" name="r0-time"/>
           <p:cNvSpPr txBox="1"/>
           <p:nvPr/>
         </p:nvSpPr>
@@ -26130,7 +28470,7 @@
       </p:sp>
       <p:sp>
         <p:nvSpPr>
-          <p:cNvPr id="1526" name="r0-title"/>
+          <p:cNvPr id="1580" name="r0-title"/>
           <p:cNvSpPr txBox="1"/>
           <p:nvPr/>
         </p:nvSpPr>
@@ -26172,7 +28512,7 @@
       </p:sp>
       <p:sp>
         <p:nvSpPr>
-          <p:cNvPr id="1527" name="r1-dot"/>
+          <p:cNvPr id="1581" name="r1-dot"/>
           <p:cNvSpPr/>
           <p:nvPr/>
         </p:nvSpPr>
@@ -26219,7 +28559,7 @@
       </p:sp>
       <p:sp>
         <p:nvSpPr>
-          <p:cNvPr id="1528" name="r1-time"/>
+          <p:cNvPr id="1582" name="r1-time"/>
           <p:cNvSpPr txBox="1"/>
           <p:nvPr/>
         </p:nvSpPr>
@@ -26258,7 +28598,7 @@
       </p:sp>
       <p:sp>
         <p:nvSpPr>
-          <p:cNvPr id="1529" name="r1-title"/>
+          <p:cNvPr id="1583" name="r1-title"/>
           <p:cNvSpPr txBox="1"/>
           <p:nvPr/>
         </p:nvSpPr>
@@ -26300,7 +28640,7 @@
       </p:sp>
       <p:sp>
         <p:nvSpPr>
-          <p:cNvPr id="1530" name="r2-dot"/>
+          <p:cNvPr id="1584" name="r2-dot"/>
           <p:cNvSpPr/>
           <p:nvPr/>
         </p:nvSpPr>
@@ -26347,7 +28687,7 @@
       </p:sp>
       <p:sp>
         <p:nvSpPr>
-          <p:cNvPr id="1531" name="r2-time"/>
+          <p:cNvPr id="1585" name="r2-time"/>
           <p:cNvSpPr txBox="1"/>
           <p:nvPr/>
         </p:nvSpPr>
@@ -26386,7 +28726,7 @@
       </p:sp>
       <p:sp>
         <p:nvSpPr>
-          <p:cNvPr id="1532" name="r2-title"/>
+          <p:cNvPr id="1586" name="r2-title"/>
           <p:cNvSpPr txBox="1"/>
           <p:nvPr/>
         </p:nvSpPr>
@@ -26428,7 +28768,7 @@
       </p:sp>
       <p:sp>
         <p:nvSpPr>
-          <p:cNvPr id="1533" name="r3-dot"/>
+          <p:cNvPr id="1587" name="r3-dot"/>
           <p:cNvSpPr/>
           <p:nvPr/>
         </p:nvSpPr>
@@ -26475,7 +28815,7 @@
       </p:sp>
       <p:sp>
         <p:nvSpPr>
-          <p:cNvPr id="1534" name="r3-time"/>
+          <p:cNvPr id="1588" name="r3-time"/>
           <p:cNvSpPr txBox="1"/>
           <p:nvPr/>
         </p:nvSpPr>
@@ -26514,7 +28854,7 @@
       </p:sp>
       <p:sp>
         <p:nvSpPr>
-          <p:cNvPr id="1535" name="r3-title"/>
+          <p:cNvPr id="1589" name="r3-title"/>
           <p:cNvSpPr txBox="1"/>
           <p:nvPr/>
         </p:nvSpPr>
@@ -26556,7 +28896,7 @@
       </p:sp>
       <p:sp>
         <p:nvSpPr>
-          <p:cNvPr id="1536" name="r4-dot"/>
+          <p:cNvPr id="1590" name="r4-dot"/>
           <p:cNvSpPr/>
           <p:nvPr/>
         </p:nvSpPr>
@@ -26603,7 +28943,7 @@
       </p:sp>
       <p:sp>
         <p:nvSpPr>
-          <p:cNvPr id="1537" name="r4-time"/>
+          <p:cNvPr id="1591" name="r4-time"/>
           <p:cNvSpPr txBox="1"/>
           <p:nvPr/>
         </p:nvSpPr>
@@ -26642,7 +28982,7 @@
       </p:sp>
       <p:sp>
         <p:nvSpPr>
-          <p:cNvPr id="1538" name="r4-title"/>
+          <p:cNvPr id="1592" name="r4-title"/>
           <p:cNvSpPr txBox="1"/>
           <p:nvPr/>
         </p:nvSpPr>
@@ -26684,7 +29024,7 @@
       </p:sp>
       <p:sp>
         <p:nvSpPr>
-          <p:cNvPr id="1539" name="r5-dot"/>
+          <p:cNvPr id="1593" name="r5-dot"/>
           <p:cNvSpPr/>
           <p:nvPr/>
         </p:nvSpPr>
@@ -26731,7 +29071,7 @@
       </p:sp>
       <p:sp>
         <p:nvSpPr>
-          <p:cNvPr id="1540" name="r5-time"/>
+          <p:cNvPr id="1594" name="r5-time"/>
           <p:cNvSpPr txBox="1"/>
           <p:nvPr/>
         </p:nvSpPr>
@@ -26770,7 +29110,7 @@
       </p:sp>
       <p:sp>
         <p:nvSpPr>
-          <p:cNvPr id="1541" name="r5-title"/>
+          <p:cNvPr id="1595" name="r5-title"/>
           <p:cNvSpPr txBox="1"/>
           <p:nvPr/>
         </p:nvSpPr>
@@ -26812,7 +29152,7 @@
       </p:sp>
       <p:sp>
         <p:nvSpPr>
-          <p:cNvPr id="1542" name="r6-dot"/>
+          <p:cNvPr id="1596" name="r6-dot"/>
           <p:cNvSpPr/>
           <p:nvPr/>
         </p:nvSpPr>
@@ -26859,7 +29199,7 @@
       </p:sp>
       <p:sp>
         <p:nvSpPr>
-          <p:cNvPr id="1543" name="r6-time"/>
+          <p:cNvPr id="1597" name="r6-time"/>
           <p:cNvSpPr txBox="1"/>
           <p:nvPr/>
         </p:nvSpPr>
@@ -26898,7 +29238,7 @@
       </p:sp>
       <p:sp>
         <p:nvSpPr>
-          <p:cNvPr id="1544" name="r6-title"/>
+          <p:cNvPr id="1598" name="r6-title"/>
           <p:cNvSpPr txBox="1"/>
           <p:nvPr/>
         </p:nvSpPr>
@@ -26940,7 +29280,7 @@
       </p:sp>
       <p:cxnSp>
         <p:nvCxnSpPr>
-          <p:cNvPr id="1545" name="l-rail"/>
+          <p:cNvPr id="1599" name="l-rail"/>
           <p:cNvCxnSpPr/>
           <p:nvPr/>
         </p:nvCxnSpPr>
@@ -26961,7 +29301,7 @@
       </p:cxnSp>
       <p:sp>
         <p:nvSpPr>
-          <p:cNvPr id="1546" name="l0-dot"/>
+          <p:cNvPr id="1600" name="l0-dot"/>
           <p:cNvSpPr/>
           <p:nvPr/>
         </p:nvSpPr>
@@ -27008,7 +29348,7 @@
       </p:sp>
       <p:sp>
         <p:nvSpPr>
-          <p:cNvPr id="1547" name="l0-time"/>
+          <p:cNvPr id="1601" name="l0-time"/>
           <p:cNvSpPr txBox="1"/>
           <p:nvPr/>
         </p:nvSpPr>
@@ -27047,7 +29387,7 @@
       </p:sp>
       <p:sp>
         <p:nvSpPr>
-          <p:cNvPr id="1548" name="l0-title"/>
+          <p:cNvPr id="1602" name="l0-title"/>
           <p:cNvSpPr txBox="1"/>
           <p:nvPr/>
         </p:nvSpPr>
@@ -27089,7 +29429,7 @@
       </p:sp>
       <p:sp>
         <p:nvSpPr>
-          <p:cNvPr id="1549" name="l1-dot"/>
+          <p:cNvPr id="1603" name="l1-dot"/>
           <p:cNvSpPr/>
           <p:nvPr/>
         </p:nvSpPr>
@@ -27136,7 +29476,7 @@
       </p:sp>
       <p:sp>
         <p:nvSpPr>
-          <p:cNvPr id="1550" name="l1-time"/>
+          <p:cNvPr id="1604" name="l1-time"/>
           <p:cNvSpPr txBox="1"/>
           <p:nvPr/>
         </p:nvSpPr>
@@ -27175,7 +29515,7 @@
       </p:sp>
       <p:sp>
         <p:nvSpPr>
-          <p:cNvPr id="1551" name="l1-title"/>
+          <p:cNvPr id="1605" name="l1-title"/>
           <p:cNvSpPr txBox="1"/>
           <p:nvPr/>
         </p:nvSpPr>
@@ -27217,7 +29557,7 @@
       </p:sp>
       <p:sp>
         <p:nvSpPr>
-          <p:cNvPr id="1552" name="l2-dot"/>
+          <p:cNvPr id="1606" name="l2-dot"/>
           <p:cNvSpPr/>
           <p:nvPr/>
         </p:nvSpPr>
@@ -27264,7 +29604,7 @@
       </p:sp>
       <p:sp>
         <p:nvSpPr>
-          <p:cNvPr id="1553" name="l2-time"/>
+          <p:cNvPr id="1607" name="l2-time"/>
           <p:cNvSpPr txBox="1"/>
           <p:nvPr/>
         </p:nvSpPr>
@@ -27303,7 +29643,7 @@
       </p:sp>
       <p:sp>
         <p:nvSpPr>
-          <p:cNvPr id="1554" name="l2-title"/>
+          <p:cNvPr id="1608" name="l2-title"/>
           <p:cNvSpPr txBox="1"/>
           <p:nvPr/>
         </p:nvSpPr>
@@ -27345,7 +29685,7 @@
       </p:sp>
       <p:sp>
         <p:nvSpPr>
-          <p:cNvPr id="1555" name="l3-dot"/>
+          <p:cNvPr id="1609" name="l3-dot"/>
           <p:cNvSpPr/>
           <p:nvPr/>
         </p:nvSpPr>
@@ -27392,7 +29732,7 @@
       </p:sp>
       <p:sp>
         <p:nvSpPr>
-          <p:cNvPr id="1556" name="l3-time"/>
+          <p:cNvPr id="1610" name="l3-time"/>
           <p:cNvSpPr txBox="1"/>
           <p:nvPr/>
         </p:nvSpPr>
@@ -27431,7 +29771,7 @@
       </p:sp>
       <p:sp>
         <p:nvSpPr>
-          <p:cNvPr id="1557" name="l3-title"/>
+          <p:cNvPr id="1611" name="l3-title"/>
           <p:cNvSpPr txBox="1"/>
           <p:nvPr/>
         </p:nvSpPr>
@@ -27473,7 +29813,7 @@
       </p:sp>
       <p:sp>
         <p:nvSpPr>
-          <p:cNvPr id="1558" name="l4-dot"/>
+          <p:cNvPr id="1612" name="l4-dot"/>
           <p:cNvSpPr/>
           <p:nvPr/>
         </p:nvSpPr>
@@ -27520,7 +29860,7 @@
       </p:sp>
       <p:sp>
         <p:nvSpPr>
-          <p:cNvPr id="1559" name="l4-time"/>
+          <p:cNvPr id="1613" name="l4-time"/>
           <p:cNvSpPr txBox="1"/>
           <p:nvPr/>
         </p:nvSpPr>
@@ -27559,7 +29899,7 @@
       </p:sp>
       <p:sp>
         <p:nvSpPr>
-          <p:cNvPr id="1560" name="l4-title"/>
+          <p:cNvPr id="1614" name="l4-title"/>
           <p:cNvSpPr txBox="1"/>
           <p:nvPr/>
         </p:nvSpPr>
@@ -27601,7 +29941,7 @@
       </p:sp>
       <p:sp>
         <p:nvSpPr>
-          <p:cNvPr id="1561" name="l5-dot"/>
+          <p:cNvPr id="1615" name="l5-dot"/>
           <p:cNvSpPr/>
           <p:nvPr/>
         </p:nvSpPr>
@@ -27648,7 +29988,7 @@
       </p:sp>
       <p:sp>
         <p:nvSpPr>
-          <p:cNvPr id="1562" name="l5-time"/>
+          <p:cNvPr id="1616" name="l5-time"/>
           <p:cNvSpPr txBox="1"/>
           <p:nvPr/>
         </p:nvSpPr>
@@ -27687,7 +30027,7 @@
       </p:sp>
       <p:sp>
         <p:nvSpPr>
-          <p:cNvPr id="1563" name="l5-title"/>
+          <p:cNvPr id="1617" name="l5-title"/>
           <p:cNvSpPr txBox="1"/>
           <p:nvPr/>
         </p:nvSpPr>
@@ -27729,7 +30069,7 @@
       </p:sp>
       <p:sp>
         <p:nvSpPr>
-          <p:cNvPr id="1564" name="l6-dot"/>
+          <p:cNvPr id="1618" name="l6-dot"/>
           <p:cNvSpPr/>
           <p:nvPr/>
         </p:nvSpPr>
@@ -27776,7 +30116,7 @@
       </p:sp>
       <p:sp>
         <p:nvSpPr>
-          <p:cNvPr id="1565" name="l6-time"/>
+          <p:cNvPr id="1619" name="l6-time"/>
           <p:cNvSpPr txBox="1"/>
           <p:nvPr/>
         </p:nvSpPr>
@@ -27815,7 +30155,7 @@
       </p:sp>
       <p:sp>
         <p:nvSpPr>
-          <p:cNvPr id="1566" name="l6-title"/>
+          <p:cNvPr id="1620" name="l6-title"/>
           <p:cNvSpPr txBox="1"/>
           <p:nvPr/>
         </p:nvSpPr>
@@ -27882,7 +30222,7 @@
       </p:grpSpPr>
       <p:sp>
         <p:nvSpPr>
-          <p:cNvPr id="1567" name="kicker"/>
+          <p:cNvPr id="1621" name="kicker"/>
           <p:cNvSpPr txBox="1"/>
           <p:nvPr/>
         </p:nvSpPr>
@@ -27921,7 +30261,7 @@
       </p:sp>
       <p:sp>
         <p:nvSpPr>
-          <p:cNvPr id="1568" name="title"/>
+          <p:cNvPr id="1622" name="title"/>
           <p:cNvSpPr txBox="1"/>
           <p:nvPr/>
         </p:nvSpPr>
@@ -27963,7 +30303,7 @@
       </p:sp>
       <p:sp>
         <p:nvSpPr>
-          <p:cNvPr id="1569" name="subtitle"/>
+          <p:cNvPr id="1623" name="subtitle"/>
           <p:cNvSpPr txBox="1"/>
           <p:nvPr/>
         </p:nvSpPr>
@@ -28005,7 +30345,7 @@
       </p:sp>
       <p:sp>
         <p:nvSpPr>
-          <p:cNvPr id="1570" name="Slide Number Placeholder"/>
+          <p:cNvPr id="1624" name="Slide Number Placeholder"/>
           <p:cNvSpPr>
             <a:spLocks noGrp="1"/>
           </p:cNvSpPr>
@@ -28030,7 +30370,7 @@
       </p:sp>
       <p:sp>
         <p:nvSpPr>
-          <p:cNvPr id="1571" name="w0-0"/>
+          <p:cNvPr id="1625" name="w0-0"/>
           <p:cNvSpPr/>
           <p:nvPr/>
         </p:nvSpPr>
@@ -28088,7 +30428,7 @@
       </p:sp>
       <p:sp>
         <p:nvSpPr>
-          <p:cNvPr id="1572" name="w0-0-bar"/>
+          <p:cNvPr id="1626" name="w0-0-bar"/>
           <p:cNvSpPr/>
           <p:nvPr/>
         </p:nvSpPr>
@@ -28137,7 +30477,7 @@
       </p:sp>
       <p:sp>
         <p:nvSpPr>
-          <p:cNvPr id="1573" name="w0-0-title"/>
+          <p:cNvPr id="1627" name="w0-0-title"/>
           <p:cNvSpPr txBox="1"/>
           <p:nvPr/>
         </p:nvSpPr>
@@ -28179,7 +30519,7 @@
       </p:sp>
       <p:sp>
         <p:nvSpPr>
-          <p:cNvPr id="1574" name="w0-0-body"/>
+          <p:cNvPr id="1628" name="w0-0-body"/>
           <p:cNvSpPr txBox="1"/>
           <p:nvPr/>
         </p:nvSpPr>
@@ -28221,7 +30561,7 @@
       </p:sp>
       <p:sp>
         <p:nvSpPr>
-          <p:cNvPr id="1575" name="w0-1"/>
+          <p:cNvPr id="1629" name="w0-1"/>
           <p:cNvSpPr/>
           <p:nvPr/>
         </p:nvSpPr>
@@ -28279,7 +30619,7 @@
       </p:sp>
       <p:sp>
         <p:nvSpPr>
-          <p:cNvPr id="1576" name="w0-1-bar"/>
+          <p:cNvPr id="1630" name="w0-1-bar"/>
           <p:cNvSpPr/>
           <p:nvPr/>
         </p:nvSpPr>
@@ -28328,7 +30668,7 @@
       </p:sp>
       <p:sp>
         <p:nvSpPr>
-          <p:cNvPr id="1577" name="w0-1-title"/>
+          <p:cNvPr id="1631" name="w0-1-title"/>
           <p:cNvSpPr txBox="1"/>
           <p:nvPr/>
         </p:nvSpPr>
@@ -28370,7 +30710,7 @@
       </p:sp>
       <p:sp>
         <p:nvSpPr>
-          <p:cNvPr id="1578" name="w0-1-body"/>
+          <p:cNvPr id="1632" name="w0-1-body"/>
           <p:cNvSpPr txBox="1"/>
           <p:nvPr/>
         </p:nvSpPr>
@@ -28412,7 +30752,7 @@
       </p:sp>
       <p:sp>
         <p:nvSpPr>
-          <p:cNvPr id="1579" name="w0-2"/>
+          <p:cNvPr id="1633" name="w0-2"/>
           <p:cNvSpPr/>
           <p:nvPr/>
         </p:nvSpPr>
@@ -28470,7 +30810,7 @@
       </p:sp>
       <p:sp>
         <p:nvSpPr>
-          <p:cNvPr id="1580" name="w0-2-bar"/>
+          <p:cNvPr id="1634" name="w0-2-bar"/>
           <p:cNvSpPr/>
           <p:nvPr/>
         </p:nvSpPr>
@@ -28519,7 +30859,7 @@
       </p:sp>
       <p:sp>
         <p:nvSpPr>
-          <p:cNvPr id="1581" name="w0-2-title"/>
+          <p:cNvPr id="1635" name="w0-2-title"/>
           <p:cNvSpPr txBox="1"/>
           <p:nvPr/>
         </p:nvSpPr>
@@ -28561,7 +30901,7 @@
       </p:sp>
       <p:sp>
         <p:nvSpPr>
-          <p:cNvPr id="1582" name="w0-2-body"/>
+          <p:cNvPr id="1636" name="w0-2-body"/>
           <p:cNvSpPr txBox="1"/>
           <p:nvPr/>
         </p:nvSpPr>
@@ -28603,7 +30943,7 @@
       </p:sp>
       <p:sp>
         <p:nvSpPr>
-          <p:cNvPr id="1583" name="w0-3"/>
+          <p:cNvPr id="1637" name="w0-3"/>
           <p:cNvSpPr/>
           <p:nvPr/>
         </p:nvSpPr>
@@ -28661,7 +31001,7 @@
       </p:sp>
       <p:sp>
         <p:nvSpPr>
-          <p:cNvPr id="1584" name="w0-3-bar"/>
+          <p:cNvPr id="1638" name="w0-3-bar"/>
           <p:cNvSpPr/>
           <p:nvPr/>
         </p:nvSpPr>
@@ -28710,7 +31050,7 @@
       </p:sp>
       <p:sp>
         <p:nvSpPr>
-          <p:cNvPr id="1585" name="w0-3-title"/>
+          <p:cNvPr id="1639" name="w0-3-title"/>
           <p:cNvSpPr txBox="1"/>
           <p:nvPr/>
         </p:nvSpPr>
@@ -28752,7 +31092,7 @@
       </p:sp>
       <p:sp>
         <p:nvSpPr>
-          <p:cNvPr id="1586" name="w0-3-body"/>
+          <p:cNvPr id="1640" name="w0-3-body"/>
           <p:cNvSpPr txBox="1"/>
           <p:nvPr/>
         </p:nvSpPr>
@@ -28794,7 +31134,7 @@
       </p:sp>
       <p:sp>
         <p:nvSpPr>
-          <p:cNvPr id="1587" name="w1-0"/>
+          <p:cNvPr id="1641" name="w1-0"/>
           <p:cNvSpPr/>
           <p:nvPr/>
         </p:nvSpPr>
@@ -28852,7 +31192,7 @@
       </p:sp>
       <p:sp>
         <p:nvSpPr>
-          <p:cNvPr id="1588" name="w1-0-bar"/>
+          <p:cNvPr id="1642" name="w1-0-bar"/>
           <p:cNvSpPr/>
           <p:nvPr/>
         </p:nvSpPr>
@@ -28901,7 +31241,7 @@
       </p:sp>
       <p:sp>
         <p:nvSpPr>
-          <p:cNvPr id="1589" name="w1-0-title"/>
+          <p:cNvPr id="1643" name="w1-0-title"/>
           <p:cNvSpPr txBox="1"/>
           <p:nvPr/>
         </p:nvSpPr>
@@ -28943,7 +31283,7 @@
       </p:sp>
       <p:sp>
         <p:nvSpPr>
-          <p:cNvPr id="1590" name="w1-0-body"/>
+          <p:cNvPr id="1644" name="w1-0-body"/>
           <p:cNvSpPr txBox="1"/>
           <p:nvPr/>
         </p:nvSpPr>
@@ -28985,7 +31325,7 @@
       </p:sp>
       <p:sp>
         <p:nvSpPr>
-          <p:cNvPr id="1591" name="w1-1"/>
+          <p:cNvPr id="1645" name="w1-1"/>
           <p:cNvSpPr/>
           <p:nvPr/>
         </p:nvSpPr>
@@ -29043,7 +31383,7 @@
       </p:sp>
       <p:sp>
         <p:nvSpPr>
-          <p:cNvPr id="1592" name="w1-1-bar"/>
+          <p:cNvPr id="1646" name="w1-1-bar"/>
           <p:cNvSpPr/>
           <p:nvPr/>
         </p:nvSpPr>
@@ -29092,7 +31432,7 @@
       </p:sp>
       <p:sp>
         <p:nvSpPr>
-          <p:cNvPr id="1593" name="w1-1-title"/>
+          <p:cNvPr id="1647" name="w1-1-title"/>
           <p:cNvSpPr txBox="1"/>
           <p:nvPr/>
         </p:nvSpPr>
@@ -29134,7 +31474,7 @@
       </p:sp>
       <p:sp>
         <p:nvSpPr>
-          <p:cNvPr id="1594" name="w1-1-body"/>
+          <p:cNvPr id="1648" name="w1-1-body"/>
           <p:cNvSpPr txBox="1"/>
           <p:nvPr/>
         </p:nvSpPr>
@@ -29176,7 +31516,7 @@
       </p:sp>
       <p:sp>
         <p:nvSpPr>
-          <p:cNvPr id="1595" name="w1-2"/>
+          <p:cNvPr id="1649" name="w1-2"/>
           <p:cNvSpPr/>
           <p:nvPr/>
         </p:nvSpPr>
@@ -29234,7 +31574,7 @@
       </p:sp>
       <p:sp>
         <p:nvSpPr>
-          <p:cNvPr id="1596" name="w1-2-bar"/>
+          <p:cNvPr id="1650" name="w1-2-bar"/>
           <p:cNvSpPr/>
           <p:nvPr/>
         </p:nvSpPr>
@@ -29283,7 +31623,7 @@
       </p:sp>
       <p:sp>
         <p:nvSpPr>
-          <p:cNvPr id="1597" name="w1-2-title"/>
+          <p:cNvPr id="1651" name="w1-2-title"/>
           <p:cNvSpPr txBox="1"/>
           <p:nvPr/>
         </p:nvSpPr>
@@ -29325,7 +31665,7 @@
       </p:sp>
       <p:sp>
         <p:nvSpPr>
-          <p:cNvPr id="1598" name="w1-2-body"/>
+          <p:cNvPr id="1652" name="w1-2-body"/>
           <p:cNvSpPr txBox="1"/>
           <p:nvPr/>
         </p:nvSpPr>
@@ -29367,7 +31707,7 @@
       </p:sp>
       <p:sp>
         <p:nvSpPr>
-          <p:cNvPr id="1599" name="cb"/>
+          <p:cNvPr id="1653" name="cb"/>
           <p:cNvSpPr/>
           <p:nvPr/>
         </p:nvSpPr>
@@ -29431,7 +31771,7 @@
       </p:sp>
       <p:sp>
         <p:nvSpPr>
-          <p:cNvPr id="1600" name="cb-t"/>
+          <p:cNvPr id="1654" name="cb-t"/>
           <p:cNvSpPr txBox="1"/>
           <p:nvPr/>
         </p:nvSpPr>
@@ -29495,7 +31835,7 @@
       </p:grpSpPr>
       <p:sp>
         <p:nvSpPr>
-          <p:cNvPr id="1601" name="kicker"/>
+          <p:cNvPr id="1655" name="kicker"/>
           <p:cNvSpPr txBox="1"/>
           <p:nvPr/>
         </p:nvSpPr>
@@ -29534,7 +31874,7 @@
       </p:sp>
       <p:sp>
         <p:nvSpPr>
-          <p:cNvPr id="1602" name="title"/>
+          <p:cNvPr id="1656" name="title"/>
           <p:cNvSpPr txBox="1"/>
           <p:nvPr/>
         </p:nvSpPr>
@@ -29576,7 +31916,7 @@
       </p:sp>
       <p:sp>
         <p:nvSpPr>
-          <p:cNvPr id="1603" name="Slide Number Placeholder"/>
+          <p:cNvPr id="1657" name="Slide Number Placeholder"/>
           <p:cNvSpPr>
             <a:spLocks noGrp="1"/>
           </p:cNvSpPr>
@@ -29601,18 +31941,18 @@
       </p:sp>
       <p:sp>
         <p:nvSpPr>
-          <p:cNvPr id="1604" name="asp0"/>
+          <p:cNvPr id="1658" name="asp0"/>
           <p:cNvSpPr/>
           <p:nvPr/>
         </p:nvSpPr>
         <p:spPr>
           <a:xfrm>
             <a:off x="5371186" y="1325880"/>
-            <a:ext cx="1185062" cy="1051560"/>
+            <a:ext cx="1185062" cy="1143000"/>
           </a:xfrm>
           <a:prstGeom prst="roundRect">
             <a:avLst>
-              <a:gd name="adj" fmla="val 4521"/>
+              <a:gd name="adj" fmla="val 4160"/>
             </a:avLst>
           </a:prstGeom>
           <a:solidFill>
@@ -29659,7 +31999,7 @@
       </p:sp>
       <p:sp>
         <p:nvSpPr>
-          <p:cNvPr id="1605" name="asp0-bar"/>
+          <p:cNvPr id="1659" name="asp0-bar"/>
           <p:cNvSpPr/>
           <p:nvPr/>
         </p:nvSpPr>
@@ -29708,13 +32048,52 @@
       </p:sp>
       <p:sp>
         <p:nvSpPr>
-          <p:cNvPr id="1606" name="asp0-title"/>
+          <p:cNvPr id="1660" name="asp0-eye"/>
           <p:cNvSpPr txBox="1"/>
           <p:nvPr/>
         </p:nvSpPr>
         <p:spPr>
           <a:xfrm>
             <a:off x="5490058" y="1472184"/>
+            <a:ext cx="947318" cy="91440"/>
+          </a:xfrm>
+          <a:prstGeom prst="rect">
+            <a:avLst/>
+          </a:prstGeom>
+          <a:noFill/>
+        </p:spPr>
+        <p:txBody>
+          <a:bodyPr wrap="square" lIns="0" tIns="0" rIns="0" bIns="0" anchor="t"/>
+          <a:lstStyle/>
+          <a:p>
+            <a:pPr algn="r" rtl="1">
+              <a:spcAft>
+                <a:spcPts val="0"/>
+              </a:spcAft>
+            </a:pPr>
+            <a:r>
+              <a:rPr lang="ar-SA" sz="420" b="0" dirty="0">
+                <a:solidFill>
+                  <a:srgbClr val="753BBD"/>
+                </a:solidFill>
+                <a:latin typeface="DiodrumArabic-Semibold"/>
+                <a:ea typeface="DiodrumArabic-Semibold"/>
+                <a:cs typeface="DiodrumArabic-Semibold"/>
+              </a:rPr>
+              <a:t>3 ساعات</a:t>
+            </a:r>
+          </a:p>
+        </p:txBody>
+      </p:sp>
+      <p:sp>
+        <p:nvSpPr>
+          <p:cNvPr id="1661" name="asp0-title"/>
+          <p:cNvSpPr txBox="1"/>
+          <p:nvPr/>
+        </p:nvSpPr>
+        <p:spPr>
+          <a:xfrm>
+            <a:off x="5490058" y="1591056"/>
             <a:ext cx="947318" cy="146304"/>
           </a:xfrm>
           <a:prstGeom prst="rect">
@@ -29750,14 +32129,14 @@
       </p:sp>
       <p:sp>
         <p:nvSpPr>
-          <p:cNvPr id="1607" name="asp0-body"/>
-          <p:cNvSpPr txBox="1"/>
-          <p:nvPr/>
-        </p:nvSpPr>
-        <p:spPr>
-          <a:xfrm>
-            <a:off x="5490058" y="1609344"/>
-            <a:ext cx="947318" cy="649224"/>
+          <p:cNvPr id="1662" name="asp0-body"/>
+          <p:cNvSpPr txBox="1"/>
+          <p:nvPr/>
+        </p:nvSpPr>
+        <p:spPr>
+          <a:xfrm>
+            <a:off x="5490058" y="1728216"/>
+            <a:ext cx="947318" cy="621792"/>
           </a:xfrm>
           <a:prstGeom prst="rect">
             <a:avLst/>
@@ -29792,18 +32171,18 @@
       </p:sp>
       <p:sp>
         <p:nvSpPr>
-          <p:cNvPr id="1608" name="asp1"/>
+          <p:cNvPr id="1663" name="asp1"/>
           <p:cNvSpPr/>
           <p:nvPr/>
         </p:nvSpPr>
         <p:spPr>
           <a:xfrm>
             <a:off x="4103827" y="1325880"/>
-            <a:ext cx="1185062" cy="1051560"/>
+            <a:ext cx="1185062" cy="1143000"/>
           </a:xfrm>
           <a:prstGeom prst="roundRect">
             <a:avLst>
-              <a:gd name="adj" fmla="val 4521"/>
+              <a:gd name="adj" fmla="val 4160"/>
             </a:avLst>
           </a:prstGeom>
           <a:solidFill>
@@ -29850,7 +32229,7 @@
       </p:sp>
       <p:sp>
         <p:nvSpPr>
-          <p:cNvPr id="1609" name="asp1-bar"/>
+          <p:cNvPr id="1664" name="asp1-bar"/>
           <p:cNvSpPr/>
           <p:nvPr/>
         </p:nvSpPr>
@@ -29899,13 +32278,52 @@
       </p:sp>
       <p:sp>
         <p:nvSpPr>
-          <p:cNvPr id="1610" name="asp1-title"/>
+          <p:cNvPr id="1665" name="asp1-eye"/>
           <p:cNvSpPr txBox="1"/>
           <p:nvPr/>
         </p:nvSpPr>
         <p:spPr>
           <a:xfrm>
             <a:off x="4222699" y="1472184"/>
+            <a:ext cx="947318" cy="91440"/>
+          </a:xfrm>
+          <a:prstGeom prst="rect">
+            <a:avLst/>
+          </a:prstGeom>
+          <a:noFill/>
+        </p:spPr>
+        <p:txBody>
+          <a:bodyPr wrap="square" lIns="0" tIns="0" rIns="0" bIns="0" anchor="t"/>
+          <a:lstStyle/>
+          <a:p>
+            <a:pPr algn="r" rtl="1">
+              <a:spcAft>
+                <a:spcPts val="0"/>
+              </a:spcAft>
+            </a:pPr>
+            <a:r>
+              <a:rPr lang="ar-SA" sz="420" b="0" dirty="0">
+                <a:solidFill>
+                  <a:srgbClr val="753BBD"/>
+                </a:solidFill>
+                <a:latin typeface="DiodrumArabic-Semibold"/>
+                <a:ea typeface="DiodrumArabic-Semibold"/>
+                <a:cs typeface="DiodrumArabic-Semibold"/>
+              </a:rPr>
+              <a:t>4 ساعات</a:t>
+            </a:r>
+          </a:p>
+        </p:txBody>
+      </p:sp>
+      <p:sp>
+        <p:nvSpPr>
+          <p:cNvPr id="1666" name="asp1-title"/>
+          <p:cNvSpPr txBox="1"/>
+          <p:nvPr/>
+        </p:nvSpPr>
+        <p:spPr>
+          <a:xfrm>
+            <a:off x="4222699" y="1591056"/>
             <a:ext cx="947318" cy="146304"/>
           </a:xfrm>
           <a:prstGeom prst="rect">
@@ -29941,14 +32359,14 @@
       </p:sp>
       <p:sp>
         <p:nvSpPr>
-          <p:cNvPr id="1611" name="asp1-body"/>
-          <p:cNvSpPr txBox="1"/>
-          <p:nvPr/>
-        </p:nvSpPr>
-        <p:spPr>
-          <a:xfrm>
-            <a:off x="4222699" y="1609344"/>
-            <a:ext cx="947318" cy="649224"/>
+          <p:cNvPr id="1667" name="asp1-body"/>
+          <p:cNvSpPr txBox="1"/>
+          <p:nvPr/>
+        </p:nvSpPr>
+        <p:spPr>
+          <a:xfrm>
+            <a:off x="4222699" y="1728216"/>
+            <a:ext cx="947318" cy="621792"/>
           </a:xfrm>
           <a:prstGeom prst="rect">
             <a:avLst/>
@@ -29983,18 +32401,18 @@
       </p:sp>
       <p:sp>
         <p:nvSpPr>
-          <p:cNvPr id="1612" name="asp2"/>
+          <p:cNvPr id="1668" name="asp2"/>
           <p:cNvSpPr/>
           <p:nvPr/>
         </p:nvSpPr>
         <p:spPr>
           <a:xfrm>
             <a:off x="2836469" y="1325880"/>
-            <a:ext cx="1185062" cy="1051560"/>
+            <a:ext cx="1185062" cy="1143000"/>
           </a:xfrm>
           <a:prstGeom prst="roundRect">
             <a:avLst>
-              <a:gd name="adj" fmla="val 4521"/>
+              <a:gd name="adj" fmla="val 4160"/>
             </a:avLst>
           </a:prstGeom>
           <a:solidFill>
@@ -30041,7 +32459,7 @@
       </p:sp>
       <p:sp>
         <p:nvSpPr>
-          <p:cNvPr id="1613" name="asp2-bar"/>
+          <p:cNvPr id="1669" name="asp2-bar"/>
           <p:cNvSpPr/>
           <p:nvPr/>
         </p:nvSpPr>
@@ -30090,13 +32508,52 @@
       </p:sp>
       <p:sp>
         <p:nvSpPr>
-          <p:cNvPr id="1614" name="asp2-title"/>
+          <p:cNvPr id="1670" name="asp2-eye"/>
           <p:cNvSpPr txBox="1"/>
           <p:nvPr/>
         </p:nvSpPr>
         <p:spPr>
           <a:xfrm>
             <a:off x="2955341" y="1472184"/>
+            <a:ext cx="947318" cy="91440"/>
+          </a:xfrm>
+          <a:prstGeom prst="rect">
+            <a:avLst/>
+          </a:prstGeom>
+          <a:noFill/>
+        </p:spPr>
+        <p:txBody>
+          <a:bodyPr wrap="square" lIns="0" tIns="0" rIns="0" bIns="0" anchor="t"/>
+          <a:lstStyle/>
+          <a:p>
+            <a:pPr algn="r" rtl="1">
+              <a:spcAft>
+                <a:spcPts val="0"/>
+              </a:spcAft>
+            </a:pPr>
+            <a:r>
+              <a:rPr lang="ar-SA" sz="420" b="0" dirty="0">
+                <a:solidFill>
+                  <a:srgbClr val="753BBD"/>
+                </a:solidFill>
+                <a:latin typeface="DiodrumArabic-Semibold"/>
+                <a:ea typeface="DiodrumArabic-Semibold"/>
+                <a:cs typeface="DiodrumArabic-Semibold"/>
+              </a:rPr>
+              <a:t>يوم كامل</a:t>
+            </a:r>
+          </a:p>
+        </p:txBody>
+      </p:sp>
+      <p:sp>
+        <p:nvSpPr>
+          <p:cNvPr id="1671" name="asp2-title"/>
+          <p:cNvSpPr txBox="1"/>
+          <p:nvPr/>
+        </p:nvSpPr>
+        <p:spPr>
+          <a:xfrm>
+            <a:off x="2955341" y="1591056"/>
             <a:ext cx="947318" cy="146304"/>
           </a:xfrm>
           <a:prstGeom prst="rect">
@@ -30132,14 +32589,14 @@
       </p:sp>
       <p:sp>
         <p:nvSpPr>
-          <p:cNvPr id="1615" name="asp2-body"/>
-          <p:cNvSpPr txBox="1"/>
-          <p:nvPr/>
-        </p:nvSpPr>
-        <p:spPr>
-          <a:xfrm>
-            <a:off x="2955341" y="1609344"/>
-            <a:ext cx="947318" cy="649224"/>
+          <p:cNvPr id="1672" name="asp2-body"/>
+          <p:cNvSpPr txBox="1"/>
+          <p:nvPr/>
+        </p:nvSpPr>
+        <p:spPr>
+          <a:xfrm>
+            <a:off x="2955341" y="1728216"/>
+            <a:ext cx="947318" cy="621792"/>
           </a:xfrm>
           <a:prstGeom prst="rect">
             <a:avLst/>
@@ -30174,18 +32631,18 @@
       </p:sp>
       <p:sp>
         <p:nvSpPr>
-          <p:cNvPr id="1616" name="asp3"/>
+          <p:cNvPr id="1673" name="asp3"/>
           <p:cNvSpPr/>
           <p:nvPr/>
         </p:nvSpPr>
         <p:spPr>
           <a:xfrm>
             <a:off x="1569110" y="1325880"/>
-            <a:ext cx="1185062" cy="1051560"/>
+            <a:ext cx="1185062" cy="1143000"/>
           </a:xfrm>
           <a:prstGeom prst="roundRect">
             <a:avLst>
-              <a:gd name="adj" fmla="val 4521"/>
+              <a:gd name="adj" fmla="val 4160"/>
             </a:avLst>
           </a:prstGeom>
           <a:solidFill>
@@ -30232,7 +32689,7 @@
       </p:sp>
       <p:sp>
         <p:nvSpPr>
-          <p:cNvPr id="1617" name="asp3-bar"/>
+          <p:cNvPr id="1674" name="asp3-bar"/>
           <p:cNvSpPr/>
           <p:nvPr/>
         </p:nvSpPr>
@@ -30281,13 +32738,52 @@
       </p:sp>
       <p:sp>
         <p:nvSpPr>
-          <p:cNvPr id="1618" name="asp3-title"/>
+          <p:cNvPr id="1675" name="asp3-eye"/>
           <p:cNvSpPr txBox="1"/>
           <p:nvPr/>
         </p:nvSpPr>
         <p:spPr>
           <a:xfrm>
             <a:off x="1687982" y="1472184"/>
+            <a:ext cx="947318" cy="91440"/>
+          </a:xfrm>
+          <a:prstGeom prst="rect">
+            <a:avLst/>
+          </a:prstGeom>
+          <a:noFill/>
+        </p:spPr>
+        <p:txBody>
+          <a:bodyPr wrap="square" lIns="0" tIns="0" rIns="0" bIns="0" anchor="t"/>
+          <a:lstStyle/>
+          <a:p>
+            <a:pPr algn="r" rtl="1">
+              <a:spcAft>
+                <a:spcPts val="0"/>
+              </a:spcAft>
+            </a:pPr>
+            <a:r>
+              <a:rPr lang="ar-SA" sz="420" b="0" dirty="0">
+                <a:solidFill>
+                  <a:srgbClr val="753BBD"/>
+                </a:solidFill>
+                <a:latin typeface="DiodrumArabic-Semibold"/>
+                <a:ea typeface="DiodrumArabic-Semibold"/>
+                <a:cs typeface="DiodrumArabic-Semibold"/>
+              </a:rPr>
+              <a:t>يوم كامل</a:t>
+            </a:r>
+          </a:p>
+        </p:txBody>
+      </p:sp>
+      <p:sp>
+        <p:nvSpPr>
+          <p:cNvPr id="1676" name="asp3-title"/>
+          <p:cNvSpPr txBox="1"/>
+          <p:nvPr/>
+        </p:nvSpPr>
+        <p:spPr>
+          <a:xfrm>
+            <a:off x="1687982" y="1591056"/>
             <a:ext cx="947318" cy="146304"/>
           </a:xfrm>
           <a:prstGeom prst="rect">
@@ -30323,14 +32819,14 @@
       </p:sp>
       <p:sp>
         <p:nvSpPr>
-          <p:cNvPr id="1619" name="asp3-body"/>
-          <p:cNvSpPr txBox="1"/>
-          <p:nvPr/>
-        </p:nvSpPr>
-        <p:spPr>
-          <a:xfrm>
-            <a:off x="1687982" y="1609344"/>
-            <a:ext cx="947318" cy="649224"/>
+          <p:cNvPr id="1677" name="asp3-body"/>
+          <p:cNvSpPr txBox="1"/>
+          <p:nvPr/>
+        </p:nvSpPr>
+        <p:spPr>
+          <a:xfrm>
+            <a:off x="1687982" y="1728216"/>
+            <a:ext cx="947318" cy="621792"/>
           </a:xfrm>
           <a:prstGeom prst="rect">
             <a:avLst/>
@@ -30365,18 +32861,18 @@
       </p:sp>
       <p:sp>
         <p:nvSpPr>
-          <p:cNvPr id="1620" name="asp4"/>
+          <p:cNvPr id="1678" name="asp4"/>
           <p:cNvSpPr/>
           <p:nvPr/>
         </p:nvSpPr>
         <p:spPr>
           <a:xfrm>
             <a:off x="301752" y="1325880"/>
-            <a:ext cx="1185062" cy="1051560"/>
+            <a:ext cx="1185062" cy="1143000"/>
           </a:xfrm>
           <a:prstGeom prst="roundRect">
             <a:avLst>
-              <a:gd name="adj" fmla="val 4521"/>
+              <a:gd name="adj" fmla="val 4160"/>
             </a:avLst>
           </a:prstGeom>
           <a:solidFill>
@@ -30423,7 +32919,7 @@
       </p:sp>
       <p:sp>
         <p:nvSpPr>
-          <p:cNvPr id="1621" name="asp4-bar"/>
+          <p:cNvPr id="1679" name="asp4-bar"/>
           <p:cNvSpPr/>
           <p:nvPr/>
         </p:nvSpPr>
@@ -30472,13 +32968,52 @@
       </p:sp>
       <p:sp>
         <p:nvSpPr>
-          <p:cNvPr id="1622" name="asp4-title"/>
+          <p:cNvPr id="1680" name="asp4-eye"/>
           <p:cNvSpPr txBox="1"/>
           <p:nvPr/>
         </p:nvSpPr>
         <p:spPr>
           <a:xfrm>
             <a:off x="420624" y="1472184"/>
+            <a:ext cx="947318" cy="91440"/>
+          </a:xfrm>
+          <a:prstGeom prst="rect">
+            <a:avLst/>
+          </a:prstGeom>
+          <a:noFill/>
+        </p:spPr>
+        <p:txBody>
+          <a:bodyPr wrap="square" lIns="0" tIns="0" rIns="0" bIns="0" anchor="t"/>
+          <a:lstStyle/>
+          <a:p>
+            <a:pPr algn="r" rtl="1">
+              <a:spcAft>
+                <a:spcPts val="0"/>
+              </a:spcAft>
+            </a:pPr>
+            <a:r>
+              <a:rPr lang="ar-SA" sz="420" b="0" dirty="0">
+                <a:solidFill>
+                  <a:srgbClr val="753BBD"/>
+                </a:solidFill>
+                <a:latin typeface="DiodrumArabic-Semibold"/>
+                <a:ea typeface="DiodrumArabic-Semibold"/>
+                <a:cs typeface="DiodrumArabic-Semibold"/>
+              </a:rPr>
+              <a:t>يوم كامل</a:t>
+            </a:r>
+          </a:p>
+        </p:txBody>
+      </p:sp>
+      <p:sp>
+        <p:nvSpPr>
+          <p:cNvPr id="1681" name="asp4-title"/>
+          <p:cNvSpPr txBox="1"/>
+          <p:nvPr/>
+        </p:nvSpPr>
+        <p:spPr>
+          <a:xfrm>
+            <a:off x="420624" y="1591056"/>
             <a:ext cx="947318" cy="146304"/>
           </a:xfrm>
           <a:prstGeom prst="rect">
@@ -30514,14 +33049,14 @@
       </p:sp>
       <p:sp>
         <p:nvSpPr>
-          <p:cNvPr id="1623" name="asp4-body"/>
-          <p:cNvSpPr txBox="1"/>
-          <p:nvPr/>
-        </p:nvSpPr>
-        <p:spPr>
-          <a:xfrm>
-            <a:off x="420624" y="1728216"/>
-            <a:ext cx="947318" cy="530352"/>
+          <p:cNvPr id="1682" name="asp4-body"/>
+          <p:cNvSpPr txBox="1"/>
+          <p:nvPr/>
+        </p:nvSpPr>
+        <p:spPr>
+          <a:xfrm>
+            <a:off x="420624" y="1847088"/>
+            <a:ext cx="947318" cy="502920"/>
           </a:xfrm>
           <a:prstGeom prst="rect">
             <a:avLst/>
@@ -30556,7 +33091,7 @@
       </p:sp>
       <p:sp>
         <p:nvSpPr>
-          <p:cNvPr id="1624" name="cb"/>
+          <p:cNvPr id="1683" name="cb"/>
           <p:cNvSpPr/>
           <p:nvPr/>
         </p:nvSpPr>
@@ -30620,7 +33155,7 @@
       </p:sp>
       <p:sp>
         <p:nvSpPr>
-          <p:cNvPr id="1625" name="cb-t"/>
+          <p:cNvPr id="1684" name="cb-t"/>
           <p:cNvSpPr txBox="1"/>
           <p:nvPr/>
         </p:nvSpPr>
@@ -30684,7 +33219,7 @@
       </p:grpSpPr>
       <p:sp>
         <p:nvSpPr>
-          <p:cNvPr id="1626" name="kicker"/>
+          <p:cNvPr id="1685" name="kicker"/>
           <p:cNvSpPr txBox="1"/>
           <p:nvPr/>
         </p:nvSpPr>
@@ -30723,7 +33258,7 @@
       </p:sp>
       <p:sp>
         <p:nvSpPr>
-          <p:cNvPr id="1627" name="title"/>
+          <p:cNvPr id="1686" name="title"/>
           <p:cNvSpPr txBox="1"/>
           <p:nvPr/>
         </p:nvSpPr>
@@ -30765,7 +33300,7 @@
       </p:sp>
       <p:sp>
         <p:nvSpPr>
-          <p:cNvPr id="1628" name="Slide Number Placeholder"/>
+          <p:cNvPr id="1687" name="Slide Number Placeholder"/>
           <p:cNvSpPr>
             <a:spLocks noGrp="1"/>
           </p:cNvSpPr>
@@ -30790,18 +33325,18 @@
       </p:sp>
       <p:sp>
         <p:nvSpPr>
-          <p:cNvPr id="1629" name="def0"/>
+          <p:cNvPr id="1688" name="def0"/>
           <p:cNvSpPr/>
           <p:nvPr/>
         </p:nvSpPr>
         <p:spPr>
           <a:xfrm>
             <a:off x="5371186" y="1325880"/>
-            <a:ext cx="1185062" cy="1097280"/>
+            <a:ext cx="1185062" cy="1188720"/>
           </a:xfrm>
           <a:prstGeom prst="roundRect">
             <a:avLst>
-              <a:gd name="adj" fmla="val 4333"/>
+              <a:gd name="adj" fmla="val 4000"/>
             </a:avLst>
           </a:prstGeom>
           <a:solidFill>
@@ -30848,7 +33383,7 @@
       </p:sp>
       <p:sp>
         <p:nvSpPr>
-          <p:cNvPr id="1630" name="def0-bar"/>
+          <p:cNvPr id="1689" name="def0-bar"/>
           <p:cNvSpPr/>
           <p:nvPr/>
         </p:nvSpPr>
@@ -30897,13 +33432,52 @@
       </p:sp>
       <p:sp>
         <p:nvSpPr>
-          <p:cNvPr id="1631" name="def0-title"/>
+          <p:cNvPr id="1690" name="def0-eye"/>
           <p:cNvSpPr txBox="1"/>
           <p:nvPr/>
         </p:nvSpPr>
         <p:spPr>
           <a:xfrm>
             <a:off x="5490058" y="1472184"/>
+            <a:ext cx="947318" cy="91440"/>
+          </a:xfrm>
+          <a:prstGeom prst="rect">
+            <a:avLst/>
+          </a:prstGeom>
+          <a:noFill/>
+        </p:spPr>
+        <p:txBody>
+          <a:bodyPr wrap="square" lIns="0" tIns="0" rIns="0" bIns="0" anchor="t"/>
+          <a:lstStyle/>
+          <a:p>
+            <a:pPr algn="r" rtl="1">
+              <a:spcAft>
+                <a:spcPts val="0"/>
+              </a:spcAft>
+            </a:pPr>
+            <a:r>
+              <a:rPr lang="ar-SA" sz="420" b="0" dirty="0">
+                <a:solidFill>
+                  <a:srgbClr val="753BBD"/>
+                </a:solidFill>
+                <a:latin typeface="DiodrumArabic-Semibold"/>
+                <a:ea typeface="DiodrumArabic-Semibold"/>
+                <a:cs typeface="DiodrumArabic-Semibold"/>
+              </a:rPr>
+              <a:t>Scientific Research</a:t>
+            </a:r>
+          </a:p>
+        </p:txBody>
+      </p:sp>
+      <p:sp>
+        <p:nvSpPr>
+          <p:cNvPr id="1691" name="def0-title"/>
+          <p:cNvSpPr txBox="1"/>
+          <p:nvPr/>
+        </p:nvSpPr>
+        <p:spPr>
+          <a:xfrm>
+            <a:off x="5490058" y="1591056"/>
             <a:ext cx="947318" cy="146304"/>
           </a:xfrm>
           <a:prstGeom prst="rect">
@@ -30939,14 +33513,14 @@
       </p:sp>
       <p:sp>
         <p:nvSpPr>
-          <p:cNvPr id="1632" name="def0-body"/>
-          <p:cNvSpPr txBox="1"/>
-          <p:nvPr/>
-        </p:nvSpPr>
-        <p:spPr>
-          <a:xfrm>
-            <a:off x="5490058" y="1609344"/>
-            <a:ext cx="947318" cy="694944"/>
+          <p:cNvPr id="1692" name="def0-body"/>
+          <p:cNvSpPr txBox="1"/>
+          <p:nvPr/>
+        </p:nvSpPr>
+        <p:spPr>
+          <a:xfrm>
+            <a:off x="5490058" y="1728216"/>
+            <a:ext cx="947318" cy="667512"/>
           </a:xfrm>
           <a:prstGeom prst="rect">
             <a:avLst/>
@@ -30981,18 +33555,18 @@
       </p:sp>
       <p:sp>
         <p:nvSpPr>
-          <p:cNvPr id="1633" name="def1"/>
+          <p:cNvPr id="1693" name="def1"/>
           <p:cNvSpPr/>
           <p:nvPr/>
         </p:nvSpPr>
         <p:spPr>
           <a:xfrm>
             <a:off x="4103827" y="1325880"/>
-            <a:ext cx="1185062" cy="1097280"/>
+            <a:ext cx="1185062" cy="1188720"/>
           </a:xfrm>
           <a:prstGeom prst="roundRect">
             <a:avLst>
-              <a:gd name="adj" fmla="val 4333"/>
+              <a:gd name="adj" fmla="val 4000"/>
             </a:avLst>
           </a:prstGeom>
           <a:solidFill>
@@ -31039,7 +33613,7 @@
       </p:sp>
       <p:sp>
         <p:nvSpPr>
-          <p:cNvPr id="1634" name="def1-bar"/>
+          <p:cNvPr id="1694" name="def1-bar"/>
           <p:cNvSpPr/>
           <p:nvPr/>
         </p:nvSpPr>
@@ -31088,13 +33662,52 @@
       </p:sp>
       <p:sp>
         <p:nvSpPr>
-          <p:cNvPr id="1635" name="def1-title"/>
+          <p:cNvPr id="1695" name="def1-eye"/>
           <p:cNvSpPr txBox="1"/>
           <p:nvPr/>
         </p:nvSpPr>
         <p:spPr>
           <a:xfrm>
             <a:off x="4222699" y="1472184"/>
+            <a:ext cx="947318" cy="91440"/>
+          </a:xfrm>
+          <a:prstGeom prst="rect">
+            <a:avLst/>
+          </a:prstGeom>
+          <a:noFill/>
+        </p:spPr>
+        <p:txBody>
+          <a:bodyPr wrap="square" lIns="0" tIns="0" rIns="0" bIns="0" anchor="t"/>
+          <a:lstStyle/>
+          <a:p>
+            <a:pPr algn="r" rtl="1">
+              <a:spcAft>
+                <a:spcPts val="0"/>
+              </a:spcAft>
+            </a:pPr>
+            <a:r>
+              <a:rPr lang="ar-SA" sz="420" b="0" dirty="0">
+                <a:solidFill>
+                  <a:srgbClr val="753BBD"/>
+                </a:solidFill>
+                <a:latin typeface="DiodrumArabic-Semibold"/>
+                <a:ea typeface="DiodrumArabic-Semibold"/>
+                <a:cs typeface="DiodrumArabic-Semibold"/>
+              </a:rPr>
+              <a:t>POV Study</a:t>
+            </a:r>
+          </a:p>
+        </p:txBody>
+      </p:sp>
+      <p:sp>
+        <p:nvSpPr>
+          <p:cNvPr id="1696" name="def1-title"/>
+          <p:cNvSpPr txBox="1"/>
+          <p:nvPr/>
+        </p:nvSpPr>
+        <p:spPr>
+          <a:xfrm>
+            <a:off x="4222699" y="1591056"/>
             <a:ext cx="947318" cy="146304"/>
           </a:xfrm>
           <a:prstGeom prst="rect">
@@ -31130,14 +33743,14 @@
       </p:sp>
       <p:sp>
         <p:nvSpPr>
-          <p:cNvPr id="1636" name="def1-body"/>
-          <p:cNvSpPr txBox="1"/>
-          <p:nvPr/>
-        </p:nvSpPr>
-        <p:spPr>
-          <a:xfrm>
-            <a:off x="4222699" y="1609344"/>
-            <a:ext cx="947318" cy="694944"/>
+          <p:cNvPr id="1697" name="def1-body"/>
+          <p:cNvSpPr txBox="1"/>
+          <p:nvPr/>
+        </p:nvSpPr>
+        <p:spPr>
+          <a:xfrm>
+            <a:off x="4222699" y="1728216"/>
+            <a:ext cx="947318" cy="667512"/>
           </a:xfrm>
           <a:prstGeom prst="rect">
             <a:avLst/>
@@ -31172,18 +33785,18 @@
       </p:sp>
       <p:sp>
         <p:nvSpPr>
-          <p:cNvPr id="1637" name="def2"/>
+          <p:cNvPr id="1698" name="def2"/>
           <p:cNvSpPr/>
           <p:nvPr/>
         </p:nvSpPr>
         <p:spPr>
           <a:xfrm>
             <a:off x="2836469" y="1325880"/>
-            <a:ext cx="1185062" cy="1097280"/>
+            <a:ext cx="1185062" cy="1188720"/>
           </a:xfrm>
           <a:prstGeom prst="roundRect">
             <a:avLst>
-              <a:gd name="adj" fmla="val 4333"/>
+              <a:gd name="adj" fmla="val 4000"/>
             </a:avLst>
           </a:prstGeom>
           <a:solidFill>
@@ -31230,7 +33843,7 @@
       </p:sp>
       <p:sp>
         <p:nvSpPr>
-          <p:cNvPr id="1638" name="def2-bar"/>
+          <p:cNvPr id="1699" name="def2-bar"/>
           <p:cNvSpPr/>
           <p:nvPr/>
         </p:nvSpPr>
@@ -31279,13 +33892,52 @@
       </p:sp>
       <p:sp>
         <p:nvSpPr>
-          <p:cNvPr id="1639" name="def2-title"/>
+          <p:cNvPr id="1700" name="def2-eye"/>
           <p:cNvSpPr txBox="1"/>
           <p:nvPr/>
         </p:nvSpPr>
         <p:spPr>
           <a:xfrm>
             <a:off x="2955341" y="1472184"/>
+            <a:ext cx="947318" cy="91440"/>
+          </a:xfrm>
+          <a:prstGeom prst="rect">
+            <a:avLst/>
+          </a:prstGeom>
+          <a:noFill/>
+        </p:spPr>
+        <p:txBody>
+          <a:bodyPr wrap="square" lIns="0" tIns="0" rIns="0" bIns="0" anchor="t"/>
+          <a:lstStyle/>
+          <a:p>
+            <a:pPr algn="r" rtl="1">
+              <a:spcAft>
+                <a:spcPts val="0"/>
+              </a:spcAft>
+            </a:pPr>
+            <a:r>
+              <a:rPr lang="ar-SA" sz="420" b="0" dirty="0">
+                <a:solidFill>
+                  <a:srgbClr val="753BBD"/>
+                </a:solidFill>
+                <a:latin typeface="DiodrumArabic-Semibold"/>
+                <a:ea typeface="DiodrumArabic-Semibold"/>
+                <a:cs typeface="DiodrumArabic-Semibold"/>
+              </a:rPr>
+              <a:t>Benchmark Study</a:t>
+            </a:r>
+          </a:p>
+        </p:txBody>
+      </p:sp>
+      <p:sp>
+        <p:nvSpPr>
+          <p:cNvPr id="1701" name="def2-title"/>
+          <p:cNvSpPr txBox="1"/>
+          <p:nvPr/>
+        </p:nvSpPr>
+        <p:spPr>
+          <a:xfrm>
+            <a:off x="2955341" y="1591056"/>
             <a:ext cx="947318" cy="146304"/>
           </a:xfrm>
           <a:prstGeom prst="rect">
@@ -31321,14 +33973,14 @@
       </p:sp>
       <p:sp>
         <p:nvSpPr>
-          <p:cNvPr id="1640" name="def2-body"/>
-          <p:cNvSpPr txBox="1"/>
-          <p:nvPr/>
-        </p:nvSpPr>
-        <p:spPr>
-          <a:xfrm>
-            <a:off x="2955341" y="1609344"/>
-            <a:ext cx="947318" cy="694944"/>
+          <p:cNvPr id="1702" name="def2-body"/>
+          <p:cNvSpPr txBox="1"/>
+          <p:nvPr/>
+        </p:nvSpPr>
+        <p:spPr>
+          <a:xfrm>
+            <a:off x="2955341" y="1728216"/>
+            <a:ext cx="947318" cy="667512"/>
           </a:xfrm>
           <a:prstGeom prst="rect">
             <a:avLst/>
@@ -31363,18 +34015,18 @@
       </p:sp>
       <p:sp>
         <p:nvSpPr>
-          <p:cNvPr id="1641" name="def3"/>
+          <p:cNvPr id="1703" name="def3"/>
           <p:cNvSpPr/>
           <p:nvPr/>
         </p:nvSpPr>
         <p:spPr>
           <a:xfrm>
             <a:off x="1569110" y="1325880"/>
-            <a:ext cx="1185062" cy="1097280"/>
+            <a:ext cx="1185062" cy="1188720"/>
           </a:xfrm>
           <a:prstGeom prst="roundRect">
             <a:avLst>
-              <a:gd name="adj" fmla="val 4333"/>
+              <a:gd name="adj" fmla="val 4000"/>
             </a:avLst>
           </a:prstGeom>
           <a:solidFill>
@@ -31421,7 +34073,7 @@
       </p:sp>
       <p:sp>
         <p:nvSpPr>
-          <p:cNvPr id="1642" name="def3-bar"/>
+          <p:cNvPr id="1704" name="def3-bar"/>
           <p:cNvSpPr/>
           <p:nvPr/>
         </p:nvSpPr>
@@ -31470,13 +34122,52 @@
       </p:sp>
       <p:sp>
         <p:nvSpPr>
-          <p:cNvPr id="1643" name="def3-title"/>
+          <p:cNvPr id="1705" name="def3-eye"/>
           <p:cNvSpPr txBox="1"/>
           <p:nvPr/>
         </p:nvSpPr>
         <p:spPr>
           <a:xfrm>
             <a:off x="1687982" y="1472184"/>
+            <a:ext cx="947318" cy="91440"/>
+          </a:xfrm>
+          <a:prstGeom prst="rect">
+            <a:avLst/>
+          </a:prstGeom>
+          <a:noFill/>
+        </p:spPr>
+        <p:txBody>
+          <a:bodyPr wrap="square" lIns="0" tIns="0" rIns="0" bIns="0" anchor="t"/>
+          <a:lstStyle/>
+          <a:p>
+            <a:pPr algn="r" rtl="1">
+              <a:spcAft>
+                <a:spcPts val="0"/>
+              </a:spcAft>
+            </a:pPr>
+            <a:r>
+              <a:rPr lang="ar-SA" sz="420" b="0" dirty="0">
+                <a:solidFill>
+                  <a:srgbClr val="753BBD"/>
+                </a:solidFill>
+                <a:latin typeface="DiodrumArabic-Semibold"/>
+                <a:ea typeface="DiodrumArabic-Semibold"/>
+                <a:cs typeface="DiodrumArabic-Semibold"/>
+              </a:rPr>
+              <a:t>White Paper</a:t>
+            </a:r>
+          </a:p>
+        </p:txBody>
+      </p:sp>
+      <p:sp>
+        <p:nvSpPr>
+          <p:cNvPr id="1706" name="def3-title"/>
+          <p:cNvSpPr txBox="1"/>
+          <p:nvPr/>
+        </p:nvSpPr>
+        <p:spPr>
+          <a:xfrm>
+            <a:off x="1687982" y="1591056"/>
             <a:ext cx="947318" cy="146304"/>
           </a:xfrm>
           <a:prstGeom prst="rect">
@@ -31512,14 +34203,14 @@
       </p:sp>
       <p:sp>
         <p:nvSpPr>
-          <p:cNvPr id="1644" name="def3-body"/>
-          <p:cNvSpPr txBox="1"/>
-          <p:nvPr/>
-        </p:nvSpPr>
-        <p:spPr>
-          <a:xfrm>
-            <a:off x="1687982" y="1609344"/>
-            <a:ext cx="947318" cy="694944"/>
+          <p:cNvPr id="1707" name="def3-body"/>
+          <p:cNvSpPr txBox="1"/>
+          <p:nvPr/>
+        </p:nvSpPr>
+        <p:spPr>
+          <a:xfrm>
+            <a:off x="1687982" y="1728216"/>
+            <a:ext cx="947318" cy="667512"/>
           </a:xfrm>
           <a:prstGeom prst="rect">
             <a:avLst/>
@@ -31554,18 +34245,18 @@
       </p:sp>
       <p:sp>
         <p:nvSpPr>
-          <p:cNvPr id="1645" name="def4"/>
+          <p:cNvPr id="1708" name="def4"/>
           <p:cNvSpPr/>
           <p:nvPr/>
         </p:nvSpPr>
         <p:spPr>
           <a:xfrm>
             <a:off x="301752" y="1325880"/>
-            <a:ext cx="1185062" cy="1097280"/>
+            <a:ext cx="1185062" cy="1188720"/>
           </a:xfrm>
           <a:prstGeom prst="roundRect">
             <a:avLst>
-              <a:gd name="adj" fmla="val 4333"/>
+              <a:gd name="adj" fmla="val 4000"/>
             </a:avLst>
           </a:prstGeom>
           <a:solidFill>
@@ -31612,7 +34303,7 @@
       </p:sp>
       <p:sp>
         <p:nvSpPr>
-          <p:cNvPr id="1646" name="def4-bar"/>
+          <p:cNvPr id="1709" name="def4-bar"/>
           <p:cNvSpPr/>
           <p:nvPr/>
         </p:nvSpPr>
@@ -31661,13 +34352,52 @@
       </p:sp>
       <p:sp>
         <p:nvSpPr>
-          <p:cNvPr id="1647" name="def4-title"/>
+          <p:cNvPr id="1710" name="def4-eye"/>
           <p:cNvSpPr txBox="1"/>
           <p:nvPr/>
         </p:nvSpPr>
         <p:spPr>
           <a:xfrm>
             <a:off x="420624" y="1472184"/>
+            <a:ext cx="947318" cy="91440"/>
+          </a:xfrm>
+          <a:prstGeom prst="rect">
+            <a:avLst/>
+          </a:prstGeom>
+          <a:noFill/>
+        </p:spPr>
+        <p:txBody>
+          <a:bodyPr wrap="square" lIns="0" tIns="0" rIns="0" bIns="0" anchor="t"/>
+          <a:lstStyle/>
+          <a:p>
+            <a:pPr algn="r" rtl="1">
+              <a:spcAft>
+                <a:spcPts val="0"/>
+              </a:spcAft>
+            </a:pPr>
+            <a:r>
+              <a:rPr lang="ar-SA" sz="420" b="0" dirty="0">
+                <a:solidFill>
+                  <a:srgbClr val="753BBD"/>
+                </a:solidFill>
+                <a:latin typeface="DiodrumArabic-Semibold"/>
+                <a:ea typeface="DiodrumArabic-Semibold"/>
+                <a:cs typeface="DiodrumArabic-Semibold"/>
+              </a:rPr>
+              <a:t>Brief Study</a:t>
+            </a:r>
+          </a:p>
+        </p:txBody>
+      </p:sp>
+      <p:sp>
+        <p:nvSpPr>
+          <p:cNvPr id="1711" name="def4-title"/>
+          <p:cNvSpPr txBox="1"/>
+          <p:nvPr/>
+        </p:nvSpPr>
+        <p:spPr>
+          <a:xfrm>
+            <a:off x="420624" y="1591056"/>
             <a:ext cx="947318" cy="146304"/>
           </a:xfrm>
           <a:prstGeom prst="rect">
@@ -31703,14 +34433,14 @@
       </p:sp>
       <p:sp>
         <p:nvSpPr>
-          <p:cNvPr id="1648" name="def4-body"/>
-          <p:cNvSpPr txBox="1"/>
-          <p:nvPr/>
-        </p:nvSpPr>
-        <p:spPr>
-          <a:xfrm>
-            <a:off x="420624" y="1609344"/>
-            <a:ext cx="947318" cy="694944"/>
+          <p:cNvPr id="1712" name="def4-body"/>
+          <p:cNvSpPr txBox="1"/>
+          <p:nvPr/>
+        </p:nvSpPr>
+        <p:spPr>
+          <a:xfrm>
+            <a:off x="420624" y="1728216"/>
+            <a:ext cx="947318" cy="667512"/>
           </a:xfrm>
           <a:prstGeom prst="rect">
             <a:avLst/>
@@ -31745,7 +34475,7 @@
       </p:sp>
       <p:sp>
         <p:nvSpPr>
-          <p:cNvPr id="1649" name="cb"/>
+          <p:cNvPr id="1713" name="cb"/>
           <p:cNvSpPr/>
           <p:nvPr/>
         </p:nvSpPr>
@@ -31809,7 +34539,7 @@
       </p:sp>
       <p:sp>
         <p:nvSpPr>
-          <p:cNvPr id="1650" name="cb-t"/>
+          <p:cNvPr id="1714" name="cb-t"/>
           <p:cNvSpPr txBox="1"/>
           <p:nvPr/>
         </p:nvSpPr>
@@ -31873,7 +34603,7 @@
       </p:grpSpPr>
       <p:sp>
         <p:nvSpPr>
-          <p:cNvPr id="1651" name="kicker"/>
+          <p:cNvPr id="1715" name="kicker"/>
           <p:cNvSpPr txBox="1"/>
           <p:nvPr/>
         </p:nvSpPr>
@@ -31912,7 +34642,7 @@
       </p:sp>
       <p:sp>
         <p:nvSpPr>
-          <p:cNvPr id="1652" name="title"/>
+          <p:cNvPr id="1716" name="title"/>
           <p:cNvSpPr txBox="1"/>
           <p:nvPr/>
         </p:nvSpPr>
@@ -31954,7 +34684,7 @@
       </p:sp>
       <p:sp>
         <p:nvSpPr>
-          <p:cNvPr id="1653" name="subtitle"/>
+          <p:cNvPr id="1717" name="subtitle"/>
           <p:cNvSpPr txBox="1"/>
           <p:nvPr/>
         </p:nvSpPr>
@@ -31996,7 +34726,7 @@
       </p:sp>
       <p:sp>
         <p:nvSpPr>
-          <p:cNvPr id="1654" name="Slide Number Placeholder"/>
+          <p:cNvPr id="1718" name="Slide Number Placeholder"/>
           <p:cNvSpPr>
             <a:spLocks noGrp="1"/>
           </p:cNvSpPr>
@@ -32021,7 +34751,7 @@
       </p:sp>
       <p:sp>
         <p:nvSpPr>
-          <p:cNvPr id="1655" name="spec"/>
+          <p:cNvPr id="1719" name="spec"/>
           <p:cNvSpPr/>
           <p:nvPr/>
         </p:nvSpPr>
@@ -32079,7 +34809,7 @@
       </p:sp>
       <p:cxnSp>
         <p:nvCxnSpPr>
-          <p:cNvPr id="1656" name="div0"/>
+          <p:cNvPr id="1720" name="div0"/>
           <p:cNvCxnSpPr/>
           <p:nvPr/>
         </p:nvCxnSpPr>
@@ -32100,7 +34830,7 @@
       </p:cxnSp>
       <p:sp>
         <p:nvSpPr>
-          <p:cNvPr id="1657" name="t0-dot"/>
+          <p:cNvPr id="1721" name="t0-dot"/>
           <p:cNvSpPr/>
           <p:nvPr/>
         </p:nvSpPr>
@@ -32149,7 +34879,7 @@
       </p:sp>
       <p:sp>
         <p:nvSpPr>
-          <p:cNvPr id="1658" name="t0-title"/>
+          <p:cNvPr id="1722" name="t0-title"/>
           <p:cNvSpPr txBox="1"/>
           <p:nvPr/>
         </p:nvSpPr>
@@ -32188,7 +34918,7 @@
       </p:sp>
       <p:sp>
         <p:nvSpPr>
-          <p:cNvPr id="1659" name="t0-body"/>
+          <p:cNvPr id="1723" name="t0-body"/>
           <p:cNvSpPr txBox="1"/>
           <p:nvPr/>
         </p:nvSpPr>
@@ -32230,7 +34960,7 @@
       </p:sp>
       <p:cxnSp>
         <p:nvCxnSpPr>
-          <p:cNvPr id="1660" name="div1"/>
+          <p:cNvPr id="1724" name="div1"/>
           <p:cNvCxnSpPr/>
           <p:nvPr/>
         </p:nvCxnSpPr>
@@ -32251,7 +34981,7 @@
       </p:cxnSp>
       <p:sp>
         <p:nvSpPr>
-          <p:cNvPr id="1661" name="t1-dot"/>
+          <p:cNvPr id="1725" name="t1-dot"/>
           <p:cNvSpPr/>
           <p:nvPr/>
         </p:nvSpPr>
@@ -32298,7 +35028,7 @@
       </p:sp>
       <p:sp>
         <p:nvSpPr>
-          <p:cNvPr id="1662" name="t1-title"/>
+          <p:cNvPr id="1726" name="t1-title"/>
           <p:cNvSpPr txBox="1"/>
           <p:nvPr/>
         </p:nvSpPr>
@@ -32337,7 +35067,7 @@
       </p:sp>
       <p:sp>
         <p:nvSpPr>
-          <p:cNvPr id="1663" name="t1-body"/>
+          <p:cNvPr id="1727" name="t1-body"/>
           <p:cNvSpPr txBox="1"/>
           <p:nvPr/>
         </p:nvSpPr>
@@ -32379,7 +35109,7 @@
       </p:sp>
       <p:sp>
         <p:nvSpPr>
-          <p:cNvPr id="1664" name="t2-dot"/>
+          <p:cNvPr id="1728" name="t2-dot"/>
           <p:cNvSpPr/>
           <p:nvPr/>
         </p:nvSpPr>
@@ -32426,7 +35156,7 @@
       </p:sp>
       <p:sp>
         <p:nvSpPr>
-          <p:cNvPr id="1665" name="t2-title"/>
+          <p:cNvPr id="1729" name="t2-title"/>
           <p:cNvSpPr txBox="1"/>
           <p:nvPr/>
         </p:nvSpPr>
@@ -32465,7 +35195,7 @@
       </p:sp>
       <p:sp>
         <p:nvSpPr>
-          <p:cNvPr id="1666" name="t2-body"/>
+          <p:cNvPr id="1730" name="t2-body"/>
           <p:cNvSpPr txBox="1"/>
           <p:nvPr/>
         </p:nvSpPr>
@@ -32507,7 +35237,7 @@
       </p:sp>
       <p:sp>
         <p:nvSpPr>
-          <p:cNvPr id="1667" name="note"/>
+          <p:cNvPr id="1731" name="note"/>
           <p:cNvSpPr txBox="1"/>
           <p:nvPr/>
         </p:nvSpPr>
@@ -32571,7 +35301,7 @@
       </p:grpSpPr>
       <p:sp>
         <p:nvSpPr>
-          <p:cNvPr id="1668" name="kicker"/>
+          <p:cNvPr id="1732" name="kicker"/>
           <p:cNvSpPr txBox="1"/>
           <p:nvPr/>
         </p:nvSpPr>
@@ -32610,7 +35340,7 @@
       </p:sp>
       <p:sp>
         <p:nvSpPr>
-          <p:cNvPr id="1669" name="title"/>
+          <p:cNvPr id="1733" name="title"/>
           <p:cNvSpPr txBox="1"/>
           <p:nvPr/>
         </p:nvSpPr>
@@ -32652,7 +35382,7 @@
       </p:sp>
       <p:sp>
         <p:nvSpPr>
-          <p:cNvPr id="1670" name="Slide Number Placeholder"/>
+          <p:cNvPr id="1734" name="Slide Number Placeholder"/>
           <p:cNvSpPr>
             <a:spLocks noGrp="1"/>
           </p:cNvSpPr>
@@ -32677,7 +35407,7 @@
       </p:sp>
       <p:sp>
         <p:nvSpPr>
-          <p:cNvPr id="1671" name="lbl"/>
+          <p:cNvPr id="1735" name="lbl"/>
           <p:cNvSpPr txBox="1"/>
           <p:nvPr/>
         </p:nvSpPr>
@@ -32716,7 +35446,7 @@
       </p:sp>
       <p:sp>
         <p:nvSpPr>
-          <p:cNvPr id="1672" name="ps0"/>
+          <p:cNvPr id="1736" name="ps0"/>
           <p:cNvSpPr/>
           <p:nvPr/>
         </p:nvSpPr>
@@ -32767,7 +35497,7 @@
       </p:sp>
       <p:sp>
         <p:nvSpPr>
-          <p:cNvPr id="1673" name="ps0-badge"/>
+          <p:cNvPr id="1737" name="ps0-badge"/>
           <p:cNvSpPr/>
           <p:nvPr/>
         </p:nvSpPr>
@@ -32814,7 +35544,7 @@
       </p:sp>
       <p:sp>
         <p:nvSpPr>
-          <p:cNvPr id="1674" name="ps0-badgenum"/>
+          <p:cNvPr id="1738" name="ps0-badgenum"/>
           <p:cNvSpPr txBox="1"/>
           <p:nvPr/>
         </p:nvSpPr>
@@ -32853,7 +35583,7 @@
       </p:sp>
       <p:sp>
         <p:nvSpPr>
-          <p:cNvPr id="1675" name="ps0-title"/>
+          <p:cNvPr id="1739" name="ps0-title"/>
           <p:cNvSpPr txBox="1"/>
           <p:nvPr/>
         </p:nvSpPr>
@@ -32895,7 +35625,7 @@
       </p:sp>
       <p:sp>
         <p:nvSpPr>
-          <p:cNvPr id="1676" name="ps0-chev"/>
+          <p:cNvPr id="1740" name="ps0-chev"/>
           <p:cNvSpPr/>
           <p:nvPr/>
         </p:nvSpPr>
@@ -32944,7 +35674,7 @@
       </p:sp>
       <p:sp>
         <p:nvSpPr>
-          <p:cNvPr id="1677" name="ps1"/>
+          <p:cNvPr id="1741" name="ps1"/>
           <p:cNvSpPr/>
           <p:nvPr/>
         </p:nvSpPr>
@@ -32995,7 +35725,7 @@
       </p:sp>
       <p:sp>
         <p:nvSpPr>
-          <p:cNvPr id="1678" name="ps1-badge"/>
+          <p:cNvPr id="1742" name="ps1-badge"/>
           <p:cNvSpPr/>
           <p:nvPr/>
         </p:nvSpPr>
@@ -33042,7 +35772,7 @@
       </p:sp>
       <p:sp>
         <p:nvSpPr>
-          <p:cNvPr id="1679" name="ps1-badgenum"/>
+          <p:cNvPr id="1743" name="ps1-badgenum"/>
           <p:cNvSpPr txBox="1"/>
           <p:nvPr/>
         </p:nvSpPr>
@@ -33081,7 +35811,7 @@
       </p:sp>
       <p:sp>
         <p:nvSpPr>
-          <p:cNvPr id="1680" name="ps1-title"/>
+          <p:cNvPr id="1744" name="ps1-title"/>
           <p:cNvSpPr txBox="1"/>
           <p:nvPr/>
         </p:nvSpPr>
@@ -33123,7 +35853,7 @@
       </p:sp>
       <p:sp>
         <p:nvSpPr>
-          <p:cNvPr id="1681" name="ps1-chev"/>
+          <p:cNvPr id="1745" name="ps1-chev"/>
           <p:cNvSpPr/>
           <p:nvPr/>
         </p:nvSpPr>
@@ -33172,7 +35902,7 @@
       </p:sp>
       <p:sp>
         <p:nvSpPr>
-          <p:cNvPr id="1682" name="ps2"/>
+          <p:cNvPr id="1746" name="ps2"/>
           <p:cNvSpPr/>
           <p:nvPr/>
         </p:nvSpPr>
@@ -33223,7 +35953,7 @@
       </p:sp>
       <p:sp>
         <p:nvSpPr>
-          <p:cNvPr id="1683" name="ps2-badge"/>
+          <p:cNvPr id="1747" name="ps2-badge"/>
           <p:cNvSpPr/>
           <p:nvPr/>
         </p:nvSpPr>
@@ -33270,7 +36000,7 @@
       </p:sp>
       <p:sp>
         <p:nvSpPr>
-          <p:cNvPr id="1684" name="ps2-badgenum"/>
+          <p:cNvPr id="1748" name="ps2-badgenum"/>
           <p:cNvSpPr txBox="1"/>
           <p:nvPr/>
         </p:nvSpPr>
@@ -33309,7 +36039,7 @@
       </p:sp>
       <p:sp>
         <p:nvSpPr>
-          <p:cNvPr id="1685" name="ps2-title"/>
+          <p:cNvPr id="1749" name="ps2-title"/>
           <p:cNvSpPr txBox="1"/>
           <p:nvPr/>
         </p:nvSpPr>
@@ -33351,7 +36081,7 @@
       </p:sp>
       <p:sp>
         <p:nvSpPr>
-          <p:cNvPr id="1686" name="ps2-chev"/>
+          <p:cNvPr id="1750" name="ps2-chev"/>
           <p:cNvSpPr/>
           <p:nvPr/>
         </p:nvSpPr>
@@ -33400,7 +36130,7 @@
       </p:sp>
       <p:sp>
         <p:nvSpPr>
-          <p:cNvPr id="1687" name="ps3"/>
+          <p:cNvPr id="1751" name="ps3"/>
           <p:cNvSpPr/>
           <p:nvPr/>
         </p:nvSpPr>
@@ -33451,7 +36181,7 @@
       </p:sp>
       <p:sp>
         <p:nvSpPr>
-          <p:cNvPr id="1688" name="ps3-badge"/>
+          <p:cNvPr id="1752" name="ps3-badge"/>
           <p:cNvSpPr/>
           <p:nvPr/>
         </p:nvSpPr>
@@ -33498,7 +36228,7 @@
       </p:sp>
       <p:sp>
         <p:nvSpPr>
-          <p:cNvPr id="1689" name="ps3-badgenum"/>
+          <p:cNvPr id="1753" name="ps3-badgenum"/>
           <p:cNvSpPr txBox="1"/>
           <p:nvPr/>
         </p:nvSpPr>
@@ -33537,7 +36267,7 @@
       </p:sp>
       <p:sp>
         <p:nvSpPr>
-          <p:cNvPr id="1690" name="ps3-title"/>
+          <p:cNvPr id="1754" name="ps3-title"/>
           <p:cNvSpPr txBox="1"/>
           <p:nvPr/>
         </p:nvSpPr>
@@ -33579,7 +36309,7 @@
       </p:sp>
       <p:sp>
         <p:nvSpPr>
-          <p:cNvPr id="1691" name="ps3-chev"/>
+          <p:cNvPr id="1755" name="ps3-chev"/>
           <p:cNvSpPr/>
           <p:nvPr/>
         </p:nvSpPr>
@@ -33628,7 +36358,7 @@
       </p:sp>
       <p:sp>
         <p:nvSpPr>
-          <p:cNvPr id="1692" name="ps4"/>
+          <p:cNvPr id="1756" name="ps4"/>
           <p:cNvSpPr/>
           <p:nvPr/>
         </p:nvSpPr>
@@ -33679,7 +36409,7 @@
       </p:sp>
       <p:sp>
         <p:nvSpPr>
-          <p:cNvPr id="1693" name="ps4-badge"/>
+          <p:cNvPr id="1757" name="ps4-badge"/>
           <p:cNvSpPr/>
           <p:nvPr/>
         </p:nvSpPr>
@@ -33726,7 +36456,7 @@
       </p:sp>
       <p:sp>
         <p:nvSpPr>
-          <p:cNvPr id="1694" name="ps4-badgenum"/>
+          <p:cNvPr id="1758" name="ps4-badgenum"/>
           <p:cNvSpPr txBox="1"/>
           <p:nvPr/>
         </p:nvSpPr>
@@ -33765,7 +36495,7 @@
       </p:sp>
       <p:sp>
         <p:nvSpPr>
-          <p:cNvPr id="1695" name="ps4-title"/>
+          <p:cNvPr id="1759" name="ps4-title"/>
           <p:cNvSpPr txBox="1"/>
           <p:nvPr/>
         </p:nvSpPr>
@@ -33807,7 +36537,7 @@
       </p:sp>
       <p:graphicFrame>
         <p:nvGraphicFramePr>
-          <p:cNvPr id="1696" name="tbl"/>
+          <p:cNvPr id="1760" name="tbl"/>
           <p:cNvGraphicFramePr/>
           <p:nvPr/>
         </p:nvGraphicFramePr>
@@ -33919,7 +36649,7 @@
                           <a:ea typeface="DiodrumArabic-Medium"/>
                           <a:cs typeface="DiodrumArabic-Medium"/>
                         </a:rPr>
-                        <a:t>TBD</a:t>
+                        <a:t>التواصل الأولي</a:t>
                       </a:r>
                     </a:p>
                   </a:txBody>
@@ -33944,7 +36674,7 @@
                           <a:ea typeface="DiodrumArabic-Medium"/>
                           <a:cs typeface="DiodrumArabic-Medium"/>
                         </a:rPr>
-                        <a:t>TBD</a:t>
+                        <a:t>الرصد والتحديد</a:t>
                       </a:r>
                     </a:p>
                   </a:txBody>
@@ -33969,7 +36699,7 @@
                           <a:ea typeface="DiodrumArabic-Medium"/>
                           <a:cs typeface="DiodrumArabic-Medium"/>
                         </a:rPr>
-                        <a:t>جهة 1</a:t>
+                        <a:t>جامعة الإمام محمد بن سعود الإسلامية</a:t>
                       </a:r>
                     </a:p>
                   </a:txBody>
@@ -33996,7 +36726,7 @@
                           <a:ea typeface="DiodrumArabic-Medium"/>
                           <a:cs typeface="DiodrumArabic-Medium"/>
                         </a:rPr>
-                        <a:t>TBD</a:t>
+                        <a:t>المواءمة والتفاوض</a:t>
                       </a:r>
                     </a:p>
                   </a:txBody>
@@ -34021,7 +36751,7 @@
                           <a:ea typeface="DiodrumArabic-Medium"/>
                           <a:cs typeface="DiodrumArabic-Medium"/>
                         </a:rPr>
-                        <a:t>TBD</a:t>
+                        <a:t>التواصل الأولي</a:t>
                       </a:r>
                     </a:p>
                   </a:txBody>
@@ -34046,7 +36776,7 @@
                           <a:ea typeface="DiodrumArabic-Medium"/>
                           <a:cs typeface="DiodrumArabic-Medium"/>
                         </a:rPr>
-                        <a:t>جهة 2</a:t>
+                        <a:t>جامعة الملك سعود</a:t>
                       </a:r>
                     </a:p>
                   </a:txBody>
@@ -34294,7 +37024,7 @@
       </p:graphicFrame>
       <p:sp>
         <p:nvSpPr>
-          <p:cNvPr id="1697" name="note"/>
+          <p:cNvPr id="1761" name="note"/>
           <p:cNvSpPr txBox="1"/>
           <p:nvPr/>
         </p:nvSpPr>

--- a/docs/presentations/research-incubator-initiative.pptx
+++ b/docs/presentations/research-incubator-initiative.pptx
@@ -144,14 +144,14 @@
   <p:extLst>
     <p:ext uri="{521415D9-36F7-43E2-AB2F-B90AF26B5E84}">
       <ns0:sectionLst xmlns:ns0="http://schemas.microsoft.com/office/powerpoint/2010/main">
-        <ns0:section name="Default Section" id="{8F762C06-98B4-4E8E-A27D-60C8A4334689}">
+        <ns0:section name="Default Section" id="{26AE289A-35DA-4CE3-8959-DBBC56DEA9DA}">
           <ns0:sldIdLst>
             <ns0:sldId id="350"/>
             <ns0:sldId id="351"/>
             <ns0:sldId id="352"/>
           </ns0:sldIdLst>
         </ns0:section>
-        <ns0:section name="القسم الأول: حاضنة الأبحاث" id="{5E977A6A-945B-491F-9F22-0ECE97280F8A}">
+        <ns0:section name="القسم الأول: حاضنة الأبحاث" id="{8E0DCF9C-05AC-4687-9C75-D33071168BCD}">
           <ns0:sldIdLst>
             <ns0:sldId id="353"/>
             <ns0:sldId id="354"/>
@@ -166,7 +166,7 @@
             <ns0:sldId id="363"/>
           </ns0:sldIdLst>
         </ns0:section>
-        <ns0:section name="القسم الثاني: ملتقى البحث والابتكار الحكومي" id="{B080CB8C-3C1C-4555-B643-BBC1F6E316BB}">
+        <ns0:section name="القسم الثاني: ملتقى البحث والابتكار الحكومي" id="{EB798F3C-7D5F-4688-8BAE-40D814914669}">
           <ns0:sldIdLst>
             <ns0:sldId id="364"/>
             <ns0:sldId id="365"/>
@@ -179,13 +179,13 @@
             <ns0:sldId id="372"/>
           </ns0:sldIdLst>
         </ns0:section>
-        <ns0:section name="القسم الثالث: القرار المطلوب" id="{7A6990B5-60CE-4444-B8ED-76CCE3959532}">
+        <ns0:section name="القسم الثالث: القرار المطلوب" id="{C4255B07-9565-4635-B8BA-25F274FA8BEF}">
           <ns0:sldIdLst>
             <ns0:sldId id="373"/>
             <ns0:sldId id="374"/>
           </ns0:sldIdLst>
         </ns0:section>
-        <ns0:section name="الملحق" id="{F65BE849-4F8F-4D87-87A0-F2A5BFCB0779}">
+        <ns0:section name="الملحق" id="{9AECEE73-9E93-4185-B8E7-A24CAA00BB54}">
           <ns0:sldIdLst>
             <ns0:sldId id="375"/>
             <ns0:sldId id="376"/>
@@ -7979,11 +7979,11 @@
         <p:spPr>
           <a:xfrm>
             <a:off x="5061204" y="1051560"/>
-            <a:ext cx="1495044" cy="1965960"/>
+            <a:ext cx="1495044" cy="1417320"/>
           </a:xfrm>
           <a:prstGeom prst="roundRect">
             <a:avLst>
-              <a:gd name="adj" fmla="val 2418"/>
+              <a:gd name="adj" fmla="val 3354"/>
             </a:avLst>
           </a:prstGeom>
           <a:solidFill>
@@ -8085,7 +8085,7 @@
         </p:nvSpPr>
         <p:spPr>
           <a:xfrm>
-            <a:off x="5180076" y="1197864"/>
+            <a:off x="5180076" y="1549908"/>
             <a:ext cx="1257300" cy="146304"/>
           </a:xfrm>
           <a:prstGeom prst="rect">
@@ -8127,8 +8127,8 @@
         </p:nvSpPr>
         <p:spPr>
           <a:xfrm>
-            <a:off x="5180076" y="1453896"/>
-            <a:ext cx="1257300" cy="1444752"/>
+            <a:off x="5180076" y="1805940"/>
+            <a:ext cx="1257300" cy="544068"/>
           </a:xfrm>
           <a:prstGeom prst="rect">
             <a:avLst/>
@@ -8170,11 +8170,11 @@
         <p:spPr>
           <a:xfrm>
             <a:off x="3474720" y="1051560"/>
-            <a:ext cx="1495044" cy="1965960"/>
+            <a:ext cx="1495044" cy="1417320"/>
           </a:xfrm>
           <a:prstGeom prst="roundRect">
             <a:avLst>
-              <a:gd name="adj" fmla="val 2418"/>
+              <a:gd name="adj" fmla="val 3354"/>
             </a:avLst>
           </a:prstGeom>
           <a:solidFill>
@@ -8276,7 +8276,7 @@
         </p:nvSpPr>
         <p:spPr>
           <a:xfrm>
-            <a:off x="3593592" y="1197864"/>
+            <a:off x="3593592" y="1549908"/>
             <a:ext cx="1257300" cy="146304"/>
           </a:xfrm>
           <a:prstGeom prst="rect">
@@ -8318,8 +8318,8 @@
         </p:nvSpPr>
         <p:spPr>
           <a:xfrm>
-            <a:off x="3593592" y="1453896"/>
-            <a:ext cx="1257300" cy="1444752"/>
+            <a:off x="3593592" y="1805940"/>
+            <a:ext cx="1257300" cy="544068"/>
           </a:xfrm>
           <a:prstGeom prst="rect">
             <a:avLst/>
@@ -8361,11 +8361,11 @@
         <p:spPr>
           <a:xfrm>
             <a:off x="1888236" y="1051560"/>
-            <a:ext cx="1495044" cy="1965960"/>
+            <a:ext cx="1495044" cy="1417320"/>
           </a:xfrm>
           <a:prstGeom prst="roundRect">
             <a:avLst>
-              <a:gd name="adj" fmla="val 2418"/>
+              <a:gd name="adj" fmla="val 3354"/>
             </a:avLst>
           </a:prstGeom>
           <a:solidFill>
@@ -8467,7 +8467,7 @@
         </p:nvSpPr>
         <p:spPr>
           <a:xfrm>
-            <a:off x="2007108" y="1197864"/>
+            <a:off x="2007108" y="1549908"/>
             <a:ext cx="1257300" cy="146304"/>
           </a:xfrm>
           <a:prstGeom prst="rect">
@@ -8509,8 +8509,8 @@
         </p:nvSpPr>
         <p:spPr>
           <a:xfrm>
-            <a:off x="2007108" y="1453896"/>
-            <a:ext cx="1257300" cy="1444752"/>
+            <a:off x="2007108" y="1805940"/>
+            <a:ext cx="1257300" cy="544068"/>
           </a:xfrm>
           <a:prstGeom prst="rect">
             <a:avLst/>
@@ -8552,11 +8552,11 @@
         <p:spPr>
           <a:xfrm>
             <a:off x="301752" y="1051560"/>
-            <a:ext cx="1495044" cy="1965960"/>
+            <a:ext cx="1495044" cy="1417320"/>
           </a:xfrm>
           <a:prstGeom prst="roundRect">
             <a:avLst>
-              <a:gd name="adj" fmla="val 2418"/>
+              <a:gd name="adj" fmla="val 3354"/>
             </a:avLst>
           </a:prstGeom>
           <a:solidFill>
@@ -8658,7 +8658,7 @@
         </p:nvSpPr>
         <p:spPr>
           <a:xfrm>
-            <a:off x="420624" y="1197864"/>
+            <a:off x="420624" y="1549908"/>
             <a:ext cx="1257300" cy="146304"/>
           </a:xfrm>
           <a:prstGeom prst="rect">
@@ -8700,8 +8700,8 @@
         </p:nvSpPr>
         <p:spPr>
           <a:xfrm>
-            <a:off x="420624" y="1453896"/>
-            <a:ext cx="1257300" cy="1444752"/>
+            <a:off x="420624" y="1805940"/>
+            <a:ext cx="1257300" cy="544068"/>
           </a:xfrm>
           <a:prstGeom prst="rect">
             <a:avLst/>
@@ -8742,8 +8742,8 @@
         </p:nvSpPr>
         <p:spPr>
           <a:xfrm>
-            <a:off x="301752" y="3246120"/>
-            <a:ext cx="6254496" cy="292608"/>
+            <a:off x="301752" y="2651760"/>
+            <a:ext cx="6254496" cy="310896"/>
           </a:xfrm>
           <a:prstGeom prst="roundRect">
             <a:avLst>
@@ -8806,8 +8806,8 @@
         </p:nvSpPr>
         <p:spPr>
           <a:xfrm>
-            <a:off x="484632" y="3246120"/>
-            <a:ext cx="5888736" cy="292608"/>
+            <a:off x="484632" y="2651760"/>
+            <a:ext cx="5888736" cy="310896"/>
           </a:xfrm>
           <a:prstGeom prst="rect">
             <a:avLst/>
@@ -10707,11 +10707,11 @@
         <p:spPr>
           <a:xfrm>
             <a:off x="4568952" y="1234440"/>
-            <a:ext cx="1987296" cy="1481328"/>
+            <a:ext cx="1987296" cy="1417320"/>
           </a:xfrm>
           <a:prstGeom prst="roundRect">
             <a:avLst>
-              <a:gd name="adj" fmla="val 3209"/>
+              <a:gd name="adj" fmla="val 3354"/>
             </a:avLst>
           </a:prstGeom>
           <a:solidFill>
@@ -10852,7 +10852,7 @@
         </p:nvSpPr>
         <p:spPr>
           <a:xfrm>
-            <a:off x="4696968" y="1581912"/>
+            <a:off x="4696968" y="1604772"/>
             <a:ext cx="1731264" cy="164592"/>
           </a:xfrm>
           <a:prstGeom prst="roundRect">
@@ -10901,7 +10901,7 @@
         </p:nvSpPr>
         <p:spPr>
           <a:xfrm>
-            <a:off x="4696968" y="1581912"/>
+            <a:off x="4696968" y="1604772"/>
             <a:ext cx="1731264" cy="164592"/>
           </a:xfrm>
           <a:prstGeom prst="rect">
@@ -10940,7 +10940,7 @@
         </p:nvSpPr>
         <p:spPr>
           <a:xfrm>
-            <a:off x="4696968" y="1801368"/>
+            <a:off x="4696968" y="1824228"/>
             <a:ext cx="1731264" cy="164592"/>
           </a:xfrm>
           <a:prstGeom prst="roundRect">
@@ -10989,7 +10989,7 @@
         </p:nvSpPr>
         <p:spPr>
           <a:xfrm>
-            <a:off x="4696968" y="1801368"/>
+            <a:off x="4696968" y="1824228"/>
             <a:ext cx="1731264" cy="164592"/>
           </a:xfrm>
           <a:prstGeom prst="rect">
@@ -11028,7 +11028,7 @@
         </p:nvSpPr>
         <p:spPr>
           <a:xfrm>
-            <a:off x="4696968" y="2020824"/>
+            <a:off x="4696968" y="2043684"/>
             <a:ext cx="1731264" cy="164592"/>
           </a:xfrm>
           <a:prstGeom prst="roundRect">
@@ -11077,7 +11077,7 @@
         </p:nvSpPr>
         <p:spPr>
           <a:xfrm>
-            <a:off x="4696968" y="2020824"/>
+            <a:off x="4696968" y="2043684"/>
             <a:ext cx="1731264" cy="164592"/>
           </a:xfrm>
           <a:prstGeom prst="rect">
@@ -11116,7 +11116,7 @@
         </p:nvSpPr>
         <p:spPr>
           <a:xfrm>
-            <a:off x="4696968" y="2240280"/>
+            <a:off x="4696968" y="2263140"/>
             <a:ext cx="1731264" cy="164592"/>
           </a:xfrm>
           <a:prstGeom prst="roundRect">
@@ -11165,7 +11165,7 @@
         </p:nvSpPr>
         <p:spPr>
           <a:xfrm>
-            <a:off x="4696968" y="2240280"/>
+            <a:off x="4696968" y="2263140"/>
             <a:ext cx="1731264" cy="164592"/>
           </a:xfrm>
           <a:prstGeom prst="rect">
@@ -11205,11 +11205,11 @@
         <p:spPr>
           <a:xfrm>
             <a:off x="2435352" y="1234440"/>
-            <a:ext cx="1987296" cy="1481328"/>
+            <a:ext cx="1987296" cy="1417320"/>
           </a:xfrm>
           <a:prstGeom prst="roundRect">
             <a:avLst>
-              <a:gd name="adj" fmla="val 3209"/>
+              <a:gd name="adj" fmla="val 3354"/>
             </a:avLst>
           </a:prstGeom>
           <a:solidFill>
@@ -11350,7 +11350,7 @@
         </p:nvSpPr>
         <p:spPr>
           <a:xfrm>
-            <a:off x="2563368" y="1581912"/>
+            <a:off x="2563368" y="1714500"/>
             <a:ext cx="1731264" cy="164592"/>
           </a:xfrm>
           <a:prstGeom prst="roundRect">
@@ -11399,7 +11399,7 @@
         </p:nvSpPr>
         <p:spPr>
           <a:xfrm>
-            <a:off x="2563368" y="1581912"/>
+            <a:off x="2563368" y="1714500"/>
             <a:ext cx="1731264" cy="164592"/>
           </a:xfrm>
           <a:prstGeom prst="rect">
@@ -11438,7 +11438,7 @@
         </p:nvSpPr>
         <p:spPr>
           <a:xfrm>
-            <a:off x="2563368" y="1801368"/>
+            <a:off x="2563368" y="1933956"/>
             <a:ext cx="1731264" cy="164592"/>
           </a:xfrm>
           <a:prstGeom prst="roundRect">
@@ -11487,7 +11487,7 @@
         </p:nvSpPr>
         <p:spPr>
           <a:xfrm>
-            <a:off x="2563368" y="1801368"/>
+            <a:off x="2563368" y="1933956"/>
             <a:ext cx="1731264" cy="164592"/>
           </a:xfrm>
           <a:prstGeom prst="rect">
@@ -11526,7 +11526,7 @@
         </p:nvSpPr>
         <p:spPr>
           <a:xfrm>
-            <a:off x="2563368" y="2020824"/>
+            <a:off x="2563368" y="2153412"/>
             <a:ext cx="1731264" cy="164592"/>
           </a:xfrm>
           <a:prstGeom prst="roundRect">
@@ -11575,7 +11575,7 @@
         </p:nvSpPr>
         <p:spPr>
           <a:xfrm>
-            <a:off x="2563368" y="2020824"/>
+            <a:off x="2563368" y="2153412"/>
             <a:ext cx="1731264" cy="164592"/>
           </a:xfrm>
           <a:prstGeom prst="rect">
@@ -11615,11 +11615,11 @@
         <p:spPr>
           <a:xfrm>
             <a:off x="301752" y="1234440"/>
-            <a:ext cx="1987296" cy="1481328"/>
+            <a:ext cx="1987296" cy="1417320"/>
           </a:xfrm>
           <a:prstGeom prst="roundRect">
             <a:avLst>
-              <a:gd name="adj" fmla="val 3209"/>
+              <a:gd name="adj" fmla="val 3354"/>
             </a:avLst>
           </a:prstGeom>
           <a:solidFill>
@@ -11760,7 +11760,7 @@
         </p:nvSpPr>
         <p:spPr>
           <a:xfrm>
-            <a:off x="429768" y="1581912"/>
+            <a:off x="429768" y="1824228"/>
             <a:ext cx="1731264" cy="164592"/>
           </a:xfrm>
           <a:prstGeom prst="roundRect">
@@ -11809,7 +11809,7 @@
         </p:nvSpPr>
         <p:spPr>
           <a:xfrm>
-            <a:off x="429768" y="1581912"/>
+            <a:off x="429768" y="1824228"/>
             <a:ext cx="1731264" cy="164592"/>
           </a:xfrm>
           <a:prstGeom prst="rect">
@@ -11848,7 +11848,7 @@
         </p:nvSpPr>
         <p:spPr>
           <a:xfrm>
-            <a:off x="429768" y="1801368"/>
+            <a:off x="429768" y="2043684"/>
             <a:ext cx="1731264" cy="164592"/>
           </a:xfrm>
           <a:prstGeom prst="roundRect">
@@ -11897,7 +11897,7 @@
         </p:nvSpPr>
         <p:spPr>
           <a:xfrm>
-            <a:off x="429768" y="1801368"/>
+            <a:off x="429768" y="2043684"/>
             <a:ext cx="1731264" cy="164592"/>
           </a:xfrm>
           <a:prstGeom prst="rect">
@@ -11936,8 +11936,8 @@
         </p:nvSpPr>
         <p:spPr>
           <a:xfrm>
-            <a:off x="301752" y="3337560"/>
-            <a:ext cx="6254496" cy="274320"/>
+            <a:off x="301752" y="2880360"/>
+            <a:ext cx="6254496" cy="292608"/>
           </a:xfrm>
           <a:prstGeom prst="roundRect">
             <a:avLst>
@@ -12000,8 +12000,8 @@
         </p:nvSpPr>
         <p:spPr>
           <a:xfrm>
-            <a:off x="484632" y="3337560"/>
-            <a:ext cx="5888736" cy="274320"/>
+            <a:off x="484632" y="2880360"/>
+            <a:ext cx="5888736" cy="292608"/>
           </a:xfrm>
           <a:prstGeom prst="rect">
             <a:avLst/>
@@ -14526,7 +14526,7 @@
         </p:nvCxnSpPr>
         <p:spPr>
           <a:xfrm flipV="0">
-            <a:off x="301752" y="1874520"/>
+            <a:off x="301752" y="1554480"/>
             <a:ext cx="6254496" cy="914"/>
           </a:xfrm>
           <a:prstGeom prst="line">
@@ -14547,7 +14547,7 @@
         </p:nvSpPr>
         <p:spPr>
           <a:xfrm>
-            <a:off x="5445252" y="1805940"/>
+            <a:off x="5445252" y="1485900"/>
             <a:ext cx="137160" cy="137160"/>
           </a:xfrm>
           <a:prstGeom prst="ellipse">
@@ -14596,7 +14596,7 @@
         </p:nvSpPr>
         <p:spPr>
           <a:xfrm>
-            <a:off x="5479542" y="1840230"/>
+            <a:off x="5479542" y="1520190"/>
             <a:ext cx="68580" cy="68580"/>
           </a:xfrm>
           <a:prstGeom prst="ellipse">
@@ -14643,7 +14643,7 @@
         </p:nvSpPr>
         <p:spPr>
           <a:xfrm>
-            <a:off x="4517136" y="1490472"/>
+            <a:off x="4517136" y="1170432"/>
             <a:ext cx="1993392" cy="201168"/>
           </a:xfrm>
           <a:prstGeom prst="rect">
@@ -14682,7 +14682,7 @@
         </p:nvSpPr>
         <p:spPr>
           <a:xfrm>
-            <a:off x="4517136" y="2002536"/>
+            <a:off x="4517136" y="1682496"/>
             <a:ext cx="1993392" cy="137160"/>
           </a:xfrm>
           <a:prstGeom prst="rect">
@@ -14721,7 +14721,7 @@
         </p:nvSpPr>
         <p:spPr>
           <a:xfrm>
-            <a:off x="4517136" y="2148840"/>
+            <a:off x="4517136" y="1828800"/>
             <a:ext cx="1993392" cy="457200"/>
           </a:xfrm>
           <a:prstGeom prst="rect">
@@ -14763,7 +14763,7 @@
         </p:nvSpPr>
         <p:spPr>
           <a:xfrm>
-            <a:off x="3360420" y="1805940"/>
+            <a:off x="3360420" y="1485900"/>
             <a:ext cx="137160" cy="137160"/>
           </a:xfrm>
           <a:prstGeom prst="ellipse">
@@ -14812,7 +14812,7 @@
         </p:nvSpPr>
         <p:spPr>
           <a:xfrm>
-            <a:off x="3394710" y="1840230"/>
+            <a:off x="3394710" y="1520190"/>
             <a:ext cx="68580" cy="68580"/>
           </a:xfrm>
           <a:prstGeom prst="ellipse">
@@ -14859,7 +14859,7 @@
         </p:nvSpPr>
         <p:spPr>
           <a:xfrm>
-            <a:off x="2432304" y="1490472"/>
+            <a:off x="2432304" y="1170432"/>
             <a:ext cx="1993392" cy="201168"/>
           </a:xfrm>
           <a:prstGeom prst="rect">
@@ -14898,7 +14898,7 @@
         </p:nvSpPr>
         <p:spPr>
           <a:xfrm>
-            <a:off x="2432304" y="2002536"/>
+            <a:off x="2432304" y="1682496"/>
             <a:ext cx="1993392" cy="137160"/>
           </a:xfrm>
           <a:prstGeom prst="rect">
@@ -14937,7 +14937,7 @@
         </p:nvSpPr>
         <p:spPr>
           <a:xfrm>
-            <a:off x="2432304" y="2148840"/>
+            <a:off x="2432304" y="1828800"/>
             <a:ext cx="1993392" cy="457200"/>
           </a:xfrm>
           <a:prstGeom prst="rect">
@@ -14979,7 +14979,7 @@
         </p:nvSpPr>
         <p:spPr>
           <a:xfrm>
-            <a:off x="1275588" y="1805940"/>
+            <a:off x="1275588" y="1485900"/>
             <a:ext cx="137160" cy="137160"/>
           </a:xfrm>
           <a:prstGeom prst="ellipse">
@@ -15028,7 +15028,7 @@
         </p:nvSpPr>
         <p:spPr>
           <a:xfrm>
-            <a:off x="1309878" y="1840230"/>
+            <a:off x="1309878" y="1520190"/>
             <a:ext cx="68580" cy="68580"/>
           </a:xfrm>
           <a:prstGeom prst="ellipse">
@@ -15075,7 +15075,7 @@
         </p:nvSpPr>
         <p:spPr>
           <a:xfrm>
-            <a:off x="347472" y="1490472"/>
+            <a:off x="347472" y="1170432"/>
             <a:ext cx="1993392" cy="201168"/>
           </a:xfrm>
           <a:prstGeom prst="rect">
@@ -15114,7 +15114,7 @@
         </p:nvSpPr>
         <p:spPr>
           <a:xfrm>
-            <a:off x="347472" y="2002536"/>
+            <a:off x="347472" y="1682496"/>
             <a:ext cx="1993392" cy="137160"/>
           </a:xfrm>
           <a:prstGeom prst="rect">
@@ -15153,7 +15153,7 @@
         </p:nvSpPr>
         <p:spPr>
           <a:xfrm>
-            <a:off x="347472" y="2148840"/>
+            <a:off x="347472" y="1828800"/>
             <a:ext cx="1993392" cy="457200"/>
           </a:xfrm>
           <a:prstGeom prst="rect">
@@ -15195,8 +15195,8 @@
         </p:nvSpPr>
         <p:spPr>
           <a:xfrm>
-            <a:off x="301752" y="3337560"/>
-            <a:ext cx="6254496" cy="274320"/>
+            <a:off x="301752" y="2697480"/>
+            <a:ext cx="6254496" cy="310896"/>
           </a:xfrm>
           <a:prstGeom prst="roundRect">
             <a:avLst>
@@ -15259,8 +15259,8 @@
         </p:nvSpPr>
         <p:spPr>
           <a:xfrm>
-            <a:off x="484632" y="3337560"/>
-            <a:ext cx="5888736" cy="274320"/>
+            <a:off x="484632" y="2697480"/>
+            <a:ext cx="5888736" cy="310896"/>
           </a:xfrm>
           <a:prstGeom prst="rect">
             <a:avLst/>
@@ -17044,11 +17044,11 @@
         <p:spPr>
           <a:xfrm>
             <a:off x="5061204" y="1508760"/>
-            <a:ext cx="1495044" cy="1143000"/>
+            <a:ext cx="1495044" cy="1325880"/>
           </a:xfrm>
           <a:prstGeom prst="roundRect">
             <a:avLst>
-              <a:gd name="adj" fmla="val 4160"/>
+              <a:gd name="adj" fmla="val 3586"/>
             </a:avLst>
           </a:prstGeom>
           <a:solidFill>
@@ -17150,7 +17150,7 @@
         </p:nvSpPr>
         <p:spPr>
           <a:xfrm>
-            <a:off x="5180076" y="1655064"/>
+            <a:off x="5180076" y="2007108"/>
             <a:ext cx="1257300" cy="146304"/>
           </a:xfrm>
           <a:prstGeom prst="rect">
@@ -17192,8 +17192,8 @@
         </p:nvSpPr>
         <p:spPr>
           <a:xfrm>
-            <a:off x="5180076" y="1911096"/>
-            <a:ext cx="1257300" cy="621792"/>
+            <a:off x="5180076" y="2263140"/>
+            <a:ext cx="1257300" cy="452628"/>
           </a:xfrm>
           <a:prstGeom prst="rect">
             <a:avLst/>
@@ -17235,11 +17235,11 @@
         <p:spPr>
           <a:xfrm>
             <a:off x="3474720" y="1508760"/>
-            <a:ext cx="1495044" cy="1143000"/>
+            <a:ext cx="1495044" cy="1325880"/>
           </a:xfrm>
           <a:prstGeom prst="roundRect">
             <a:avLst>
-              <a:gd name="adj" fmla="val 4160"/>
+              <a:gd name="adj" fmla="val 3586"/>
             </a:avLst>
           </a:prstGeom>
           <a:solidFill>
@@ -17341,7 +17341,7 @@
         </p:nvSpPr>
         <p:spPr>
           <a:xfrm>
-            <a:off x="3593592" y="1655064"/>
+            <a:off x="3593592" y="2007108"/>
             <a:ext cx="1257300" cy="146304"/>
           </a:xfrm>
           <a:prstGeom prst="rect">
@@ -17383,8 +17383,8 @@
         </p:nvSpPr>
         <p:spPr>
           <a:xfrm>
-            <a:off x="3593592" y="1792224"/>
-            <a:ext cx="1257300" cy="740664"/>
+            <a:off x="3593592" y="2144268"/>
+            <a:ext cx="1257300" cy="571500"/>
           </a:xfrm>
           <a:prstGeom prst="rect">
             <a:avLst/>
@@ -17426,11 +17426,11 @@
         <p:spPr>
           <a:xfrm>
             <a:off x="1888236" y="1508760"/>
-            <a:ext cx="1495044" cy="1143000"/>
+            <a:ext cx="1495044" cy="1325880"/>
           </a:xfrm>
           <a:prstGeom prst="roundRect">
             <a:avLst>
-              <a:gd name="adj" fmla="val 4160"/>
+              <a:gd name="adj" fmla="val 3586"/>
             </a:avLst>
           </a:prstGeom>
           <a:solidFill>
@@ -17532,7 +17532,7 @@
         </p:nvSpPr>
         <p:spPr>
           <a:xfrm>
-            <a:off x="2007108" y="1655064"/>
+            <a:off x="2007108" y="2007108"/>
             <a:ext cx="1257300" cy="146304"/>
           </a:xfrm>
           <a:prstGeom prst="rect">
@@ -17574,8 +17574,8 @@
         </p:nvSpPr>
         <p:spPr>
           <a:xfrm>
-            <a:off x="2007108" y="1911096"/>
-            <a:ext cx="1257300" cy="621792"/>
+            <a:off x="2007108" y="2263140"/>
+            <a:ext cx="1257300" cy="452628"/>
           </a:xfrm>
           <a:prstGeom prst="rect">
             <a:avLst/>
@@ -17617,11 +17617,11 @@
         <p:spPr>
           <a:xfrm>
             <a:off x="301752" y="1508760"/>
-            <a:ext cx="1495044" cy="1143000"/>
+            <a:ext cx="1495044" cy="1325880"/>
           </a:xfrm>
           <a:prstGeom prst="roundRect">
             <a:avLst>
-              <a:gd name="adj" fmla="val 4160"/>
+              <a:gd name="adj" fmla="val 3586"/>
             </a:avLst>
           </a:prstGeom>
           <a:solidFill>
@@ -17723,7 +17723,7 @@
         </p:nvSpPr>
         <p:spPr>
           <a:xfrm>
-            <a:off x="420624" y="1655064"/>
+            <a:off x="420624" y="2007108"/>
             <a:ext cx="1257300" cy="146304"/>
           </a:xfrm>
           <a:prstGeom prst="rect">
@@ -17765,8 +17765,8 @@
         </p:nvSpPr>
         <p:spPr>
           <a:xfrm>
-            <a:off x="420624" y="1911096"/>
-            <a:ext cx="1257300" cy="621792"/>
+            <a:off x="420624" y="2263140"/>
+            <a:ext cx="1257300" cy="452628"/>
           </a:xfrm>
           <a:prstGeom prst="rect">
             <a:avLst/>
@@ -17807,8 +17807,8 @@
         </p:nvSpPr>
         <p:spPr>
           <a:xfrm>
-            <a:off x="301752" y="2834640"/>
-            <a:ext cx="6254496" cy="292608"/>
+            <a:off x="301752" y="2971800"/>
+            <a:ext cx="6254496" cy="310896"/>
           </a:xfrm>
           <a:prstGeom prst="roundRect">
             <a:avLst>
@@ -17871,8 +17871,8 @@
         </p:nvSpPr>
         <p:spPr>
           <a:xfrm>
-            <a:off x="484632" y="2834640"/>
-            <a:ext cx="5888736" cy="292608"/>
+            <a:off x="484632" y="2971800"/>
+            <a:ext cx="5888736" cy="310896"/>
           </a:xfrm>
           <a:prstGeom prst="rect">
             <a:avLst/>
@@ -18491,7 +18491,7 @@
                 <a:ea typeface="DiodrumArabic-Bold"/>
                 <a:cs typeface="DiodrumArabic-Bold"/>
               </a:rPr>
-              <a:t>150-100</a:t>
+              <a:t>100-150</a:t>
             </a:r>
           </a:p>
         </p:txBody>
@@ -18753,11 +18753,11 @@
         <p:spPr>
           <a:xfrm>
             <a:off x="5061204" y="1417320"/>
-            <a:ext cx="1495044" cy="1417320"/>
+            <a:ext cx="1495044" cy="1554480"/>
           </a:xfrm>
           <a:prstGeom prst="roundRect">
             <a:avLst>
-              <a:gd name="adj" fmla="val 3354"/>
+              <a:gd name="adj" fmla="val 3058"/>
             </a:avLst>
           </a:prstGeom>
           <a:gradFill>
@@ -18859,7 +18859,7 @@
         <p:spPr>
           <a:xfrm>
             <a:off x="5180076" y="1719072"/>
-            <a:ext cx="1257300" cy="996696"/>
+            <a:ext cx="1257300" cy="1133856"/>
           </a:xfrm>
           <a:prstGeom prst="rect">
             <a:avLst/>
@@ -18901,11 +18901,11 @@
         <p:spPr>
           <a:xfrm>
             <a:off x="3474720" y="1417320"/>
-            <a:ext cx="1495044" cy="1417320"/>
+            <a:ext cx="1495044" cy="1554480"/>
           </a:xfrm>
           <a:prstGeom prst="roundRect">
             <a:avLst>
-              <a:gd name="adj" fmla="val 3354"/>
+              <a:gd name="adj" fmla="val 3058"/>
             </a:avLst>
           </a:prstGeom>
           <a:solidFill>
@@ -19007,7 +19007,7 @@
         </p:nvSpPr>
         <p:spPr>
           <a:xfrm>
-            <a:off x="3593592" y="1563624"/>
+            <a:off x="3593592" y="2020824"/>
             <a:ext cx="1257300" cy="146304"/>
           </a:xfrm>
           <a:prstGeom prst="rect">
@@ -19049,8 +19049,8 @@
         </p:nvSpPr>
         <p:spPr>
           <a:xfrm>
-            <a:off x="3593592" y="1700784"/>
-            <a:ext cx="1257300" cy="1014984"/>
+            <a:off x="3593592" y="2157984"/>
+            <a:ext cx="1257300" cy="694944"/>
           </a:xfrm>
           <a:prstGeom prst="rect">
             <a:avLst/>
@@ -19092,11 +19092,11 @@
         <p:spPr>
           <a:xfrm>
             <a:off x="1888236" y="1417320"/>
-            <a:ext cx="1495044" cy="1417320"/>
+            <a:ext cx="1495044" cy="1554480"/>
           </a:xfrm>
           <a:prstGeom prst="roundRect">
             <a:avLst>
-              <a:gd name="adj" fmla="val 3354"/>
+              <a:gd name="adj" fmla="val 3058"/>
             </a:avLst>
           </a:prstGeom>
           <a:solidFill>
@@ -19198,7 +19198,7 @@
         </p:nvSpPr>
         <p:spPr>
           <a:xfrm>
-            <a:off x="2007108" y="1563624"/>
+            <a:off x="2007108" y="2020824"/>
             <a:ext cx="1257300" cy="146304"/>
           </a:xfrm>
           <a:prstGeom prst="rect">
@@ -19240,8 +19240,8 @@
         </p:nvSpPr>
         <p:spPr>
           <a:xfrm>
-            <a:off x="2007108" y="1700784"/>
-            <a:ext cx="1257300" cy="1014984"/>
+            <a:off x="2007108" y="2157984"/>
+            <a:ext cx="1257300" cy="694944"/>
           </a:xfrm>
           <a:prstGeom prst="rect">
             <a:avLst/>
@@ -19283,11 +19283,11 @@
         <p:spPr>
           <a:xfrm>
             <a:off x="301752" y="1417320"/>
-            <a:ext cx="1495044" cy="1417320"/>
+            <a:ext cx="1495044" cy="1554480"/>
           </a:xfrm>
           <a:prstGeom prst="roundRect">
             <a:avLst>
-              <a:gd name="adj" fmla="val 3354"/>
+              <a:gd name="adj" fmla="val 3058"/>
             </a:avLst>
           </a:prstGeom>
           <a:solidFill>
@@ -19389,7 +19389,7 @@
         </p:nvSpPr>
         <p:spPr>
           <a:xfrm>
-            <a:off x="420624" y="1563624"/>
+            <a:off x="420624" y="2020824"/>
             <a:ext cx="1257300" cy="146304"/>
           </a:xfrm>
           <a:prstGeom prst="rect">
@@ -19431,8 +19431,8 @@
         </p:nvSpPr>
         <p:spPr>
           <a:xfrm>
-            <a:off x="420624" y="1700784"/>
-            <a:ext cx="1257300" cy="1014984"/>
+            <a:off x="420624" y="2157984"/>
+            <a:ext cx="1257300" cy="694944"/>
           </a:xfrm>
           <a:prstGeom prst="rect">
             <a:avLst/>
@@ -19473,8 +19473,8 @@
         </p:nvSpPr>
         <p:spPr>
           <a:xfrm>
-            <a:off x="301752" y="2999232"/>
-            <a:ext cx="6254496" cy="274320"/>
+            <a:off x="301752" y="3136392"/>
+            <a:ext cx="6254496" cy="292608"/>
           </a:xfrm>
           <a:prstGeom prst="roundRect">
             <a:avLst>
@@ -19537,8 +19537,8 @@
         </p:nvSpPr>
         <p:spPr>
           <a:xfrm>
-            <a:off x="484632" y="2999232"/>
-            <a:ext cx="5888736" cy="274320"/>
+            <a:off x="484632" y="3136392"/>
+            <a:ext cx="5888736" cy="292608"/>
           </a:xfrm>
           <a:prstGeom prst="rect">
             <a:avLst/>
@@ -21673,11 +21673,11 @@
         <p:spPr>
           <a:xfrm>
             <a:off x="5061204" y="1417320"/>
-            <a:ext cx="1495044" cy="1188720"/>
+            <a:ext cx="1495044" cy="1371600"/>
           </a:xfrm>
           <a:prstGeom prst="roundRect">
             <a:avLst>
-              <a:gd name="adj" fmla="val 4000"/>
+              <a:gd name="adj" fmla="val 3466"/>
             </a:avLst>
           </a:prstGeom>
           <a:solidFill>
@@ -21779,7 +21779,7 @@
         </p:nvSpPr>
         <p:spPr>
           <a:xfrm>
-            <a:off x="5180076" y="1563624"/>
+            <a:off x="5180076" y="1938528"/>
             <a:ext cx="1257300" cy="146304"/>
           </a:xfrm>
           <a:prstGeom prst="rect">
@@ -21821,8 +21821,8 @@
         </p:nvSpPr>
         <p:spPr>
           <a:xfrm>
-            <a:off x="5180076" y="1700784"/>
-            <a:ext cx="1257300" cy="786384"/>
+            <a:off x="5180076" y="2075688"/>
+            <a:ext cx="1257300" cy="594360"/>
           </a:xfrm>
           <a:prstGeom prst="rect">
             <a:avLst/>
@@ -21864,11 +21864,11 @@
         <p:spPr>
           <a:xfrm>
             <a:off x="3474720" y="1417320"/>
-            <a:ext cx="1495044" cy="1188720"/>
+            <a:ext cx="1495044" cy="1371600"/>
           </a:xfrm>
           <a:prstGeom prst="roundRect">
             <a:avLst>
-              <a:gd name="adj" fmla="val 4000"/>
+              <a:gd name="adj" fmla="val 3466"/>
             </a:avLst>
           </a:prstGeom>
           <a:solidFill>
@@ -21970,7 +21970,7 @@
         </p:nvSpPr>
         <p:spPr>
           <a:xfrm>
-            <a:off x="3593592" y="1563624"/>
+            <a:off x="3593592" y="1938528"/>
             <a:ext cx="1257300" cy="146304"/>
           </a:xfrm>
           <a:prstGeom prst="rect">
@@ -22012,8 +22012,8 @@
         </p:nvSpPr>
         <p:spPr>
           <a:xfrm>
-            <a:off x="3593592" y="1700784"/>
-            <a:ext cx="1257300" cy="786384"/>
+            <a:off x="3593592" y="2075688"/>
+            <a:ext cx="1257300" cy="594360"/>
           </a:xfrm>
           <a:prstGeom prst="rect">
             <a:avLst/>
@@ -22055,11 +22055,11 @@
         <p:spPr>
           <a:xfrm>
             <a:off x="1888236" y="1417320"/>
-            <a:ext cx="1495044" cy="1188720"/>
+            <a:ext cx="1495044" cy="1371600"/>
           </a:xfrm>
           <a:prstGeom prst="roundRect">
             <a:avLst>
-              <a:gd name="adj" fmla="val 4000"/>
+              <a:gd name="adj" fmla="val 3466"/>
             </a:avLst>
           </a:prstGeom>
           <a:solidFill>
@@ -22161,7 +22161,7 @@
         </p:nvSpPr>
         <p:spPr>
           <a:xfrm>
-            <a:off x="2007108" y="1563624"/>
+            <a:off x="2007108" y="1938528"/>
             <a:ext cx="1257300" cy="146304"/>
           </a:xfrm>
           <a:prstGeom prst="rect">
@@ -22203,8 +22203,8 @@
         </p:nvSpPr>
         <p:spPr>
           <a:xfrm>
-            <a:off x="2007108" y="1700784"/>
-            <a:ext cx="1257300" cy="786384"/>
+            <a:off x="2007108" y="2075688"/>
+            <a:ext cx="1257300" cy="594360"/>
           </a:xfrm>
           <a:prstGeom prst="rect">
             <a:avLst/>
@@ -22246,11 +22246,11 @@
         <p:spPr>
           <a:xfrm>
             <a:off x="301752" y="1417320"/>
-            <a:ext cx="1495044" cy="1188720"/>
+            <a:ext cx="1495044" cy="1371600"/>
           </a:xfrm>
           <a:prstGeom prst="roundRect">
             <a:avLst>
-              <a:gd name="adj" fmla="val 4000"/>
+              <a:gd name="adj" fmla="val 3466"/>
             </a:avLst>
           </a:prstGeom>
           <a:solidFill>
@@ -22352,7 +22352,7 @@
         </p:nvSpPr>
         <p:spPr>
           <a:xfrm>
-            <a:off x="420624" y="1563624"/>
+            <a:off x="420624" y="1938528"/>
             <a:ext cx="1257300" cy="146304"/>
           </a:xfrm>
           <a:prstGeom prst="rect">
@@ -22394,8 +22394,8 @@
         </p:nvSpPr>
         <p:spPr>
           <a:xfrm>
-            <a:off x="420624" y="1700784"/>
-            <a:ext cx="1257300" cy="786384"/>
+            <a:off x="420624" y="2075688"/>
+            <a:ext cx="1257300" cy="594360"/>
           </a:xfrm>
           <a:prstGeom prst="rect">
             <a:avLst/>
@@ -22436,7 +22436,7 @@
         </p:nvSpPr>
         <p:spPr>
           <a:xfrm>
-            <a:off x="301752" y="2788920"/>
+            <a:off x="301752" y="2971800"/>
             <a:ext cx="6254496" cy="292608"/>
           </a:xfrm>
           <a:prstGeom prst="roundRect">
@@ -22500,7 +22500,7 @@
         </p:nvSpPr>
         <p:spPr>
           <a:xfrm>
-            <a:off x="484632" y="2788920"/>
+            <a:off x="484632" y="2971800"/>
             <a:ext cx="5888736" cy="292608"/>
           </a:xfrm>
           <a:prstGeom prst="rect">
@@ -34758,11 +34758,11 @@
         <p:spPr>
           <a:xfrm>
             <a:off x="301752" y="1417320"/>
-            <a:ext cx="6254496" cy="1051560"/>
+            <a:ext cx="6254496" cy="1325880"/>
           </a:xfrm>
           <a:prstGeom prst="roundRect">
             <a:avLst>
-              <a:gd name="adj" fmla="val 4521"/>
+              <a:gd name="adj" fmla="val 3586"/>
             </a:avLst>
           </a:prstGeom>
           <a:solidFill>
@@ -34816,7 +34816,7 @@
         <p:spPr>
           <a:xfrm flipV="0">
             <a:off x="4471416" y="1563624"/>
-            <a:ext cx="914" cy="758952"/>
+            <a:ext cx="914" cy="1033272"/>
           </a:xfrm>
           <a:prstGeom prst="line">
             <a:avLst/>
@@ -34836,7 +34836,7 @@
         </p:nvSpPr>
         <p:spPr>
           <a:xfrm>
-            <a:off x="6291072" y="1623060"/>
+            <a:off x="6291072" y="1906524"/>
             <a:ext cx="91440" cy="91440"/>
           </a:xfrm>
           <a:prstGeom prst="ellipse">
@@ -34885,7 +34885,7 @@
         </p:nvSpPr>
         <p:spPr>
           <a:xfrm>
-            <a:off x="4617720" y="1572768"/>
+            <a:off x="4617720" y="1856232"/>
             <a:ext cx="1664208" cy="146304"/>
           </a:xfrm>
           <a:prstGeom prst="rect">
@@ -34924,8 +34924,8 @@
         </p:nvSpPr>
         <p:spPr>
           <a:xfrm>
-            <a:off x="4617720" y="1819656"/>
-            <a:ext cx="1792224" cy="484632"/>
+            <a:off x="4617720" y="2103120"/>
+            <a:ext cx="1792224" cy="502920"/>
           </a:xfrm>
           <a:prstGeom prst="rect">
             <a:avLst/>
@@ -34967,7 +34967,7 @@
         <p:spPr>
           <a:xfrm flipV="0">
             <a:off x="2386584" y="1563624"/>
-            <a:ext cx="914" cy="758952"/>
+            <a:ext cx="914" cy="1033272"/>
           </a:xfrm>
           <a:prstGeom prst="line">
             <a:avLst/>
@@ -34987,7 +34987,7 @@
         </p:nvSpPr>
         <p:spPr>
           <a:xfrm>
-            <a:off x="4206240" y="1623060"/>
+            <a:off x="4206240" y="1906524"/>
             <a:ext cx="91440" cy="91440"/>
           </a:xfrm>
           <a:prstGeom prst="ellipse">
@@ -35034,7 +35034,7 @@
         </p:nvSpPr>
         <p:spPr>
           <a:xfrm>
-            <a:off x="2532888" y="1572768"/>
+            <a:off x="2532888" y="1856232"/>
             <a:ext cx="1664208" cy="146304"/>
           </a:xfrm>
           <a:prstGeom prst="rect">
@@ -35073,8 +35073,8 @@
         </p:nvSpPr>
         <p:spPr>
           <a:xfrm>
-            <a:off x="2532888" y="1819656"/>
-            <a:ext cx="1792224" cy="484632"/>
+            <a:off x="2532888" y="2103120"/>
+            <a:ext cx="1792224" cy="502920"/>
           </a:xfrm>
           <a:prstGeom prst="rect">
             <a:avLst/>
@@ -35115,7 +35115,7 @@
         </p:nvSpPr>
         <p:spPr>
           <a:xfrm>
-            <a:off x="2121408" y="1623060"/>
+            <a:off x="2121408" y="1906524"/>
             <a:ext cx="91440" cy="91440"/>
           </a:xfrm>
           <a:prstGeom prst="ellipse">
@@ -35162,7 +35162,7 @@
         </p:nvSpPr>
         <p:spPr>
           <a:xfrm>
-            <a:off x="448056" y="1572768"/>
+            <a:off x="448056" y="1856232"/>
             <a:ext cx="1664208" cy="146304"/>
           </a:xfrm>
           <a:prstGeom prst="rect">
@@ -35201,8 +35201,8 @@
         </p:nvSpPr>
         <p:spPr>
           <a:xfrm>
-            <a:off x="448056" y="1819656"/>
-            <a:ext cx="1792224" cy="484632"/>
+            <a:off x="448056" y="2103120"/>
+            <a:ext cx="1792224" cy="502920"/>
           </a:xfrm>
           <a:prstGeom prst="rect">
             <a:avLst/>
@@ -35243,7 +35243,7 @@
         </p:nvSpPr>
         <p:spPr>
           <a:xfrm>
-            <a:off x="301752" y="2615184"/>
+            <a:off x="301752" y="2889504"/>
             <a:ext cx="6254496" cy="274320"/>
           </a:xfrm>
           <a:prstGeom prst="rect">
